--- a/data-eng/decks/w5d3s2.pptx
+++ b/data-eng/decks/w5d3s2.pptx
@@ -3099,7 +3099,7 @@
       <p:grpSpPr/>
       <p:sp>
         <p:nvSpPr>
-          <p:cNvPr id="2" name="Oval 1"/>
+          <p:cNvPr id="2" name="deckgen:decor"/>
           <p:cNvSpPr/>
           <p:nvPr/>
         </p:nvSpPr>
@@ -3129,7 +3129,7 @@
       </p:sp>
       <p:sp>
         <p:nvSpPr>
-          <p:cNvPr id="3" name="Oval 2"/>
+          <p:cNvPr id="3" name="deckgen:decor"/>
           <p:cNvSpPr/>
           <p:nvPr/>
         </p:nvSpPr>
@@ -3159,7 +3159,7 @@
       </p:sp>
       <p:sp>
         <p:nvSpPr>
-          <p:cNvPr id="4" name="Oval 3"/>
+          <p:cNvPr id="4" name="deckgen:decor"/>
           <p:cNvSpPr/>
           <p:nvPr/>
         </p:nvSpPr>
@@ -3189,7 +3189,7 @@
       </p:sp>
       <p:sp>
         <p:nvSpPr>
-          <p:cNvPr id="5" name="Rectangle 4"/>
+          <p:cNvPr id="5" name="deckgen:decor"/>
           <p:cNvSpPr/>
           <p:nvPr/>
         </p:nvSpPr>
@@ -3219,7 +3219,7 @@
       </p:sp>
       <p:sp>
         <p:nvSpPr>
-          <p:cNvPr id="6" name="Oval 5"/>
+          <p:cNvPr id="6" name="deckgen:decor"/>
           <p:cNvSpPr/>
           <p:nvPr/>
         </p:nvSpPr>
@@ -3249,7 +3249,7 @@
       </p:sp>
       <p:sp>
         <p:nvSpPr>
-          <p:cNvPr id="7" name="Oval 6"/>
+          <p:cNvPr id="7" name="deckgen:decor"/>
           <p:cNvSpPr/>
           <p:nvPr/>
         </p:nvSpPr>
@@ -3279,7 +3279,7 @@
       </p:sp>
       <p:sp>
         <p:nvSpPr>
-          <p:cNvPr id="8" name="Oval 7"/>
+          <p:cNvPr id="8" name="deckgen:decor"/>
           <p:cNvSpPr/>
           <p:nvPr/>
         </p:nvSpPr>
@@ -3309,7 +3309,7 @@
       </p:sp>
       <p:sp>
         <p:nvSpPr>
-          <p:cNvPr id="9" name="Oval 8"/>
+          <p:cNvPr id="9" name="deckgen:decor"/>
           <p:cNvSpPr/>
           <p:nvPr/>
         </p:nvSpPr>
@@ -3339,7 +3339,7 @@
       </p:sp>
       <p:sp>
         <p:nvSpPr>
-          <p:cNvPr id="10" name="Rectangle 9"/>
+          <p:cNvPr id="10" name="deckgen:decor"/>
           <p:cNvSpPr/>
           <p:nvPr/>
         </p:nvSpPr>
@@ -3599,7 +3599,7 @@
       <p:grpSpPr/>
       <p:sp>
         <p:nvSpPr>
-          <p:cNvPr id="2" name="Oval 1"/>
+          <p:cNvPr id="2" name="deckgen:decor"/>
           <p:cNvSpPr/>
           <p:nvPr/>
         </p:nvSpPr>
@@ -3629,7 +3629,7 @@
       </p:sp>
       <p:sp>
         <p:nvSpPr>
-          <p:cNvPr id="3" name="Oval 2"/>
+          <p:cNvPr id="3" name="deckgen:decor"/>
           <p:cNvSpPr/>
           <p:nvPr/>
         </p:nvSpPr>
@@ -4406,7 +4406,7 @@
       <p:grpSpPr/>
       <p:sp>
         <p:nvSpPr>
-          <p:cNvPr id="2" name="Oval 1"/>
+          <p:cNvPr id="2" name="deckgen:decor"/>
           <p:cNvSpPr/>
           <p:nvPr/>
         </p:nvSpPr>
@@ -4436,7 +4436,7 @@
       </p:sp>
       <p:sp>
         <p:nvSpPr>
-          <p:cNvPr id="3" name="Oval 2"/>
+          <p:cNvPr id="3" name="deckgen:decor"/>
           <p:cNvSpPr/>
           <p:nvPr/>
         </p:nvSpPr>
@@ -4466,7 +4466,7 @@
       </p:sp>
       <p:sp>
         <p:nvSpPr>
-          <p:cNvPr id="4" name="Oval 3"/>
+          <p:cNvPr id="4" name="deckgen:decor"/>
           <p:cNvSpPr/>
           <p:nvPr/>
         </p:nvSpPr>
@@ -5397,7 +5397,7 @@
       <p:grpSpPr/>
       <p:sp>
         <p:nvSpPr>
-          <p:cNvPr id="2" name="Oval 1"/>
+          <p:cNvPr id="2" name="deckgen:decor"/>
           <p:cNvSpPr/>
           <p:nvPr/>
         </p:nvSpPr>
@@ -5427,7 +5427,7 @@
       </p:sp>
       <p:sp>
         <p:nvSpPr>
-          <p:cNvPr id="3" name="Oval 2"/>
+          <p:cNvPr id="3" name="deckgen:decor"/>
           <p:cNvSpPr/>
           <p:nvPr/>
         </p:nvSpPr>
@@ -5457,7 +5457,7 @@
       </p:sp>
       <p:sp>
         <p:nvSpPr>
-          <p:cNvPr id="4" name="Oval 3"/>
+          <p:cNvPr id="4" name="deckgen:decor"/>
           <p:cNvSpPr/>
           <p:nvPr/>
         </p:nvSpPr>
@@ -6590,7 +6590,7 @@
       <p:grpSpPr/>
       <p:sp>
         <p:nvSpPr>
-          <p:cNvPr id="2" name="Oval 1"/>
+          <p:cNvPr id="2" name="deckgen:decor"/>
           <p:cNvSpPr/>
           <p:nvPr/>
         </p:nvSpPr>
@@ -6620,7 +6620,7 @@
       </p:sp>
       <p:sp>
         <p:nvSpPr>
-          <p:cNvPr id="3" name="Oval 2"/>
+          <p:cNvPr id="3" name="deckgen:decor"/>
           <p:cNvSpPr/>
           <p:nvPr/>
         </p:nvSpPr>
@@ -6650,7 +6650,7 @@
       </p:sp>
       <p:sp>
         <p:nvSpPr>
-          <p:cNvPr id="4" name="Oval 3"/>
+          <p:cNvPr id="4" name="deckgen:decor"/>
           <p:cNvSpPr/>
           <p:nvPr/>
         </p:nvSpPr>
@@ -6972,7 +6972,7 @@
                 <a:ea typeface="Pretendard"/>
                 <a:cs typeface="Pretendard"/>
               </a:rPr>
-              <a:t>image: minio/minio:latest</a:t>
+              <a:t>image: pgsty/minio:latest</a:t>
             </a:r>
           </a:p>
         </p:txBody>
@@ -7651,7 +7651,7 @@
       <p:grpSpPr/>
       <p:sp>
         <p:nvSpPr>
-          <p:cNvPr id="2" name="Oval 1"/>
+          <p:cNvPr id="2" name="deckgen:decor"/>
           <p:cNvSpPr/>
           <p:nvPr/>
         </p:nvSpPr>
@@ -7681,7 +7681,7 @@
       </p:sp>
       <p:sp>
         <p:nvSpPr>
-          <p:cNvPr id="3" name="Oval 2"/>
+          <p:cNvPr id="3" name="deckgen:decor"/>
           <p:cNvSpPr/>
           <p:nvPr/>
         </p:nvSpPr>
@@ -7711,7 +7711,7 @@
       </p:sp>
       <p:sp>
         <p:nvSpPr>
-          <p:cNvPr id="4" name="Oval 3"/>
+          <p:cNvPr id="4" name="deckgen:decor"/>
           <p:cNvSpPr/>
           <p:nvPr/>
         </p:nvSpPr>
@@ -8744,7 +8744,7 @@
       <p:grpSpPr/>
       <p:sp>
         <p:nvSpPr>
-          <p:cNvPr id="2" name="Oval 1"/>
+          <p:cNvPr id="2" name="deckgen:decor"/>
           <p:cNvSpPr/>
           <p:nvPr/>
         </p:nvSpPr>
@@ -8774,7 +8774,7 @@
       </p:sp>
       <p:sp>
         <p:nvSpPr>
-          <p:cNvPr id="3" name="Oval 2"/>
+          <p:cNvPr id="3" name="deckgen:decor"/>
           <p:cNvSpPr/>
           <p:nvPr/>
         </p:nvSpPr>
@@ -8804,7 +8804,7 @@
       </p:sp>
       <p:sp>
         <p:nvSpPr>
-          <p:cNvPr id="4" name="Oval 3"/>
+          <p:cNvPr id="4" name="deckgen:decor"/>
           <p:cNvSpPr/>
           <p:nvPr/>
         </p:nvSpPr>
@@ -9842,7 +9842,7 @@
       <p:grpSpPr/>
       <p:sp>
         <p:nvSpPr>
-          <p:cNvPr id="2" name="Oval 1"/>
+          <p:cNvPr id="2" name="deckgen:decor"/>
           <p:cNvSpPr/>
           <p:nvPr/>
         </p:nvSpPr>
@@ -9872,7 +9872,7 @@
       </p:sp>
       <p:sp>
         <p:nvSpPr>
-          <p:cNvPr id="3" name="Oval 2"/>
+          <p:cNvPr id="3" name="deckgen:decor"/>
           <p:cNvSpPr/>
           <p:nvPr/>
         </p:nvSpPr>
@@ -9902,7 +9902,7 @@
       </p:sp>
       <p:sp>
         <p:nvSpPr>
-          <p:cNvPr id="4" name="Oval 3"/>
+          <p:cNvPr id="4" name="deckgen:decor"/>
           <p:cNvSpPr/>
           <p:nvPr/>
         </p:nvSpPr>
@@ -11473,7 +11473,7 @@
       <p:grpSpPr/>
       <p:sp>
         <p:nvSpPr>
-          <p:cNvPr id="2" name="Oval 1"/>
+          <p:cNvPr id="2" name="deckgen:decor"/>
           <p:cNvSpPr/>
           <p:nvPr/>
         </p:nvSpPr>
@@ -11503,7 +11503,7 @@
       </p:sp>
       <p:sp>
         <p:nvSpPr>
-          <p:cNvPr id="3" name="Oval 2"/>
+          <p:cNvPr id="3" name="deckgen:decor"/>
           <p:cNvSpPr/>
           <p:nvPr/>
         </p:nvSpPr>
@@ -11533,7 +11533,7 @@
       </p:sp>
       <p:sp>
         <p:nvSpPr>
-          <p:cNvPr id="4" name="Oval 3"/>
+          <p:cNvPr id="4" name="deckgen:decor"/>
           <p:cNvSpPr/>
           <p:nvPr/>
         </p:nvSpPr>
@@ -12734,7 +12734,7 @@
       <p:grpSpPr/>
       <p:sp>
         <p:nvSpPr>
-          <p:cNvPr id="2" name="Oval 1"/>
+          <p:cNvPr id="2" name="deckgen:decor"/>
           <p:cNvSpPr/>
           <p:nvPr/>
         </p:nvSpPr>
@@ -12764,7 +12764,7 @@
       </p:sp>
       <p:sp>
         <p:nvSpPr>
-          <p:cNvPr id="3" name="Oval 2"/>
+          <p:cNvPr id="3" name="deckgen:decor"/>
           <p:cNvSpPr/>
           <p:nvPr/>
         </p:nvSpPr>
@@ -12794,7 +12794,7 @@
       </p:sp>
       <p:sp>
         <p:nvSpPr>
-          <p:cNvPr id="4" name="Oval 3"/>
+          <p:cNvPr id="4" name="deckgen:decor"/>
           <p:cNvSpPr/>
           <p:nvPr/>
         </p:nvSpPr>

--- a/data-eng/decks/w5d3s2.pptx
+++ b/data-eng/decks/w5d3s2.pptx
@@ -15,6 +15,7 @@
     <p:sldId id="263" r:id="rId14"/>
     <p:sldId id="264" r:id="rId15"/>
     <p:sldId id="265" r:id="rId16"/>
+    <p:sldId id="266" r:id="rId17"/>
   </p:sldIdLst>
   <p:sldSz cx="18288000" cy="10287000" type="screen4x3"/>
   <p:notesSz cx="6858000" cy="9144000"/>
@@ -3433,7 +3434,7 @@
                 <a:ea typeface="Pretendard"/>
                 <a:cs typeface="Pretendard"/>
               </a:rPr>
-              <a:t>5-3 · Iceberg · MinIO 연결과 대용량 분석 준비 · 실습 1.5H</a:t>
+              <a:t>5-3 · Iceberg · MinIO 연결 · 실습 1.5H</a:t>
             </a:r>
           </a:p>
         </p:txBody>
@@ -3515,7 +3516,7 @@
                 <a:ea typeface="Pretendard"/>
                 <a:cs typeface="Pretendard"/>
               </a:rPr>
-              <a:t>MinIO 를 클러스터에 붙이고, Parquet 왕복으로 확인</a:t>
+              <a:t>MinIO 를 붙이고, Parquet 왕복으로 확인</a:t>
             </a:r>
           </a:p>
         </p:txBody>
@@ -3605,6 +3606,1068 @@
         </p:nvSpPr>
         <p:spPr>
           <a:xfrm>
+            <a:off x="15811500" y="8382000"/>
+            <a:ext cx="4953000" cy="4953000"/>
+          </a:xfrm>
+          <a:prstGeom prst="ellipse">
+            <a:avLst/>
+          </a:prstGeom>
+          <a:solidFill>
+            <a:srgbClr val="F3F6FC"/>
+          </a:solidFill>
+          <a:ln>
+            <a:noFill/>
+          </a:ln>
+          <a:effectLst/>
+        </p:spPr>
+        <p:txBody>
+          <a:bodyPr rtlCol="0" anchor="ctr" wrap="square"/>
+          <a:lstStyle/>
+          <a:p>
+            <a:pPr algn="ctr"/>
+          </a:p>
+        </p:txBody>
+      </p:sp>
+      <p:sp>
+        <p:nvSpPr>
+          <p:cNvPr id="3" name="deckgen:decor"/>
+          <p:cNvSpPr/>
+          <p:nvPr/>
+        </p:nvSpPr>
+        <p:spPr>
+          <a:xfrm>
+            <a:off x="16859250" y="9429750"/>
+            <a:ext cx="2857500" cy="2857500"/>
+          </a:xfrm>
+          <a:prstGeom prst="ellipse">
+            <a:avLst/>
+          </a:prstGeom>
+          <a:solidFill>
+            <a:srgbClr val="FFFFFF"/>
+          </a:solidFill>
+          <a:ln>
+            <a:noFill/>
+          </a:ln>
+          <a:effectLst/>
+        </p:spPr>
+        <p:txBody>
+          <a:bodyPr rtlCol="0" anchor="ctr" wrap="square"/>
+          <a:lstStyle/>
+          <a:p>
+            <a:pPr algn="ctr"/>
+          </a:p>
+        </p:txBody>
+      </p:sp>
+      <p:sp>
+        <p:nvSpPr>
+          <p:cNvPr id="4" name="deckgen:decor"/>
+          <p:cNvSpPr/>
+          <p:nvPr/>
+        </p:nvSpPr>
+        <p:spPr>
+          <a:xfrm>
+            <a:off x="-1428750" y="1428750"/>
+            <a:ext cx="2857500" cy="2857500"/>
+          </a:xfrm>
+          <a:prstGeom prst="ellipse">
+            <a:avLst/>
+          </a:prstGeom>
+          <a:solidFill>
+            <a:srgbClr val="F7F8FA"/>
+          </a:solidFill>
+          <a:ln>
+            <a:noFill/>
+          </a:ln>
+          <a:effectLst/>
+        </p:spPr>
+        <p:txBody>
+          <a:bodyPr rtlCol="0" anchor="ctr" wrap="square"/>
+          <a:lstStyle/>
+          <a:p>
+            <a:pPr algn="ctr"/>
+          </a:p>
+        </p:txBody>
+      </p:sp>
+      <p:sp>
+        <p:nvSpPr>
+          <p:cNvPr id="5" name="TextBox 4"/>
+          <p:cNvSpPr txBox="1"/>
+          <p:nvPr/>
+        </p:nvSpPr>
+        <p:spPr>
+          <a:xfrm>
+            <a:off x="1143000" y="838200"/>
+            <a:ext cx="16002000" cy="342900"/>
+          </a:xfrm>
+          <a:prstGeom prst="rect">
+            <a:avLst/>
+          </a:prstGeom>
+          <a:noFill/>
+        </p:spPr>
+        <p:txBody>
+          <a:bodyPr wrap="square" lIns="0" rIns="0" tIns="0" bIns="0" anchor="t">
+            <a:spAutoFit/>
+          </a:bodyPr>
+          <a:lstStyle/>
+          <a:p>
+            <a:pPr algn="l">
+              <a:lnSpc>
+                <a:spcPct val="100000"/>
+              </a:lnSpc>
+            </a:pPr>
+            <a:r>
+              <a:rPr sz="1950" b="1" spc="160">
+                <a:solidFill>
+                  <a:srgbClr val="1E5BC6"/>
+                </a:solidFill>
+                <a:latin typeface="Pretendard"/>
+                <a:ea typeface="Pretendard"/>
+                <a:cs typeface="Pretendard"/>
+              </a:rPr>
+              <a:t>확인 포인트</a:t>
+            </a:r>
+          </a:p>
+        </p:txBody>
+      </p:sp>
+      <p:sp>
+        <p:nvSpPr>
+          <p:cNvPr id="6" name="TextBox 5"/>
+          <p:cNvSpPr txBox="1"/>
+          <p:nvPr/>
+        </p:nvSpPr>
+        <p:spPr>
+          <a:xfrm>
+            <a:off x="1143000" y="1162050"/>
+            <a:ext cx="16002000" cy="762000"/>
+          </a:xfrm>
+          <a:prstGeom prst="rect">
+            <a:avLst/>
+          </a:prstGeom>
+          <a:noFill/>
+        </p:spPr>
+        <p:txBody>
+          <a:bodyPr wrap="square" lIns="0" rIns="0" tIns="0" bIns="0" anchor="t">
+            <a:spAutoFit/>
+          </a:bodyPr>
+          <a:lstStyle/>
+          <a:p>
+            <a:pPr algn="l">
+              <a:lnSpc>
+                <a:spcPct val="100000"/>
+              </a:lnSpc>
+            </a:pPr>
+            <a:r>
+              <a:rPr sz="5100" b="1">
+                <a:solidFill>
+                  <a:srgbClr val="0D2B5E"/>
+                </a:solidFill>
+                <a:latin typeface="Pretendard"/>
+                <a:ea typeface="Pretendard"/>
+                <a:cs typeface="Pretendard"/>
+              </a:rPr>
+              <a:t>이 1.5시간이 끝날 때 확인할 것</a:t>
+            </a:r>
+          </a:p>
+        </p:txBody>
+      </p:sp>
+      <p:sp>
+        <p:nvSpPr>
+          <p:cNvPr id="7" name="Rectangle 6"/>
+          <p:cNvSpPr/>
+          <p:nvPr/>
+        </p:nvSpPr>
+        <p:spPr>
+          <a:xfrm>
+            <a:off x="1143000" y="2038350"/>
+            <a:ext cx="16002000" cy="28575"/>
+          </a:xfrm>
+          <a:prstGeom prst="rect">
+            <a:avLst/>
+          </a:prstGeom>
+          <a:solidFill>
+            <a:srgbClr val="0D2B5E"/>
+          </a:solidFill>
+          <a:ln>
+            <a:noFill/>
+          </a:ln>
+          <a:effectLst/>
+        </p:spPr>
+        <p:txBody>
+          <a:bodyPr rtlCol="0" anchor="ctr" wrap="square"/>
+          <a:lstStyle/>
+          <a:p>
+            <a:pPr algn="ctr"/>
+          </a:p>
+        </p:txBody>
+      </p:sp>
+      <p:sp>
+        <p:nvSpPr>
+          <p:cNvPr id="8" name="Rounded Rectangle 7"/>
+          <p:cNvSpPr/>
+          <p:nvPr/>
+        </p:nvSpPr>
+        <p:spPr>
+          <a:xfrm>
+            <a:off x="1143000" y="2990850"/>
+            <a:ext cx="16002000" cy="819150"/>
+          </a:xfrm>
+          <a:prstGeom prst="roundRect">
+            <a:avLst>
+              <a:gd name="adj" fmla="val 5813"/>
+            </a:avLst>
+          </a:prstGeom>
+          <a:solidFill>
+            <a:srgbClr val="FAFBFD"/>
+          </a:solidFill>
+          <a:ln w="9525">
+            <a:solidFill>
+              <a:srgbClr val="DCE1E8"/>
+            </a:solidFill>
+          </a:ln>
+          <a:effectLst/>
+        </p:spPr>
+        <p:txBody>
+          <a:bodyPr rtlCol="0" anchor="ctr" wrap="square"/>
+          <a:lstStyle/>
+          <a:p>
+            <a:pPr algn="ctr"/>
+          </a:p>
+        </p:txBody>
+      </p:sp>
+      <p:sp>
+        <p:nvSpPr>
+          <p:cNvPr id="9" name="Oval 8"/>
+          <p:cNvSpPr/>
+          <p:nvPr/>
+        </p:nvSpPr>
+        <p:spPr>
+          <a:xfrm>
+            <a:off x="1390650" y="3133725"/>
+            <a:ext cx="533400" cy="533400"/>
+          </a:xfrm>
+          <a:prstGeom prst="ellipse">
+            <a:avLst/>
+          </a:prstGeom>
+          <a:solidFill>
+            <a:srgbClr val="0D2B5E"/>
+          </a:solidFill>
+          <a:ln>
+            <a:noFill/>
+          </a:ln>
+          <a:effectLst/>
+        </p:spPr>
+        <p:txBody>
+          <a:bodyPr rtlCol="0" anchor="ctr" wrap="square"/>
+          <a:lstStyle/>
+          <a:p>
+            <a:pPr algn="ctr"/>
+          </a:p>
+        </p:txBody>
+      </p:sp>
+      <p:sp>
+        <p:nvSpPr>
+          <p:cNvPr id="10" name="TextBox 9"/>
+          <p:cNvSpPr txBox="1"/>
+          <p:nvPr/>
+        </p:nvSpPr>
+        <p:spPr>
+          <a:xfrm>
+            <a:off x="1390650" y="3257550"/>
+            <a:ext cx="533400" cy="323850"/>
+          </a:xfrm>
+          <a:prstGeom prst="rect">
+            <a:avLst/>
+          </a:prstGeom>
+          <a:noFill/>
+        </p:spPr>
+        <p:txBody>
+          <a:bodyPr wrap="square" lIns="0" rIns="0" tIns="0" bIns="0" anchor="t">
+            <a:spAutoFit/>
+          </a:bodyPr>
+          <a:lstStyle/>
+          <a:p>
+            <a:pPr algn="ctr">
+              <a:lnSpc>
+                <a:spcPct val="100000"/>
+              </a:lnSpc>
+            </a:pPr>
+            <a:r>
+              <a:rPr sz="2100" b="1">
+                <a:solidFill>
+                  <a:srgbClr val="FFFFFF"/>
+                </a:solidFill>
+                <a:latin typeface="Pretendard"/>
+                <a:ea typeface="Pretendard"/>
+                <a:cs typeface="Pretendard"/>
+              </a:rPr>
+              <a:t>1</a:t>
+            </a:r>
+          </a:p>
+        </p:txBody>
+      </p:sp>
+      <p:sp>
+        <p:nvSpPr>
+          <p:cNvPr id="11" name="TextBox 10"/>
+          <p:cNvSpPr txBox="1"/>
+          <p:nvPr/>
+        </p:nvSpPr>
+        <p:spPr>
+          <a:xfrm>
+            <a:off x="2190750" y="2990850"/>
+            <a:ext cx="14573250" cy="819150"/>
+          </a:xfrm>
+          <a:prstGeom prst="rect">
+            <a:avLst/>
+          </a:prstGeom>
+          <a:noFill/>
+        </p:spPr>
+        <p:txBody>
+          <a:bodyPr wrap="square" lIns="0" rIns="0" tIns="0" bIns="0" anchor="ctr">
+            <a:spAutoFit/>
+          </a:bodyPr>
+          <a:lstStyle/>
+          <a:p>
+            <a:pPr algn="l">
+              <a:lnSpc>
+                <a:spcPct val="100000"/>
+              </a:lnSpc>
+            </a:pPr>
+            <a:r>
+              <a:rPr sz="2325" b="1">
+                <a:solidFill>
+                  <a:srgbClr val="0D2B5E"/>
+                </a:solidFill>
+                <a:latin typeface="Pretendard"/>
+                <a:ea typeface="Pretendard"/>
+                <a:cs typeface="Pretendard"/>
+              </a:rPr>
+              <a:t>docker compose ps 에 컨테이너 4개가 Up 이다</a:t>
+            </a:r>
+          </a:p>
+        </p:txBody>
+      </p:sp>
+      <p:sp>
+        <p:nvSpPr>
+          <p:cNvPr id="12" name="Rounded Rectangle 11"/>
+          <p:cNvSpPr/>
+          <p:nvPr/>
+        </p:nvSpPr>
+        <p:spPr>
+          <a:xfrm>
+            <a:off x="1143000" y="3981450"/>
+            <a:ext cx="16002000" cy="819150"/>
+          </a:xfrm>
+          <a:prstGeom prst="roundRect">
+            <a:avLst>
+              <a:gd name="adj" fmla="val 5813"/>
+            </a:avLst>
+          </a:prstGeom>
+          <a:solidFill>
+            <a:srgbClr val="FAFBFD"/>
+          </a:solidFill>
+          <a:ln w="9525">
+            <a:solidFill>
+              <a:srgbClr val="DCE1E8"/>
+            </a:solidFill>
+          </a:ln>
+          <a:effectLst/>
+        </p:spPr>
+        <p:txBody>
+          <a:bodyPr rtlCol="0" anchor="ctr" wrap="square"/>
+          <a:lstStyle/>
+          <a:p>
+            <a:pPr algn="ctr"/>
+          </a:p>
+        </p:txBody>
+      </p:sp>
+      <p:sp>
+        <p:nvSpPr>
+          <p:cNvPr id="13" name="Oval 12"/>
+          <p:cNvSpPr/>
+          <p:nvPr/>
+        </p:nvSpPr>
+        <p:spPr>
+          <a:xfrm>
+            <a:off x="1390650" y="4124325"/>
+            <a:ext cx="533400" cy="533400"/>
+          </a:xfrm>
+          <a:prstGeom prst="ellipse">
+            <a:avLst/>
+          </a:prstGeom>
+          <a:solidFill>
+            <a:srgbClr val="0D2B5E"/>
+          </a:solidFill>
+          <a:ln>
+            <a:noFill/>
+          </a:ln>
+          <a:effectLst/>
+        </p:spPr>
+        <p:txBody>
+          <a:bodyPr rtlCol="0" anchor="ctr" wrap="square"/>
+          <a:lstStyle/>
+          <a:p>
+            <a:pPr algn="ctr"/>
+          </a:p>
+        </p:txBody>
+      </p:sp>
+      <p:sp>
+        <p:nvSpPr>
+          <p:cNvPr id="14" name="TextBox 13"/>
+          <p:cNvSpPr txBox="1"/>
+          <p:nvPr/>
+        </p:nvSpPr>
+        <p:spPr>
+          <a:xfrm>
+            <a:off x="1390650" y="4248150"/>
+            <a:ext cx="533400" cy="323850"/>
+          </a:xfrm>
+          <a:prstGeom prst="rect">
+            <a:avLst/>
+          </a:prstGeom>
+          <a:noFill/>
+        </p:spPr>
+        <p:txBody>
+          <a:bodyPr wrap="square" lIns="0" rIns="0" tIns="0" bIns="0" anchor="t">
+            <a:spAutoFit/>
+          </a:bodyPr>
+          <a:lstStyle/>
+          <a:p>
+            <a:pPr algn="ctr">
+              <a:lnSpc>
+                <a:spcPct val="100000"/>
+              </a:lnSpc>
+            </a:pPr>
+            <a:r>
+              <a:rPr sz="2100" b="1">
+                <a:solidFill>
+                  <a:srgbClr val="FFFFFF"/>
+                </a:solidFill>
+                <a:latin typeface="Pretendard"/>
+                <a:ea typeface="Pretendard"/>
+                <a:cs typeface="Pretendard"/>
+              </a:rPr>
+              <a:t>2</a:t>
+            </a:r>
+          </a:p>
+        </p:txBody>
+      </p:sp>
+      <p:sp>
+        <p:nvSpPr>
+          <p:cNvPr id="15" name="TextBox 14"/>
+          <p:cNvSpPr txBox="1"/>
+          <p:nvPr/>
+        </p:nvSpPr>
+        <p:spPr>
+          <a:xfrm>
+            <a:off x="2190750" y="3981450"/>
+            <a:ext cx="14573250" cy="819150"/>
+          </a:xfrm>
+          <a:prstGeom prst="rect">
+            <a:avLst/>
+          </a:prstGeom>
+          <a:noFill/>
+        </p:spPr>
+        <p:txBody>
+          <a:bodyPr wrap="square" lIns="0" rIns="0" tIns="0" bIns="0" anchor="ctr">
+            <a:spAutoFit/>
+          </a:bodyPr>
+          <a:lstStyle/>
+          <a:p>
+            <a:pPr algn="l">
+              <a:lnSpc>
+                <a:spcPct val="100000"/>
+              </a:lnSpc>
+            </a:pPr>
+            <a:r>
+              <a:rPr sz="2325" b="1">
+                <a:solidFill>
+                  <a:srgbClr val="0D2B5E"/>
+                </a:solidFill>
+                <a:latin typeface="Pretendard"/>
+                <a:ea typeface="Pretendard"/>
+                <a:cs typeface="Pretendard"/>
+              </a:rPr>
+              <a:t>localhost:9001 에 admin / password123 으로 들어가진다</a:t>
+            </a:r>
+          </a:p>
+        </p:txBody>
+      </p:sp>
+      <p:sp>
+        <p:nvSpPr>
+          <p:cNvPr id="16" name="Rounded Rectangle 15"/>
+          <p:cNvSpPr/>
+          <p:nvPr/>
+        </p:nvSpPr>
+        <p:spPr>
+          <a:xfrm>
+            <a:off x="1143000" y="4972050"/>
+            <a:ext cx="16002000" cy="819150"/>
+          </a:xfrm>
+          <a:prstGeom prst="roundRect">
+            <a:avLst>
+              <a:gd name="adj" fmla="val 5813"/>
+            </a:avLst>
+          </a:prstGeom>
+          <a:solidFill>
+            <a:srgbClr val="FAFBFD"/>
+          </a:solidFill>
+          <a:ln w="9525">
+            <a:solidFill>
+              <a:srgbClr val="DCE1E8"/>
+            </a:solidFill>
+          </a:ln>
+          <a:effectLst/>
+        </p:spPr>
+        <p:txBody>
+          <a:bodyPr rtlCol="0" anchor="ctr" wrap="square"/>
+          <a:lstStyle/>
+          <a:p>
+            <a:pPr algn="ctr"/>
+          </a:p>
+        </p:txBody>
+      </p:sp>
+      <p:sp>
+        <p:nvSpPr>
+          <p:cNvPr id="17" name="Oval 16"/>
+          <p:cNvSpPr/>
+          <p:nvPr/>
+        </p:nvSpPr>
+        <p:spPr>
+          <a:xfrm>
+            <a:off x="1390650" y="5114925"/>
+            <a:ext cx="533400" cy="533400"/>
+          </a:xfrm>
+          <a:prstGeom prst="ellipse">
+            <a:avLst/>
+          </a:prstGeom>
+          <a:solidFill>
+            <a:srgbClr val="0D2B5E"/>
+          </a:solidFill>
+          <a:ln>
+            <a:noFill/>
+          </a:ln>
+          <a:effectLst/>
+        </p:spPr>
+        <p:txBody>
+          <a:bodyPr rtlCol="0" anchor="ctr" wrap="square"/>
+          <a:lstStyle/>
+          <a:p>
+            <a:pPr algn="ctr"/>
+          </a:p>
+        </p:txBody>
+      </p:sp>
+      <p:sp>
+        <p:nvSpPr>
+          <p:cNvPr id="18" name="TextBox 17"/>
+          <p:cNvSpPr txBox="1"/>
+          <p:nvPr/>
+        </p:nvSpPr>
+        <p:spPr>
+          <a:xfrm>
+            <a:off x="1390650" y="5238750"/>
+            <a:ext cx="533400" cy="323850"/>
+          </a:xfrm>
+          <a:prstGeom prst="rect">
+            <a:avLst/>
+          </a:prstGeom>
+          <a:noFill/>
+        </p:spPr>
+        <p:txBody>
+          <a:bodyPr wrap="square" lIns="0" rIns="0" tIns="0" bIns="0" anchor="t">
+            <a:spAutoFit/>
+          </a:bodyPr>
+          <a:lstStyle/>
+          <a:p>
+            <a:pPr algn="ctr">
+              <a:lnSpc>
+                <a:spcPct val="100000"/>
+              </a:lnSpc>
+            </a:pPr>
+            <a:r>
+              <a:rPr sz="2100" b="1">
+                <a:solidFill>
+                  <a:srgbClr val="FFFFFF"/>
+                </a:solidFill>
+                <a:latin typeface="Pretendard"/>
+                <a:ea typeface="Pretendard"/>
+                <a:cs typeface="Pretendard"/>
+              </a:rPr>
+              <a:t>3</a:t>
+            </a:r>
+          </a:p>
+        </p:txBody>
+      </p:sp>
+      <p:sp>
+        <p:nvSpPr>
+          <p:cNvPr id="19" name="TextBox 18"/>
+          <p:cNvSpPr txBox="1"/>
+          <p:nvPr/>
+        </p:nvSpPr>
+        <p:spPr>
+          <a:xfrm>
+            <a:off x="2190750" y="4972050"/>
+            <a:ext cx="14573250" cy="819150"/>
+          </a:xfrm>
+          <a:prstGeom prst="rect">
+            <a:avLst/>
+          </a:prstGeom>
+          <a:noFill/>
+        </p:spPr>
+        <p:txBody>
+          <a:bodyPr wrap="square" lIns="0" rIns="0" tIns="0" bIns="0" anchor="ctr">
+            <a:spAutoFit/>
+          </a:bodyPr>
+          <a:lstStyle/>
+          <a:p>
+            <a:pPr algn="l">
+              <a:lnSpc>
+                <a:spcPct val="100000"/>
+              </a:lnSpc>
+            </a:pPr>
+            <a:r>
+              <a:rPr sz="2325" b="1">
+                <a:solidFill>
+                  <a:srgbClr val="0D2B5E"/>
+                </a:solidFill>
+                <a:latin typeface="Pretendard"/>
+                <a:ea typeface="Pretendard"/>
+                <a:cs typeface="Pretendard"/>
+              </a:rPr>
+              <a:t>bash lake-pyspark.sh 로 &gt;&gt;&gt; 가 뜬다 (두 번째부터 10~20초)</a:t>
+            </a:r>
+          </a:p>
+        </p:txBody>
+      </p:sp>
+      <p:sp>
+        <p:nvSpPr>
+          <p:cNvPr id="20" name="Rounded Rectangle 19"/>
+          <p:cNvSpPr/>
+          <p:nvPr/>
+        </p:nvSpPr>
+        <p:spPr>
+          <a:xfrm>
+            <a:off x="1143000" y="5962650"/>
+            <a:ext cx="16002000" cy="819150"/>
+          </a:xfrm>
+          <a:prstGeom prst="roundRect">
+            <a:avLst>
+              <a:gd name="adj" fmla="val 5813"/>
+            </a:avLst>
+          </a:prstGeom>
+          <a:solidFill>
+            <a:srgbClr val="FAFBFD"/>
+          </a:solidFill>
+          <a:ln w="9525">
+            <a:solidFill>
+              <a:srgbClr val="DCE1E8"/>
+            </a:solidFill>
+          </a:ln>
+          <a:effectLst/>
+        </p:spPr>
+        <p:txBody>
+          <a:bodyPr rtlCol="0" anchor="ctr" wrap="square"/>
+          <a:lstStyle/>
+          <a:p>
+            <a:pPr algn="ctr"/>
+          </a:p>
+        </p:txBody>
+      </p:sp>
+      <p:sp>
+        <p:nvSpPr>
+          <p:cNvPr id="21" name="Oval 20"/>
+          <p:cNvSpPr/>
+          <p:nvPr/>
+        </p:nvSpPr>
+        <p:spPr>
+          <a:xfrm>
+            <a:off x="1390650" y="6105525"/>
+            <a:ext cx="533400" cy="533400"/>
+          </a:xfrm>
+          <a:prstGeom prst="ellipse">
+            <a:avLst/>
+          </a:prstGeom>
+          <a:solidFill>
+            <a:srgbClr val="0D2B5E"/>
+          </a:solidFill>
+          <a:ln>
+            <a:noFill/>
+          </a:ln>
+          <a:effectLst/>
+        </p:spPr>
+        <p:txBody>
+          <a:bodyPr rtlCol="0" anchor="ctr" wrap="square"/>
+          <a:lstStyle/>
+          <a:p>
+            <a:pPr algn="ctr"/>
+          </a:p>
+        </p:txBody>
+      </p:sp>
+      <p:sp>
+        <p:nvSpPr>
+          <p:cNvPr id="22" name="TextBox 21"/>
+          <p:cNvSpPr txBox="1"/>
+          <p:nvPr/>
+        </p:nvSpPr>
+        <p:spPr>
+          <a:xfrm>
+            <a:off x="1390650" y="6229350"/>
+            <a:ext cx="533400" cy="323850"/>
+          </a:xfrm>
+          <a:prstGeom prst="rect">
+            <a:avLst/>
+          </a:prstGeom>
+          <a:noFill/>
+        </p:spPr>
+        <p:txBody>
+          <a:bodyPr wrap="square" lIns="0" rIns="0" tIns="0" bIns="0" anchor="t">
+            <a:spAutoFit/>
+          </a:bodyPr>
+          <a:lstStyle/>
+          <a:p>
+            <a:pPr algn="ctr">
+              <a:lnSpc>
+                <a:spcPct val="100000"/>
+              </a:lnSpc>
+            </a:pPr>
+            <a:r>
+              <a:rPr sz="2100" b="1">
+                <a:solidFill>
+                  <a:srgbClr val="FFFFFF"/>
+                </a:solidFill>
+                <a:latin typeface="Pretendard"/>
+                <a:ea typeface="Pretendard"/>
+                <a:cs typeface="Pretendard"/>
+              </a:rPr>
+              <a:t>4</a:t>
+            </a:r>
+          </a:p>
+        </p:txBody>
+      </p:sp>
+      <p:sp>
+        <p:nvSpPr>
+          <p:cNvPr id="23" name="TextBox 22"/>
+          <p:cNvSpPr txBox="1"/>
+          <p:nvPr/>
+        </p:nvSpPr>
+        <p:spPr>
+          <a:xfrm>
+            <a:off x="2190750" y="5962650"/>
+            <a:ext cx="14573250" cy="819150"/>
+          </a:xfrm>
+          <a:prstGeom prst="rect">
+            <a:avLst/>
+          </a:prstGeom>
+          <a:noFill/>
+        </p:spPr>
+        <p:txBody>
+          <a:bodyPr wrap="square" lIns="0" rIns="0" tIns="0" bIns="0" anchor="ctr">
+            <a:spAutoFit/>
+          </a:bodyPr>
+          <a:lstStyle/>
+          <a:p>
+            <a:pPr algn="l">
+              <a:lnSpc>
+                <a:spcPct val="100000"/>
+              </a:lnSpc>
+            </a:pPr>
+            <a:r>
+              <a:rPr sz="2325" b="1">
+                <a:solidFill>
+                  <a:srgbClr val="0D2B5E"/>
+                </a:solidFill>
+                <a:latin typeface="Pretendard"/>
+                <a:ea typeface="Pretendard"/>
+                <a:cs typeface="Pretendard"/>
+              </a:rPr>
+              <a:t>count 100 · 파티션 4 · smoke-test part 4개 · smoke-one 1개</a:t>
+            </a:r>
+          </a:p>
+        </p:txBody>
+      </p:sp>
+      <p:sp>
+        <p:nvSpPr>
+          <p:cNvPr id="24" name="Rounded Rectangle 23"/>
+          <p:cNvSpPr/>
+          <p:nvPr/>
+        </p:nvSpPr>
+        <p:spPr>
+          <a:xfrm>
+            <a:off x="1143000" y="6953250"/>
+            <a:ext cx="16002000" cy="819150"/>
+          </a:xfrm>
+          <a:prstGeom prst="roundRect">
+            <a:avLst>
+              <a:gd name="adj" fmla="val 5813"/>
+            </a:avLst>
+          </a:prstGeom>
+          <a:solidFill>
+            <a:srgbClr val="FAFBFD"/>
+          </a:solidFill>
+          <a:ln w="9525">
+            <a:solidFill>
+              <a:srgbClr val="DCE1E8"/>
+            </a:solidFill>
+          </a:ln>
+          <a:effectLst/>
+        </p:spPr>
+        <p:txBody>
+          <a:bodyPr rtlCol="0" anchor="ctr" wrap="square"/>
+          <a:lstStyle/>
+          <a:p>
+            <a:pPr algn="ctr"/>
+          </a:p>
+        </p:txBody>
+      </p:sp>
+      <p:sp>
+        <p:nvSpPr>
+          <p:cNvPr id="25" name="Oval 24"/>
+          <p:cNvSpPr/>
+          <p:nvPr/>
+        </p:nvSpPr>
+        <p:spPr>
+          <a:xfrm>
+            <a:off x="1390650" y="7096125"/>
+            <a:ext cx="533400" cy="533400"/>
+          </a:xfrm>
+          <a:prstGeom prst="ellipse">
+            <a:avLst/>
+          </a:prstGeom>
+          <a:solidFill>
+            <a:srgbClr val="0D2B5E"/>
+          </a:solidFill>
+          <a:ln>
+            <a:noFill/>
+          </a:ln>
+          <a:effectLst/>
+        </p:spPr>
+        <p:txBody>
+          <a:bodyPr rtlCol="0" anchor="ctr" wrap="square"/>
+          <a:lstStyle/>
+          <a:p>
+            <a:pPr algn="ctr"/>
+          </a:p>
+        </p:txBody>
+      </p:sp>
+      <p:sp>
+        <p:nvSpPr>
+          <p:cNvPr id="26" name="TextBox 25"/>
+          <p:cNvSpPr txBox="1"/>
+          <p:nvPr/>
+        </p:nvSpPr>
+        <p:spPr>
+          <a:xfrm>
+            <a:off x="1390650" y="7219950"/>
+            <a:ext cx="533400" cy="323850"/>
+          </a:xfrm>
+          <a:prstGeom prst="rect">
+            <a:avLst/>
+          </a:prstGeom>
+          <a:noFill/>
+        </p:spPr>
+        <p:txBody>
+          <a:bodyPr wrap="square" lIns="0" rIns="0" tIns="0" bIns="0" anchor="t">
+            <a:spAutoFit/>
+          </a:bodyPr>
+          <a:lstStyle/>
+          <a:p>
+            <a:pPr algn="ctr">
+              <a:lnSpc>
+                <a:spcPct val="100000"/>
+              </a:lnSpc>
+            </a:pPr>
+            <a:r>
+              <a:rPr sz="2100" b="1">
+                <a:solidFill>
+                  <a:srgbClr val="FFFFFF"/>
+                </a:solidFill>
+                <a:latin typeface="Pretendard"/>
+                <a:ea typeface="Pretendard"/>
+                <a:cs typeface="Pretendard"/>
+              </a:rPr>
+              <a:t>5</a:t>
+            </a:r>
+          </a:p>
+        </p:txBody>
+      </p:sp>
+      <p:sp>
+        <p:nvSpPr>
+          <p:cNvPr id="27" name="TextBox 26"/>
+          <p:cNvSpPr txBox="1"/>
+          <p:nvPr/>
+        </p:nvSpPr>
+        <p:spPr>
+          <a:xfrm>
+            <a:off x="2190750" y="6953250"/>
+            <a:ext cx="14573250" cy="819150"/>
+          </a:xfrm>
+          <a:prstGeom prst="rect">
+            <a:avLst/>
+          </a:prstGeom>
+          <a:noFill/>
+        </p:spPr>
+        <p:txBody>
+          <a:bodyPr wrap="square" lIns="0" rIns="0" tIns="0" bIns="0" anchor="ctr">
+            <a:spAutoFit/>
+          </a:bodyPr>
+          <a:lstStyle/>
+          <a:p>
+            <a:pPr algn="l">
+              <a:lnSpc>
+                <a:spcPct val="100000"/>
+              </a:lnSpc>
+            </a:pPr>
+            <a:r>
+              <a:rPr sz="2325" b="1">
+                <a:solidFill>
+                  <a:srgbClr val="0D2B5E"/>
+                </a:solidFill>
+                <a:latin typeface="Pretendard"/>
+                <a:ea typeface="Pretendard"/>
+                <a:cs typeface="Pretendard"/>
+              </a:rPr>
+              <a:t>네 가지 오류를 문구로 구분하고, 마지막은 성공: 100</a:t>
+            </a:r>
+          </a:p>
+        </p:txBody>
+      </p:sp>
+      <p:sp>
+        <p:nvSpPr>
+          <p:cNvPr id="28" name="Rectangle 27"/>
+          <p:cNvSpPr/>
+          <p:nvPr/>
+        </p:nvSpPr>
+        <p:spPr>
+          <a:xfrm>
+            <a:off x="1143000" y="8058150"/>
+            <a:ext cx="16002000" cy="9525"/>
+          </a:xfrm>
+          <a:prstGeom prst="rect">
+            <a:avLst/>
+          </a:prstGeom>
+          <a:solidFill>
+            <a:srgbClr val="DCE1E8"/>
+          </a:solidFill>
+          <a:ln>
+            <a:noFill/>
+          </a:ln>
+          <a:effectLst/>
+        </p:spPr>
+        <p:txBody>
+          <a:bodyPr rtlCol="0" anchor="ctr" wrap="square"/>
+          <a:lstStyle/>
+          <a:p>
+            <a:pPr algn="ctr"/>
+          </a:p>
+        </p:txBody>
+      </p:sp>
+      <p:sp>
+        <p:nvSpPr>
+          <p:cNvPr id="29" name="TextBox 28"/>
+          <p:cNvSpPr txBox="1"/>
+          <p:nvPr/>
+        </p:nvSpPr>
+        <p:spPr>
+          <a:xfrm>
+            <a:off x="1143000" y="8248650"/>
+            <a:ext cx="13335000" cy="323850"/>
+          </a:xfrm>
+          <a:prstGeom prst="rect">
+            <a:avLst/>
+          </a:prstGeom>
+          <a:noFill/>
+        </p:spPr>
+        <p:txBody>
+          <a:bodyPr wrap="square" lIns="0" rIns="0" tIns="0" bIns="0" anchor="t">
+            <a:spAutoFit/>
+          </a:bodyPr>
+          <a:lstStyle/>
+          <a:p>
+            <a:pPr algn="l">
+              <a:lnSpc>
+                <a:spcPct val="100000"/>
+              </a:lnSpc>
+            </a:pPr>
+            <a:r>
+              <a:rPr sz="1725" b="0">
+                <a:solidFill>
+                  <a:srgbClr val="7D7D7D"/>
+                </a:solidFill>
+                <a:latin typeface="Pretendard"/>
+                <a:ea typeface="Pretendard"/>
+                <a:cs typeface="Pretendard"/>
+              </a:rPr>
+              <a:t>데이터 엔지니어링 &amp; RAG 파이프라인 160H · 5-3 · 실습 1.5H</a:t>
+            </a:r>
+          </a:p>
+        </p:txBody>
+      </p:sp>
+      <p:sp>
+        <p:nvSpPr>
+          <p:cNvPr id="30" name="TextBox 29"/>
+          <p:cNvSpPr txBox="1"/>
+          <p:nvPr/>
+        </p:nvSpPr>
+        <p:spPr>
+          <a:xfrm>
+            <a:off x="15240000" y="8248650"/>
+            <a:ext cx="1905000" cy="323850"/>
+          </a:xfrm>
+          <a:prstGeom prst="rect">
+            <a:avLst/>
+          </a:prstGeom>
+          <a:noFill/>
+        </p:spPr>
+        <p:txBody>
+          <a:bodyPr wrap="square" lIns="0" rIns="0" tIns="0" bIns="0" anchor="t">
+            <a:spAutoFit/>
+          </a:bodyPr>
+          <a:lstStyle/>
+          <a:p>
+            <a:pPr algn="r">
+              <a:lnSpc>
+                <a:spcPct val="100000"/>
+              </a:lnSpc>
+            </a:pPr>
+            <a:r>
+              <a:rPr sz="1725" b="0">
+                <a:solidFill>
+                  <a:srgbClr val="7D7D7D"/>
+                </a:solidFill>
+                <a:latin typeface="Pretendard"/>
+                <a:ea typeface="Pretendard"/>
+                <a:cs typeface="Pretendard"/>
+              </a:rPr>
+              <a:t>10</a:t>
+            </a:r>
+          </a:p>
+        </p:txBody>
+      </p:sp>
+    </p:spTree>
+  </p:cSld>
+  <p:clrMapOvr>
+    <a:masterClrMapping/>
+  </p:clrMapOvr>
+</p:sld>
+</file>
+
+<file path=ppt/slides/slide11.xml><?xml version="1.0" encoding="utf-8"?>
+<p:sld xmlns:a="http://schemas.openxmlformats.org/drawingml/2006/main" xmlns:p="http://schemas.openxmlformats.org/presentationml/2006/main" xmlns:r="http://schemas.openxmlformats.org/officeDocument/2006/relationships">
+  <p:cSld>
+    <p:spTree>
+      <p:nvGrpSpPr>
+        <p:cNvPr id="1" name=""/>
+        <p:cNvGrpSpPr/>
+        <p:nvPr/>
+      </p:nvGrpSpPr>
+      <p:grpSpPr/>
+      <p:sp>
+        <p:nvSpPr>
+          <p:cNvPr id="2" name="deckgen:decor"/>
+          <p:cNvSpPr/>
+          <p:nvPr/>
+        </p:nvSpPr>
+        <p:spPr>
+          <a:xfrm>
             <a:off x="14859000" y="6667500"/>
             <a:ext cx="5905500" cy="5905500"/>
           </a:xfrm>
@@ -3921,7 +4984,7 @@
                 <a:ea typeface="Pretendard"/>
                 <a:cs typeface="Pretendard"/>
               </a:rPr>
-              <a:t>SHOW CATALOGS 로 lake 확인</a:t>
+              <a:t>CREATE NAMESPACE lake.db</a:t>
             </a:r>
           </a:p>
         </p:txBody>
@@ -4153,7 +5216,7 @@
                 <a:ea typeface="Pretendard"/>
                 <a:cs typeface="Pretendard"/>
               </a:rPr>
-              <a:t>콘솔에서 metadata/ · data/ 폴더 확인</a:t>
+              <a:t>콘솔 lake/db/orders 의 metadata · data</a:t>
             </a:r>
           </a:p>
         </p:txBody>
@@ -4747,7 +5810,7 @@
                 <a:ea typeface="Pretendard"/>
                 <a:cs typeface="Pretendard"/>
               </a:rPr>
-              <a:t>5-2 compose 에 minio 서비스를 더해 세 컨테이너를 Up 으로 만든다</a:t>
+              <a:t>5-2 compose 끝에 MinIO 를 한 번 붙여 컨테이너 4개를 Up 으로</a:t>
             </a:r>
           </a:p>
         </p:txBody>
@@ -4893,7 +5956,7 @@
                 <a:ea typeface="Pretendard"/>
                 <a:cs typeface="Pretendard"/>
               </a:rPr>
-              <a:t>warehouse 버킷을 만들고 콘솔(9001)에서 확인한다</a:t>
+              <a:t>warehouse 버킷을 만들고 lake-pyspark.sh 로 셸을 띄운다</a:t>
             </a:r>
           </a:p>
         </p:txBody>
@@ -5039,7 +6102,7 @@
                 <a:ea typeface="Pretendard"/>
                 <a:cs typeface="Pretendard"/>
               </a:rPr>
-              <a:t>--packages · --conf 로 PySpark 를 띄워 Parquet 을 s3a 로 왕복한다</a:t>
+              <a:t>s3a 로 Parquet 을 쓰고 읽어 count 100 · 파티션 4 를 본다</a:t>
             </a:r>
           </a:p>
         </p:txBody>
@@ -5185,7 +6248,7 @@
                 <a:ea typeface="Pretendard"/>
                 <a:cs typeface="Pretendard"/>
               </a:rPr>
-              <a:t>잘못된 버킷·자격증명·주소가 내는 오류 세 가지를 구분한다</a:t>
+              <a:t>버킷 · 열쇠 · 주소 · path style 오류 네 가지를 구분한다</a:t>
             </a:r>
           </a:p>
         </p:txBody>
@@ -5562,7 +6625,7 @@
                 <a:ea typeface="Pretendard"/>
                 <a:cs typeface="Pretendard"/>
               </a:rPr>
-              <a:t>다섯 단계 — ~/data-eng/week5 의 5-2 compose 위에서</a:t>
+              <a:t>다섯 단계 — 5-2 compose 위에서</a:t>
             </a:r>
           </a:p>
         </p:txBody>
@@ -5633,7 +6696,7 @@
                 <a:ea typeface="Pretendard"/>
                 <a:cs typeface="Pretendard"/>
               </a:rPr>
-              <a:t>4주차 MinIO 가 9000 을 쓰고 있으면 먼저 내리고 시작합니다</a:t>
+              <a:t>4주차 MinIO 는 쓰지 않습니다 — 9000 · 9001 이 겹치니 stop 만 (지우지 않음)</a:t>
             </a:r>
           </a:p>
         </p:txBody>
@@ -5779,7 +6842,7 @@
                 <a:ea typeface="Pretendard"/>
                 <a:cs typeface="Pretendard"/>
               </a:rPr>
-              <a:t>minio 서비스</a:t>
+              <a:t>cat &gt;&gt; 로</a:t>
             </a:r>
           </a:p>
           <a:p>
@@ -5797,7 +6860,7 @@
                 <a:ea typeface="Pretendard"/>
                 <a:cs typeface="Pretendard"/>
               </a:rPr>
-              <a:t>volumes 추가</a:t>
+              <a:t>minio 덧붙이기</a:t>
             </a:r>
           </a:p>
         </p:txBody>
@@ -5943,25 +7006,25 @@
                 <a:ea typeface="Pretendard"/>
                 <a:cs typeface="Pretendard"/>
               </a:rPr>
+              <a:t>mc mb</a:t>
+            </a:r>
+          </a:p>
+          <a:p>
+            <a:pPr algn="ctr">
+              <a:lnSpc>
+                <a:spcPct val="146000"/>
+              </a:lnSpc>
+            </a:pPr>
+            <a:r>
+              <a:rPr sz="2100" b="0">
+                <a:solidFill>
+                  <a:srgbClr val="3D3D3D"/>
+                </a:solidFill>
+                <a:latin typeface="Pretendard"/>
+                <a:ea typeface="Pretendard"/>
+                <a:cs typeface="Pretendard"/>
+              </a:rPr>
               <a:t>warehouse</a:t>
-            </a:r>
-          </a:p>
-          <a:p>
-            <a:pPr algn="ctr">
-              <a:lnSpc>
-                <a:spcPct val="146000"/>
-              </a:lnSpc>
-            </a:pPr>
-            <a:r>
-              <a:rPr sz="2100" b="0">
-                <a:solidFill>
-                  <a:srgbClr val="3D3D3D"/>
-                </a:solidFill>
-                <a:latin typeface="Pretendard"/>
-                <a:ea typeface="Pretendard"/>
-                <a:cs typeface="Pretendard"/>
-              </a:rPr>
-              <a:t>mc 또는 콘솔</a:t>
             </a:r>
           </a:p>
         </p:txBody>
@@ -6107,7 +7170,7 @@
                 <a:ea typeface="Pretendard"/>
                 <a:cs typeface="Pretendard"/>
               </a:rPr>
-              <a:t>--packages</a:t>
+              <a:t>lake-pyspark.sh</a:t>
             </a:r>
           </a:p>
           <a:p>
@@ -6125,7 +7188,7 @@
                 <a:ea typeface="Pretendard"/>
                 <a:cs typeface="Pretendard"/>
               </a:rPr>
-              <a:t>--conf 9줄</a:t>
+              <a:t>첫 실행 1~2분</a:t>
             </a:r>
           </a:p>
         </p:txBody>
@@ -6271,7 +7334,7 @@
                 <a:ea typeface="Pretendard"/>
                 <a:cs typeface="Pretendard"/>
               </a:rPr>
-              <a:t>write → read</a:t>
+              <a:t>count 100</a:t>
             </a:r>
           </a:p>
           <a:p>
@@ -6289,7 +7352,7 @@
                 <a:ea typeface="Pretendard"/>
                 <a:cs typeface="Pretendard"/>
               </a:rPr>
-              <a:t>count 100</a:t>
+              <a:t>파티션 4</a:t>
             </a:r>
           </a:p>
         </p:txBody>
@@ -6435,7 +7498,7 @@
                 <a:ea typeface="Pretendard"/>
                 <a:cs typeface="Pretendard"/>
               </a:rPr>
-              <a:t>오류 세 가지</a:t>
+              <a:t>재시도 1번으로</a:t>
             </a:r>
           </a:p>
           <a:p>
@@ -6453,7 +7516,7 @@
                 <a:ea typeface="Pretendard"/>
                 <a:cs typeface="Pretendard"/>
               </a:rPr>
-              <a:t>구분</a:t>
+              <a:t>오류 네 가지</a:t>
             </a:r>
           </a:p>
         </p:txBody>
@@ -6714,7 +7777,7 @@
                 <a:ea typeface="Pretendard"/>
                 <a:cs typeface="Pretendard"/>
               </a:rPr>
-              <a:t>1단계</a:t>
+              <a:t>1·2단계</a:t>
             </a:r>
           </a:p>
         </p:txBody>
@@ -6755,7 +7818,7 @@
                 <a:ea typeface="Pretendard"/>
                 <a:cs typeface="Pretendard"/>
               </a:rPr>
-              <a:t>붙여넣을 조각 둘 — 들어갈 자리가 다르다</a:t>
+              <a:t>MinIO 붙이기 — cat &gt;&gt; 는 딱 한 번</a:t>
             </a:r>
           </a:p>
         </p:txBody>
@@ -6792,100 +7855,18 @@
       </p:sp>
       <p:sp>
         <p:nvSpPr>
-          <p:cNvPr id="8" name="TextBox 7"/>
-          <p:cNvSpPr txBox="1"/>
-          <p:nvPr/>
-        </p:nvSpPr>
-        <p:spPr>
-          <a:xfrm>
-            <a:off x="1143000" y="2857500"/>
-            <a:ext cx="7372350" cy="533400"/>
-          </a:xfrm>
-          <a:prstGeom prst="rect">
-            <a:avLst/>
-          </a:prstGeom>
-          <a:noFill/>
-        </p:spPr>
-        <p:txBody>
-          <a:bodyPr wrap="square" lIns="0" rIns="0" tIns="0" bIns="0" anchor="t">
-            <a:spAutoFit/>
-          </a:bodyPr>
-          <a:lstStyle/>
-          <a:p>
-            <a:pPr algn="l">
-              <a:lnSpc>
-                <a:spcPct val="110000"/>
-              </a:lnSpc>
-            </a:pPr>
-            <a:r>
-              <a:rPr sz="3150" b="1">
-                <a:solidFill>
-                  <a:srgbClr val="0D2B5E"/>
-                </a:solidFill>
-                <a:latin typeface="Pretendard"/>
-                <a:ea typeface="Pretendard"/>
-                <a:cs typeface="Pretendard"/>
-              </a:rPr>
-              <a:t>① minio: 덩이</a:t>
-            </a:r>
-          </a:p>
-        </p:txBody>
-      </p:sp>
-      <p:sp>
-        <p:nvSpPr>
-          <p:cNvPr id="9" name="TextBox 8"/>
-          <p:cNvSpPr txBox="1"/>
-          <p:nvPr/>
-        </p:nvSpPr>
-        <p:spPr>
-          <a:xfrm>
-            <a:off x="1143000" y="3467100"/>
-            <a:ext cx="7372350" cy="876300"/>
-          </a:xfrm>
-          <a:prstGeom prst="rect">
-            <a:avLst/>
-          </a:prstGeom>
-          <a:noFill/>
-        </p:spPr>
-        <p:txBody>
-          <a:bodyPr wrap="square" lIns="0" rIns="0" tIns="0" bIns="0" anchor="t">
-            <a:spAutoFit/>
-          </a:bodyPr>
-          <a:lstStyle/>
-          <a:p>
-            <a:pPr algn="l">
-              <a:lnSpc>
-                <a:spcPct val="146000"/>
-              </a:lnSpc>
-            </a:pPr>
-            <a:r>
-              <a:rPr sz="2250" b="0">
-                <a:solidFill>
-                  <a:srgbClr val="3D3D3D"/>
-                </a:solidFill>
-                <a:latin typeface="Pretendard"/>
-                <a:ea typeface="Pretendard"/>
-                <a:cs typeface="Pretendard"/>
-              </a:rPr>
-              <a:t>services: 아래에 — 들여쓰기 2칸 그대로</a:t>
-            </a:r>
-          </a:p>
-        </p:txBody>
-      </p:sp>
-      <p:sp>
-        <p:nvSpPr>
-          <p:cNvPr id="10" name="Rounded Rectangle 9"/>
-          <p:cNvSpPr/>
-          <p:nvPr/>
-        </p:nvSpPr>
-        <p:spPr>
-          <a:xfrm>
-            <a:off x="1143000" y="4610100"/>
-            <a:ext cx="7372350" cy="2857500"/>
+          <p:cNvPr id="8" name="Rounded Rectangle 7"/>
+          <p:cNvSpPr/>
+          <p:nvPr/>
+        </p:nvSpPr>
+        <p:spPr>
+          <a:xfrm>
+            <a:off x="1143000" y="2933700"/>
+            <a:ext cx="11430000" cy="1095375"/>
           </a:xfrm>
           <a:prstGeom prst="roundRect">
             <a:avLst>
-              <a:gd name="adj" fmla="val 1666"/>
+              <a:gd name="adj" fmla="val 4347"/>
             </a:avLst>
           </a:prstGeom>
           <a:solidFill>
@@ -6908,20 +7889,20 @@
       </p:sp>
       <p:sp>
         <p:nvSpPr>
-          <p:cNvPr id="11" name="Oval 10"/>
-          <p:cNvSpPr/>
-          <p:nvPr/>
-        </p:nvSpPr>
-        <p:spPr>
-          <a:xfrm>
-            <a:off x="1447800" y="5016817"/>
-            <a:ext cx="97155" cy="97155"/>
+          <p:cNvPr id="9" name="Oval 8"/>
+          <p:cNvSpPr/>
+          <p:nvPr/>
+        </p:nvSpPr>
+        <p:spPr>
+          <a:xfrm>
+            <a:off x="1447800" y="3181350"/>
+            <a:ext cx="590550" cy="590550"/>
           </a:xfrm>
           <a:prstGeom prst="ellipse">
             <a:avLst/>
           </a:prstGeom>
           <a:solidFill>
-            <a:srgbClr val="1E5BC6"/>
+            <a:srgbClr val="0D2B5E"/>
           </a:solidFill>
           <a:ln>
             <a:noFill/>
@@ -6938,22 +7919,104 @@
       </p:sp>
       <p:sp>
         <p:nvSpPr>
+          <p:cNvPr id="10" name="TextBox 9"/>
+          <p:cNvSpPr txBox="1"/>
+          <p:nvPr/>
+        </p:nvSpPr>
+        <p:spPr>
+          <a:xfrm>
+            <a:off x="1447800" y="3333750"/>
+            <a:ext cx="590550" cy="323850"/>
+          </a:xfrm>
+          <a:prstGeom prst="rect">
+            <a:avLst/>
+          </a:prstGeom>
+          <a:noFill/>
+        </p:spPr>
+        <p:txBody>
+          <a:bodyPr wrap="square" lIns="0" rIns="0" tIns="0" bIns="0" anchor="t">
+            <a:spAutoFit/>
+          </a:bodyPr>
+          <a:lstStyle/>
+          <a:p>
+            <a:pPr algn="ctr">
+              <a:lnSpc>
+                <a:spcPct val="100000"/>
+              </a:lnSpc>
+            </a:pPr>
+            <a:r>
+              <a:rPr sz="2250" b="1">
+                <a:solidFill>
+                  <a:srgbClr val="FFFFFF"/>
+                </a:solidFill>
+                <a:latin typeface="Pretendard"/>
+                <a:ea typeface="Pretendard"/>
+                <a:cs typeface="Pretendard"/>
+              </a:rPr>
+              <a:t>1</a:t>
+            </a:r>
+          </a:p>
+        </p:txBody>
+      </p:sp>
+      <p:sp>
+        <p:nvSpPr>
+          <p:cNvPr id="11" name="TextBox 10"/>
+          <p:cNvSpPr txBox="1"/>
+          <p:nvPr/>
+        </p:nvSpPr>
+        <p:spPr>
+          <a:xfrm>
+            <a:off x="2324100" y="3143250"/>
+            <a:ext cx="9906000" cy="400050"/>
+          </a:xfrm>
+          <a:prstGeom prst="rect">
+            <a:avLst/>
+          </a:prstGeom>
+          <a:noFill/>
+        </p:spPr>
+        <p:txBody>
+          <a:bodyPr wrap="square" lIns="0" rIns="0" tIns="0" bIns="0" anchor="t">
+            <a:spAutoFit/>
+          </a:bodyPr>
+          <a:lstStyle/>
+          <a:p>
+            <a:pPr algn="l">
+              <a:lnSpc>
+                <a:spcPct val="110000"/>
+              </a:lnSpc>
+            </a:pPr>
+            <a:r>
+              <a:rPr sz="2475" b="1">
+                <a:solidFill>
+                  <a:srgbClr val="0D2B5E"/>
+                </a:solidFill>
+                <a:latin typeface="Pretendard"/>
+                <a:ea typeface="Pretendard"/>
+                <a:cs typeface="Pretendard"/>
+              </a:rPr>
+              <a:t>cat &gt;&gt; docker-compose.yml &lt;&lt; 'EOF'</a:t>
+            </a:r>
+          </a:p>
+        </p:txBody>
+      </p:sp>
+      <p:sp>
+        <p:nvSpPr>
           <p:cNvPr id="12" name="TextBox 11"/>
           <p:cNvSpPr txBox="1"/>
           <p:nvPr/>
         </p:nvSpPr>
         <p:spPr>
           <a:xfrm>
-            <a:off x="1633538" y="4838700"/>
-            <a:ext cx="6634162" cy="453390"/>
-          </a:xfrm>
-          <a:prstGeom prst="rect">
-            <a:avLst/>
-          </a:prstGeom>
-          <a:noFill/>
-        </p:spPr>
-        <p:txBody>
-          <a:bodyPr wrap="square" lIns="0" rIns="0" tIns="0" bIns="0" anchor="ctr">
+            <a:off x="2324100" y="3543300"/>
+            <a:ext cx="9906000" cy="361950"/>
+          </a:xfrm>
+          <a:prstGeom prst="rect">
+            <a:avLst/>
+          </a:prstGeom>
+          <a:noFill/>
+        </p:spPr>
+        <p:txBody>
+          <a:bodyPr wrap="square" lIns="0" rIns="0" tIns="0" bIns="0" anchor="t">
             <a:spAutoFit/>
           </a:bodyPr>
           <a:lstStyle/>
@@ -6964,7 +8027,7 @@
               </a:lnSpc>
             </a:pPr>
             <a:r>
-              <a:rPr sz="1575" b="0">
+              <a:rPr sz="2025" b="0">
                 <a:solidFill>
                   <a:srgbClr val="3D3D3D"/>
                 </a:solidFill>
@@ -6972,249 +8035,25 @@
                 <a:ea typeface="Pretendard"/>
                 <a:cs typeface="Pretendard"/>
               </a:rPr>
-              <a:t>image: pgsty/minio:latest</a:t>
-            </a:r>
-          </a:p>
-        </p:txBody>
-      </p:sp>
-      <p:sp>
-        <p:nvSpPr>
-          <p:cNvPr id="13" name="Oval 12"/>
-          <p:cNvSpPr/>
-          <p:nvPr/>
-        </p:nvSpPr>
-        <p:spPr>
-          <a:xfrm>
-            <a:off x="1447800" y="5527358"/>
-            <a:ext cx="97155" cy="97155"/>
-          </a:xfrm>
-          <a:prstGeom prst="ellipse">
-            <a:avLst/>
-          </a:prstGeom>
-          <a:solidFill>
-            <a:srgbClr val="1E5BC6"/>
-          </a:solidFill>
-          <a:ln>
-            <a:noFill/>
-          </a:ln>
-          <a:effectLst/>
-        </p:spPr>
-        <p:txBody>
-          <a:bodyPr rtlCol="0" anchor="ctr" wrap="square"/>
-          <a:lstStyle/>
-          <a:p>
-            <a:pPr algn="ctr"/>
-          </a:p>
-        </p:txBody>
-      </p:sp>
-      <p:sp>
-        <p:nvSpPr>
-          <p:cNvPr id="14" name="TextBox 13"/>
-          <p:cNvSpPr txBox="1"/>
-          <p:nvPr/>
-        </p:nvSpPr>
-        <p:spPr>
-          <a:xfrm>
-            <a:off x="1633538" y="5349240"/>
-            <a:ext cx="6634162" cy="453390"/>
-          </a:xfrm>
-          <a:prstGeom prst="rect">
-            <a:avLst/>
-          </a:prstGeom>
-          <a:noFill/>
-        </p:spPr>
-        <p:txBody>
-          <a:bodyPr wrap="square" lIns="0" rIns="0" tIns="0" bIns="0" anchor="ctr">
-            <a:spAutoFit/>
-          </a:bodyPr>
-          <a:lstStyle/>
-          <a:p>
-            <a:pPr algn="l">
-              <a:lnSpc>
-                <a:spcPct val="120000"/>
-              </a:lnSpc>
-            </a:pPr>
-            <a:r>
-              <a:rPr sz="1575" b="0">
-                <a:solidFill>
-                  <a:srgbClr val="3D3D3D"/>
-                </a:solidFill>
-                <a:latin typeface="Pretendard"/>
-                <a:ea typeface="Pretendard"/>
-                <a:cs typeface="Pretendard"/>
-              </a:rPr>
-              <a:t>container_name: spark-minio</a:t>
-            </a:r>
-          </a:p>
-        </p:txBody>
-      </p:sp>
-      <p:sp>
-        <p:nvSpPr>
-          <p:cNvPr id="15" name="Oval 14"/>
-          <p:cNvSpPr/>
-          <p:nvPr/>
-        </p:nvSpPr>
-        <p:spPr>
-          <a:xfrm>
-            <a:off x="1447800" y="6037898"/>
-            <a:ext cx="97155" cy="97155"/>
-          </a:xfrm>
-          <a:prstGeom prst="ellipse">
-            <a:avLst/>
-          </a:prstGeom>
-          <a:solidFill>
-            <a:srgbClr val="1E5BC6"/>
-          </a:solidFill>
-          <a:ln>
-            <a:noFill/>
-          </a:ln>
-          <a:effectLst/>
-        </p:spPr>
-        <p:txBody>
-          <a:bodyPr rtlCol="0" anchor="ctr" wrap="square"/>
-          <a:lstStyle/>
-          <a:p>
-            <a:pPr algn="ctr"/>
-          </a:p>
-        </p:txBody>
-      </p:sp>
-      <p:sp>
-        <p:nvSpPr>
-          <p:cNvPr id="16" name="TextBox 15"/>
-          <p:cNvSpPr txBox="1"/>
-          <p:nvPr/>
-        </p:nvSpPr>
-        <p:spPr>
-          <a:xfrm>
-            <a:off x="1633538" y="5859780"/>
-            <a:ext cx="6634162" cy="453390"/>
-          </a:xfrm>
-          <a:prstGeom prst="rect">
-            <a:avLst/>
-          </a:prstGeom>
-          <a:noFill/>
-        </p:spPr>
-        <p:txBody>
-          <a:bodyPr wrap="square" lIns="0" rIns="0" tIns="0" bIns="0" anchor="ctr">
-            <a:spAutoFit/>
-          </a:bodyPr>
-          <a:lstStyle/>
-          <a:p>
-            <a:pPr algn="l">
-              <a:lnSpc>
-                <a:spcPct val="120000"/>
-              </a:lnSpc>
-            </a:pPr>
-            <a:r>
-              <a:rPr sz="1575" b="0">
-                <a:solidFill>
-                  <a:srgbClr val="3D3D3D"/>
-                </a:solidFill>
-                <a:latin typeface="Pretendard"/>
-                <a:ea typeface="Pretendard"/>
-                <a:cs typeface="Pretendard"/>
-              </a:rPr>
-              <a:t>admin / password123 · 9000 · 9001</a:t>
-            </a:r>
-          </a:p>
-        </p:txBody>
-      </p:sp>
-      <p:sp>
-        <p:nvSpPr>
-          <p:cNvPr id="17" name="TextBox 16"/>
-          <p:cNvSpPr txBox="1"/>
-          <p:nvPr/>
-        </p:nvSpPr>
-        <p:spPr>
-          <a:xfrm>
-            <a:off x="9772650" y="2857500"/>
-            <a:ext cx="7372350" cy="533400"/>
-          </a:xfrm>
-          <a:prstGeom prst="rect">
-            <a:avLst/>
-          </a:prstGeom>
-          <a:noFill/>
-        </p:spPr>
-        <p:txBody>
-          <a:bodyPr wrap="square" lIns="0" rIns="0" tIns="0" bIns="0" anchor="t">
-            <a:spAutoFit/>
-          </a:bodyPr>
-          <a:lstStyle/>
-          <a:p>
-            <a:pPr algn="l">
-              <a:lnSpc>
-                <a:spcPct val="110000"/>
-              </a:lnSpc>
-            </a:pPr>
-            <a:r>
-              <a:rPr sz="3150" b="1">
-                <a:solidFill>
-                  <a:srgbClr val="0D2B5E"/>
-                </a:solidFill>
-                <a:latin typeface="Pretendard"/>
-                <a:ea typeface="Pretendard"/>
-                <a:cs typeface="Pretendard"/>
-              </a:rPr>
-              <a:t>② volumes: 덩이</a:t>
-            </a:r>
-          </a:p>
-        </p:txBody>
-      </p:sp>
-      <p:sp>
-        <p:nvSpPr>
-          <p:cNvPr id="18" name="TextBox 17"/>
-          <p:cNvSpPr txBox="1"/>
-          <p:nvPr/>
-        </p:nvSpPr>
-        <p:spPr>
-          <a:xfrm>
-            <a:off x="9772650" y="3467100"/>
-            <a:ext cx="7372350" cy="876300"/>
-          </a:xfrm>
-          <a:prstGeom prst="rect">
-            <a:avLst/>
-          </a:prstGeom>
-          <a:noFill/>
-        </p:spPr>
-        <p:txBody>
-          <a:bodyPr wrap="square" lIns="0" rIns="0" tIns="0" bIns="0" anchor="t">
-            <a:spAutoFit/>
-          </a:bodyPr>
-          <a:lstStyle/>
-          <a:p>
-            <a:pPr algn="l">
-              <a:lnSpc>
-                <a:spcPct val="146000"/>
-              </a:lnSpc>
-            </a:pPr>
-            <a:r>
-              <a:rPr sz="2250" b="0">
-                <a:solidFill>
-                  <a:srgbClr val="3D3D3D"/>
-                </a:solidFill>
-                <a:latin typeface="Pretendard"/>
-                <a:ea typeface="Pretendard"/>
-                <a:cs typeface="Pretendard"/>
-              </a:rPr>
-              <a:t>파일 맨 아래 최상위 — 들여쓰기 없음</a:t>
-            </a:r>
-          </a:p>
-        </p:txBody>
-      </p:sp>
-      <p:sp>
-        <p:nvSpPr>
-          <p:cNvPr id="19" name="Rounded Rectangle 18"/>
-          <p:cNvSpPr/>
-          <p:nvPr/>
-        </p:nvSpPr>
-        <p:spPr>
-          <a:xfrm>
-            <a:off x="9772650" y="4610100"/>
-            <a:ext cx="7372350" cy="2857500"/>
+              <a:t>minio 덩이(2칸) + volumes 덩이(0칸)를 파일 끝에 덧붙인다</a:t>
+            </a:r>
+          </a:p>
+        </p:txBody>
+      </p:sp>
+      <p:sp>
+        <p:nvSpPr>
+          <p:cNvPr id="13" name="Rounded Rectangle 12"/>
+          <p:cNvSpPr/>
+          <p:nvPr/>
+        </p:nvSpPr>
+        <p:spPr>
+          <a:xfrm>
+            <a:off x="1143000" y="4200525"/>
+            <a:ext cx="11430000" cy="1095375"/>
           </a:xfrm>
           <a:prstGeom prst="roundRect">
             <a:avLst>
-              <a:gd name="adj" fmla="val 1666"/>
+              <a:gd name="adj" fmla="val 4347"/>
             </a:avLst>
           </a:prstGeom>
           <a:solidFill>
@@ -7237,20 +8076,20 @@
       </p:sp>
       <p:sp>
         <p:nvSpPr>
-          <p:cNvPr id="20" name="Oval 19"/>
-          <p:cNvSpPr/>
-          <p:nvPr/>
-        </p:nvSpPr>
-        <p:spPr>
-          <a:xfrm>
-            <a:off x="10077450" y="5016817"/>
-            <a:ext cx="97155" cy="97155"/>
+          <p:cNvPr id="14" name="Oval 13"/>
+          <p:cNvSpPr/>
+          <p:nvPr/>
+        </p:nvSpPr>
+        <p:spPr>
+          <a:xfrm>
+            <a:off x="1447800" y="4448175"/>
+            <a:ext cx="590550" cy="590550"/>
           </a:xfrm>
           <a:prstGeom prst="ellipse">
             <a:avLst/>
           </a:prstGeom>
           <a:solidFill>
-            <a:srgbClr val="1E5BC6"/>
+            <a:srgbClr val="0D2B5E"/>
           </a:solidFill>
           <a:ln>
             <a:noFill/>
@@ -7267,33 +8106,115 @@
       </p:sp>
       <p:sp>
         <p:nvSpPr>
-          <p:cNvPr id="21" name="TextBox 20"/>
-          <p:cNvSpPr txBox="1"/>
-          <p:nvPr/>
-        </p:nvSpPr>
-        <p:spPr>
-          <a:xfrm>
-            <a:off x="10263188" y="4838700"/>
-            <a:ext cx="6634162" cy="453390"/>
-          </a:xfrm>
-          <a:prstGeom prst="rect">
-            <a:avLst/>
-          </a:prstGeom>
-          <a:noFill/>
-        </p:spPr>
-        <p:txBody>
-          <a:bodyPr wrap="square" lIns="0" rIns="0" tIns="0" bIns="0" anchor="ctr">
+          <p:cNvPr id="15" name="TextBox 14"/>
+          <p:cNvSpPr txBox="1"/>
+          <p:nvPr/>
+        </p:nvSpPr>
+        <p:spPr>
+          <a:xfrm>
+            <a:off x="1447800" y="4600575"/>
+            <a:ext cx="590550" cy="323850"/>
+          </a:xfrm>
+          <a:prstGeom prst="rect">
+            <a:avLst/>
+          </a:prstGeom>
+          <a:noFill/>
+        </p:spPr>
+        <p:txBody>
+          <a:bodyPr wrap="square" lIns="0" rIns="0" tIns="0" bIns="0" anchor="t">
+            <a:spAutoFit/>
+          </a:bodyPr>
+          <a:lstStyle/>
+          <a:p>
+            <a:pPr algn="ctr">
+              <a:lnSpc>
+                <a:spcPct val="100000"/>
+              </a:lnSpc>
+            </a:pPr>
+            <a:r>
+              <a:rPr sz="2250" b="1">
+                <a:solidFill>
+                  <a:srgbClr val="FFFFFF"/>
+                </a:solidFill>
+                <a:latin typeface="Pretendard"/>
+                <a:ea typeface="Pretendard"/>
+                <a:cs typeface="Pretendard"/>
+              </a:rPr>
+              <a:t>2</a:t>
+            </a:r>
+          </a:p>
+        </p:txBody>
+      </p:sp>
+      <p:sp>
+        <p:nvSpPr>
+          <p:cNvPr id="16" name="TextBox 15"/>
+          <p:cNvSpPr txBox="1"/>
+          <p:nvPr/>
+        </p:nvSpPr>
+        <p:spPr>
+          <a:xfrm>
+            <a:off x="2324100" y="4410075"/>
+            <a:ext cx="9906000" cy="400050"/>
+          </a:xfrm>
+          <a:prstGeom prst="rect">
+            <a:avLst/>
+          </a:prstGeom>
+          <a:noFill/>
+        </p:spPr>
+        <p:txBody>
+          <a:bodyPr wrap="square" lIns="0" rIns="0" tIns="0" bIns="0" anchor="t">
             <a:spAutoFit/>
           </a:bodyPr>
           <a:lstStyle/>
           <a:p>
             <a:pPr algn="l">
               <a:lnSpc>
+                <a:spcPct val="110000"/>
+              </a:lnSpc>
+            </a:pPr>
+            <a:r>
+              <a:rPr sz="2475" b="1">
+                <a:solidFill>
+                  <a:srgbClr val="0D2B5E"/>
+                </a:solidFill>
+                <a:latin typeface="Pretendard"/>
+                <a:ea typeface="Pretendard"/>
+                <a:cs typeface="Pretendard"/>
+              </a:rPr>
+              <a:t>docker compose config --services</a:t>
+            </a:r>
+          </a:p>
+        </p:txBody>
+      </p:sp>
+      <p:sp>
+        <p:nvSpPr>
+          <p:cNvPr id="17" name="TextBox 16"/>
+          <p:cNvSpPr txBox="1"/>
+          <p:nvPr/>
+        </p:nvSpPr>
+        <p:spPr>
+          <a:xfrm>
+            <a:off x="2324100" y="4810125"/>
+            <a:ext cx="9906000" cy="361950"/>
+          </a:xfrm>
+          <a:prstGeom prst="rect">
+            <a:avLst/>
+          </a:prstGeom>
+          <a:noFill/>
+        </p:spPr>
+        <p:txBody>
+          <a:bodyPr wrap="square" lIns="0" rIns="0" tIns="0" bIns="0" anchor="t">
+            <a:spAutoFit/>
+          </a:bodyPr>
+          <a:lstStyle/>
+          <a:p>
+            <a:pPr algn="l">
+              <a:lnSpc>
                 <a:spcPct val="120000"/>
               </a:lnSpc>
             </a:pPr>
             <a:r>
-              <a:rPr sz="1575" b="0">
+              <a:rPr sz="2025" b="0">
                 <a:solidFill>
                   <a:srgbClr val="3D3D3D"/>
                 </a:solidFill>
@@ -7301,27 +8222,61 @@
                 <a:ea typeface="Pretendard"/>
                 <a:cs typeface="Pretendard"/>
               </a:rPr>
-              <a:t>spark-minio-data: 한 줄</a:t>
-            </a:r>
-          </a:p>
-        </p:txBody>
-      </p:sp>
-      <p:sp>
-        <p:nvSpPr>
-          <p:cNvPr id="22" name="Oval 21"/>
-          <p:cNvSpPr/>
-          <p:nvPr/>
-        </p:nvSpPr>
-        <p:spPr>
-          <a:xfrm>
-            <a:off x="10077450" y="5527358"/>
-            <a:ext cx="97155" cy="97155"/>
+              <a:t>spark-master · spark-worker · minio 세 줄</a:t>
+            </a:r>
+          </a:p>
+        </p:txBody>
+      </p:sp>
+      <p:sp>
+        <p:nvSpPr>
+          <p:cNvPr id="18" name="Rounded Rectangle 17"/>
+          <p:cNvSpPr/>
+          <p:nvPr/>
+        </p:nvSpPr>
+        <p:spPr>
+          <a:xfrm>
+            <a:off x="1143000" y="5467350"/>
+            <a:ext cx="11430000" cy="1095375"/>
+          </a:xfrm>
+          <a:prstGeom prst="roundRect">
+            <a:avLst>
+              <a:gd name="adj" fmla="val 4347"/>
+            </a:avLst>
+          </a:prstGeom>
+          <a:solidFill>
+            <a:srgbClr val="FAFBFD"/>
+          </a:solidFill>
+          <a:ln w="9525">
+            <a:solidFill>
+              <a:srgbClr val="DCE1E8"/>
+            </a:solidFill>
+          </a:ln>
+          <a:effectLst/>
+        </p:spPr>
+        <p:txBody>
+          <a:bodyPr rtlCol="0" anchor="ctr" wrap="square"/>
+          <a:lstStyle/>
+          <a:p>
+            <a:pPr algn="ctr"/>
+          </a:p>
+        </p:txBody>
+      </p:sp>
+      <p:sp>
+        <p:nvSpPr>
+          <p:cNvPr id="19" name="Oval 18"/>
+          <p:cNvSpPr/>
+          <p:nvPr/>
+        </p:nvSpPr>
+        <p:spPr>
+          <a:xfrm>
+            <a:off x="1447800" y="5715000"/>
+            <a:ext cx="590550" cy="590550"/>
           </a:xfrm>
           <a:prstGeom prst="ellipse">
             <a:avLst/>
           </a:prstGeom>
           <a:solidFill>
-            <a:srgbClr val="1E5BC6"/>
+            <a:srgbClr val="0D2B5E"/>
           </a:solidFill>
           <a:ln>
             <a:noFill/>
@@ -7338,33 +8293,115 @@
       </p:sp>
       <p:sp>
         <p:nvSpPr>
-          <p:cNvPr id="23" name="TextBox 22"/>
-          <p:cNvSpPr txBox="1"/>
-          <p:nvPr/>
-        </p:nvSpPr>
-        <p:spPr>
-          <a:xfrm>
-            <a:off x="10263188" y="5349240"/>
-            <a:ext cx="6634162" cy="453390"/>
-          </a:xfrm>
-          <a:prstGeom prst="rect">
-            <a:avLst/>
-          </a:prstGeom>
-          <a:noFill/>
-        </p:spPr>
-        <p:txBody>
-          <a:bodyPr wrap="square" lIns="0" rIns="0" tIns="0" bIns="0" anchor="ctr">
+          <p:cNvPr id="20" name="TextBox 19"/>
+          <p:cNvSpPr txBox="1"/>
+          <p:nvPr/>
+        </p:nvSpPr>
+        <p:spPr>
+          <a:xfrm>
+            <a:off x="1447800" y="5867400"/>
+            <a:ext cx="590550" cy="323850"/>
+          </a:xfrm>
+          <a:prstGeom prst="rect">
+            <a:avLst/>
+          </a:prstGeom>
+          <a:noFill/>
+        </p:spPr>
+        <p:txBody>
+          <a:bodyPr wrap="square" lIns="0" rIns="0" tIns="0" bIns="0" anchor="t">
+            <a:spAutoFit/>
+          </a:bodyPr>
+          <a:lstStyle/>
+          <a:p>
+            <a:pPr algn="ctr">
+              <a:lnSpc>
+                <a:spcPct val="100000"/>
+              </a:lnSpc>
+            </a:pPr>
+            <a:r>
+              <a:rPr sz="2250" b="1">
+                <a:solidFill>
+                  <a:srgbClr val="FFFFFF"/>
+                </a:solidFill>
+                <a:latin typeface="Pretendard"/>
+                <a:ea typeface="Pretendard"/>
+                <a:cs typeface="Pretendard"/>
+              </a:rPr>
+              <a:t>3</a:t>
+            </a:r>
+          </a:p>
+        </p:txBody>
+      </p:sp>
+      <p:sp>
+        <p:nvSpPr>
+          <p:cNvPr id="21" name="TextBox 20"/>
+          <p:cNvSpPr txBox="1"/>
+          <p:nvPr/>
+        </p:nvSpPr>
+        <p:spPr>
+          <a:xfrm>
+            <a:off x="2324100" y="5676900"/>
+            <a:ext cx="9906000" cy="400050"/>
+          </a:xfrm>
+          <a:prstGeom prst="rect">
+            <a:avLst/>
+          </a:prstGeom>
+          <a:noFill/>
+        </p:spPr>
+        <p:txBody>
+          <a:bodyPr wrap="square" lIns="0" rIns="0" tIns="0" bIns="0" anchor="t">
             <a:spAutoFit/>
           </a:bodyPr>
           <a:lstStyle/>
           <a:p>
             <a:pPr algn="l">
               <a:lnSpc>
+                <a:spcPct val="110000"/>
+              </a:lnSpc>
+            </a:pPr>
+            <a:r>
+              <a:rPr sz="2475" b="1">
+                <a:solidFill>
+                  <a:srgbClr val="0D2B5E"/>
+                </a:solidFill>
+                <a:latin typeface="Pretendard"/>
+                <a:ea typeface="Pretendard"/>
+                <a:cs typeface="Pretendard"/>
+              </a:rPr>
+              <a:t>4주차 stop → up -d → ps</a:t>
+            </a:r>
+          </a:p>
+        </p:txBody>
+      </p:sp>
+      <p:sp>
+        <p:nvSpPr>
+          <p:cNvPr id="22" name="TextBox 21"/>
+          <p:cNvSpPr txBox="1"/>
+          <p:nvPr/>
+        </p:nvSpPr>
+        <p:spPr>
+          <a:xfrm>
+            <a:off x="2324100" y="6076950"/>
+            <a:ext cx="9906000" cy="361950"/>
+          </a:xfrm>
+          <a:prstGeom prst="rect">
+            <a:avLst/>
+          </a:prstGeom>
+          <a:noFill/>
+        </p:spPr>
+        <p:txBody>
+          <a:bodyPr wrap="square" lIns="0" rIns="0" tIns="0" bIns="0" anchor="t">
+            <a:spAutoFit/>
+          </a:bodyPr>
+          <a:lstStyle/>
+          <a:p>
+            <a:pPr algn="l">
+              <a:lnSpc>
                 <a:spcPct val="120000"/>
               </a:lnSpc>
             </a:pPr>
             <a:r>
-              <a:rPr sz="1575" b="0">
+              <a:rPr sz="2025" b="0">
                 <a:solidFill>
                   <a:srgbClr val="3D3D3D"/>
                 </a:solidFill>
@@ -7372,8 +8409,42 @@
                 <a:ea typeface="Pretendard"/>
                 <a:cs typeface="Pretendard"/>
               </a:rPr>
-              <a:t>services: 안에 넣으면 must be a mapping</a:t>
-            </a:r>
+              <a:t>컨테이너 4개 Up — spark-master · spark-minio · worker-1 · 2</a:t>
+            </a:r>
+          </a:p>
+        </p:txBody>
+      </p:sp>
+      <p:sp>
+        <p:nvSpPr>
+          <p:cNvPr id="23" name="Rounded Rectangle 22"/>
+          <p:cNvSpPr/>
+          <p:nvPr/>
+        </p:nvSpPr>
+        <p:spPr>
+          <a:xfrm>
+            <a:off x="1143000" y="6734175"/>
+            <a:ext cx="11430000" cy="1095375"/>
+          </a:xfrm>
+          <a:prstGeom prst="roundRect">
+            <a:avLst>
+              <a:gd name="adj" fmla="val 4347"/>
+            </a:avLst>
+          </a:prstGeom>
+          <a:solidFill>
+            <a:srgbClr val="FAFBFD"/>
+          </a:solidFill>
+          <a:ln w="9525">
+            <a:solidFill>
+              <a:srgbClr val="DCE1E8"/>
+            </a:solidFill>
+          </a:ln>
+          <a:effectLst/>
+        </p:spPr>
+        <p:txBody>
+          <a:bodyPr rtlCol="0" anchor="ctr" wrap="square"/>
+          <a:lstStyle/>
+          <a:p>
+            <a:pPr algn="ctr"/>
           </a:p>
         </p:txBody>
       </p:sp>
@@ -7385,14 +8456,14 @@
         </p:nvSpPr>
         <p:spPr>
           <a:xfrm>
-            <a:off x="10077450" y="6037898"/>
-            <a:ext cx="97155" cy="97155"/>
+            <a:off x="1447800" y="6981825"/>
+            <a:ext cx="590550" cy="590550"/>
           </a:xfrm>
           <a:prstGeom prst="ellipse">
             <a:avLst/>
           </a:prstGeom>
           <a:solidFill>
-            <a:srgbClr val="1E5BC6"/>
+            <a:srgbClr val="0D2B5E"/>
           </a:solidFill>
           <a:ln>
             <a:noFill/>
@@ -7415,27 +8486,109 @@
         </p:nvSpPr>
         <p:spPr>
           <a:xfrm>
-            <a:off x="10263188" y="5859780"/>
-            <a:ext cx="6634162" cy="453390"/>
-          </a:xfrm>
-          <a:prstGeom prst="rect">
-            <a:avLst/>
-          </a:prstGeom>
-          <a:noFill/>
-        </p:spPr>
-        <p:txBody>
-          <a:bodyPr wrap="square" lIns="0" rIns="0" tIns="0" bIns="0" anchor="ctr">
+            <a:off x="1447800" y="7134225"/>
+            <a:ext cx="590550" cy="323850"/>
+          </a:xfrm>
+          <a:prstGeom prst="rect">
+            <a:avLst/>
+          </a:prstGeom>
+          <a:noFill/>
+        </p:spPr>
+        <p:txBody>
+          <a:bodyPr wrap="square" lIns="0" rIns="0" tIns="0" bIns="0" anchor="t">
+            <a:spAutoFit/>
+          </a:bodyPr>
+          <a:lstStyle/>
+          <a:p>
+            <a:pPr algn="ctr">
+              <a:lnSpc>
+                <a:spcPct val="100000"/>
+              </a:lnSpc>
+            </a:pPr>
+            <a:r>
+              <a:rPr sz="2250" b="1">
+                <a:solidFill>
+                  <a:srgbClr val="FFFFFF"/>
+                </a:solidFill>
+                <a:latin typeface="Pretendard"/>
+                <a:ea typeface="Pretendard"/>
+                <a:cs typeface="Pretendard"/>
+              </a:rPr>
+              <a:t>4</a:t>
+            </a:r>
+          </a:p>
+        </p:txBody>
+      </p:sp>
+      <p:sp>
+        <p:nvSpPr>
+          <p:cNvPr id="26" name="TextBox 25"/>
+          <p:cNvSpPr txBox="1"/>
+          <p:nvPr/>
+        </p:nvSpPr>
+        <p:spPr>
+          <a:xfrm>
+            <a:off x="2324100" y="6943725"/>
+            <a:ext cx="9906000" cy="400050"/>
+          </a:xfrm>
+          <a:prstGeom prst="rect">
+            <a:avLst/>
+          </a:prstGeom>
+          <a:noFill/>
+        </p:spPr>
+        <p:txBody>
+          <a:bodyPr wrap="square" lIns="0" rIns="0" tIns="0" bIns="0" anchor="t">
             <a:spAutoFit/>
           </a:bodyPr>
           <a:lstStyle/>
           <a:p>
             <a:pPr algn="l">
               <a:lnSpc>
+                <a:spcPct val="110000"/>
+              </a:lnSpc>
+            </a:pPr>
+            <a:r>
+              <a:rPr sz="2475" b="1">
+                <a:solidFill>
+                  <a:srgbClr val="0D2B5E"/>
+                </a:solidFill>
+                <a:latin typeface="Pretendard"/>
+                <a:ea typeface="Pretendard"/>
+                <a:cs typeface="Pretendard"/>
+              </a:rPr>
+              <a:t>mc mb -p m/warehouse</a:t>
+            </a:r>
+          </a:p>
+        </p:txBody>
+      </p:sp>
+      <p:sp>
+        <p:nvSpPr>
+          <p:cNvPr id="27" name="TextBox 26"/>
+          <p:cNvSpPr txBox="1"/>
+          <p:nvPr/>
+        </p:nvSpPr>
+        <p:spPr>
+          <a:xfrm>
+            <a:off x="2324100" y="7343775"/>
+            <a:ext cx="9906000" cy="361950"/>
+          </a:xfrm>
+          <a:prstGeom prst="rect">
+            <a:avLst/>
+          </a:prstGeom>
+          <a:noFill/>
+        </p:spPr>
+        <p:txBody>
+          <a:bodyPr wrap="square" lIns="0" rIns="0" tIns="0" bIns="0" anchor="t">
+            <a:spAutoFit/>
+          </a:bodyPr>
+          <a:lstStyle/>
+          <a:p>
+            <a:pPr algn="l">
+              <a:lnSpc>
                 <a:spcPct val="120000"/>
               </a:lnSpc>
             </a:pPr>
             <a:r>
-              <a:rPr sz="1575" b="0">
+              <a:rPr sz="2025" b="0">
                 <a:solidFill>
                   <a:srgbClr val="3D3D3D"/>
                 </a:solidFill>
@@ -7443,27 +8596,161 @@
                 <a:ea typeface="Pretendard"/>
                 <a:cs typeface="Pretendard"/>
               </a:rPr>
-              <a:t>YAML 은 들여쓰기가 곧 구조</a:t>
-            </a:r>
-          </a:p>
-        </p:txBody>
-      </p:sp>
-      <p:sp>
-        <p:nvSpPr>
-          <p:cNvPr id="26" name="Oval 25"/>
-          <p:cNvSpPr/>
-          <p:nvPr/>
-        </p:nvSpPr>
-        <p:spPr>
-          <a:xfrm>
-            <a:off x="8686800" y="3771900"/>
-            <a:ext cx="914400" cy="914400"/>
-          </a:xfrm>
-          <a:prstGeom prst="ellipse">
-            <a:avLst/>
-          </a:prstGeom>
-          <a:solidFill>
-            <a:srgbClr val="0D2B5E"/>
+              <a:t>Bucket created successfully — 네트워크 week5_default</a:t>
+            </a:r>
+          </a:p>
+        </p:txBody>
+      </p:sp>
+      <p:sp>
+        <p:nvSpPr>
+          <p:cNvPr id="28" name="Rounded Rectangle 27"/>
+          <p:cNvSpPr/>
+          <p:nvPr/>
+        </p:nvSpPr>
+        <p:spPr>
+          <a:xfrm>
+            <a:off x="13144500" y="2933700"/>
+            <a:ext cx="4000500" cy="4895850"/>
+          </a:xfrm>
+          <a:prstGeom prst="roundRect">
+            <a:avLst>
+              <a:gd name="adj" fmla="val 1190"/>
+            </a:avLst>
+          </a:prstGeom>
+          <a:solidFill>
+            <a:srgbClr val="EDF3FD"/>
+          </a:solidFill>
+          <a:ln w="9525">
+            <a:solidFill>
+              <a:srgbClr val="BFD3F5"/>
+            </a:solidFill>
+          </a:ln>
+          <a:effectLst/>
+        </p:spPr>
+        <p:txBody>
+          <a:bodyPr rtlCol="0" anchor="ctr" wrap="square"/>
+          <a:lstStyle/>
+          <a:p>
+            <a:pPr algn="ctr"/>
+          </a:p>
+        </p:txBody>
+      </p:sp>
+      <p:sp>
+        <p:nvSpPr>
+          <p:cNvPr id="29" name="TextBox 28"/>
+          <p:cNvSpPr txBox="1"/>
+          <p:nvPr/>
+        </p:nvSpPr>
+        <p:spPr>
+          <a:xfrm>
+            <a:off x="13487400" y="4562475"/>
+            <a:ext cx="3314700" cy="304800"/>
+          </a:xfrm>
+          <a:prstGeom prst="rect">
+            <a:avLst/>
+          </a:prstGeom>
+          <a:noFill/>
+        </p:spPr>
+        <p:txBody>
+          <a:bodyPr wrap="square" lIns="0" rIns="0" tIns="0" bIns="0" anchor="t">
+            <a:spAutoFit/>
+          </a:bodyPr>
+          <a:lstStyle/>
+          <a:p>
+            <a:pPr algn="l">
+              <a:lnSpc>
+                <a:spcPct val="100000"/>
+              </a:lnSpc>
+            </a:pPr>
+            <a:r>
+              <a:rPr sz="1800" b="1" spc="190">
+                <a:solidFill>
+                  <a:srgbClr val="1E5BC6"/>
+                </a:solidFill>
+                <a:latin typeface="Pretendard"/>
+                <a:ea typeface="Pretendard"/>
+                <a:cs typeface="Pretendard"/>
+              </a:rPr>
+              <a:t>두 번 붙이면</a:t>
+            </a:r>
+          </a:p>
+        </p:txBody>
+      </p:sp>
+      <p:sp>
+        <p:nvSpPr>
+          <p:cNvPr id="30" name="TextBox 29"/>
+          <p:cNvSpPr txBox="1"/>
+          <p:nvPr/>
+        </p:nvSpPr>
+        <p:spPr>
+          <a:xfrm>
+            <a:off x="13487400" y="4962525"/>
+            <a:ext cx="3314700" cy="1238250"/>
+          </a:xfrm>
+          <a:prstGeom prst="rect">
+            <a:avLst/>
+          </a:prstGeom>
+          <a:noFill/>
+        </p:spPr>
+        <p:txBody>
+          <a:bodyPr wrap="square" lIns="0" rIns="0" tIns="0" bIns="0" anchor="t">
+            <a:spAutoFit/>
+          </a:bodyPr>
+          <a:lstStyle/>
+          <a:p>
+            <a:pPr algn="l">
+              <a:lnSpc>
+                <a:spcPct val="138000"/>
+              </a:lnSpc>
+            </a:pPr>
+            <a:r>
+              <a:rPr sz="2700" b="1">
+                <a:solidFill>
+                  <a:srgbClr val="0D2B5E"/>
+                </a:solidFill>
+                <a:latin typeface="Pretendard"/>
+                <a:ea typeface="Pretendard"/>
+                <a:cs typeface="Pretendard"/>
+              </a:rPr>
+              <a:t>volumes</a:t>
+            </a:r>
+          </a:p>
+          <a:p>
+            <a:pPr algn="l">
+              <a:lnSpc>
+                <a:spcPct val="138000"/>
+              </a:lnSpc>
+            </a:pPr>
+            <a:r>
+              <a:rPr sz="2700" b="1">
+                <a:solidFill>
+                  <a:srgbClr val="0D2B5E"/>
+                </a:solidFill>
+                <a:latin typeface="Pretendard"/>
+                <a:ea typeface="Pretendard"/>
+                <a:cs typeface="Pretendard"/>
+              </a:rPr>
+              <a:t>already defined</a:t>
+            </a:r>
+          </a:p>
+        </p:txBody>
+      </p:sp>
+      <p:sp>
+        <p:nvSpPr>
+          <p:cNvPr id="31" name="Rectangle 30"/>
+          <p:cNvSpPr/>
+          <p:nvPr/>
+        </p:nvSpPr>
+        <p:spPr>
+          <a:xfrm>
+            <a:off x="1143000" y="8058150"/>
+            <a:ext cx="16002000" cy="9525"/>
+          </a:xfrm>
+          <a:prstGeom prst="rect">
+            <a:avLst/>
+          </a:prstGeom>
+          <a:solidFill>
+            <a:srgbClr val="DCE1E8"/>
           </a:solidFill>
           <a:ln>
             <a:noFill/>
@@ -7480,78 +8767,7 @@
       </p:sp>
       <p:sp>
         <p:nvSpPr>
-          <p:cNvPr id="27" name="TextBox 26"/>
-          <p:cNvSpPr txBox="1"/>
-          <p:nvPr/>
-        </p:nvSpPr>
-        <p:spPr>
-          <a:xfrm>
-            <a:off x="8686800" y="4057650"/>
-            <a:ext cx="914400" cy="381000"/>
-          </a:xfrm>
-          <a:prstGeom prst="rect">
-            <a:avLst/>
-          </a:prstGeom>
-          <a:noFill/>
-        </p:spPr>
-        <p:txBody>
-          <a:bodyPr wrap="square" lIns="0" rIns="0" tIns="0" bIns="0" anchor="t">
-            <a:spAutoFit/>
-          </a:bodyPr>
-          <a:lstStyle/>
-          <a:p>
-            <a:pPr algn="ctr">
-              <a:lnSpc>
-                <a:spcPct val="100000"/>
-              </a:lnSpc>
-            </a:pPr>
-            <a:r>
-              <a:rPr sz="2250" b="1">
-                <a:solidFill>
-                  <a:srgbClr val="FFFFFF"/>
-                </a:solidFill>
-                <a:latin typeface="Pretendard"/>
-                <a:ea typeface="Pretendard"/>
-                <a:cs typeface="Pretendard"/>
-              </a:rPr>
-              <a:t>VS</a:t>
-            </a:r>
-          </a:p>
-        </p:txBody>
-      </p:sp>
-      <p:sp>
-        <p:nvSpPr>
-          <p:cNvPr id="28" name="Rectangle 27"/>
-          <p:cNvSpPr/>
-          <p:nvPr/>
-        </p:nvSpPr>
-        <p:spPr>
-          <a:xfrm>
-            <a:off x="1143000" y="8058150"/>
-            <a:ext cx="16002000" cy="9525"/>
-          </a:xfrm>
-          <a:prstGeom prst="rect">
-            <a:avLst/>
-          </a:prstGeom>
-          <a:solidFill>
-            <a:srgbClr val="DCE1E8"/>
-          </a:solidFill>
-          <a:ln>
-            <a:noFill/>
-          </a:ln>
-          <a:effectLst/>
-        </p:spPr>
-        <p:txBody>
-          <a:bodyPr rtlCol="0" anchor="ctr" wrap="square"/>
-          <a:lstStyle/>
-          <a:p>
-            <a:pPr algn="ctr"/>
-          </a:p>
-        </p:txBody>
-      </p:sp>
-      <p:sp>
-        <p:nvSpPr>
-          <p:cNvPr id="29" name="TextBox 28"/>
+          <p:cNvPr id="32" name="TextBox 31"/>
           <p:cNvSpPr txBox="1"/>
           <p:nvPr/>
         </p:nvSpPr>
@@ -7592,7 +8808,7 @@
       </p:sp>
       <p:sp>
         <p:nvSpPr>
-          <p:cNvPr id="30" name="TextBox 29"/>
+          <p:cNvPr id="33" name="TextBox 32"/>
           <p:cNvSpPr txBox="1"/>
           <p:nvPr/>
         </p:nvSpPr>
@@ -7775,7 +8991,7 @@
                 <a:ea typeface="Pretendard"/>
                 <a:cs typeface="Pretendard"/>
               </a:rPr>
-              <a:t>1·2단계</a:t>
+              <a:t>3단계</a:t>
             </a:r>
           </a:p>
         </p:txBody>
@@ -7816,7 +9032,7 @@
                 <a:ea typeface="Pretendard"/>
                 <a:cs typeface="Pretendard"/>
               </a:rPr>
-              <a:t>핵심 명령 — 기동 · 상태 · 버킷 · 콘솔</a:t>
+              <a:t>lake-pyspark.sh — 열두 줄을 파일 하나로</a:t>
             </a:r>
           </a:p>
         </p:txBody>
@@ -7853,88 +9069,19 @@
       </p:sp>
       <p:sp>
         <p:nvSpPr>
-          <p:cNvPr id="8" name="Rectangle 7"/>
-          <p:cNvSpPr/>
-          <p:nvPr/>
-        </p:nvSpPr>
-        <p:spPr>
-          <a:xfrm>
-            <a:off x="1143000" y="2781300"/>
-            <a:ext cx="2216313" cy="571500"/>
-          </a:xfrm>
-          <a:prstGeom prst="rect">
-            <a:avLst/>
-          </a:prstGeom>
-          <a:solidFill>
-            <a:srgbClr val="0D2B5E"/>
-          </a:solidFill>
-          <a:ln>
-            <a:noFill/>
-          </a:ln>
-          <a:effectLst/>
-        </p:spPr>
-        <p:txBody>
-          <a:bodyPr rtlCol="0" anchor="ctr" wrap="square"/>
-          <a:lstStyle/>
-          <a:p>
-            <a:pPr algn="ctr"/>
-          </a:p>
-        </p:txBody>
-      </p:sp>
-      <p:sp>
-        <p:nvSpPr>
-          <p:cNvPr id="9" name="TextBox 8"/>
-          <p:cNvSpPr txBox="1"/>
-          <p:nvPr/>
-        </p:nvSpPr>
-        <p:spPr>
-          <a:xfrm>
-            <a:off x="1143000" y="2781300"/>
-            <a:ext cx="2216313" cy="571500"/>
-          </a:xfrm>
-          <a:prstGeom prst="rect">
-            <a:avLst/>
-          </a:prstGeom>
-          <a:noFill/>
-        </p:spPr>
-        <p:txBody>
-          <a:bodyPr wrap="square" lIns="0" rIns="0" tIns="0" bIns="0" anchor="ctr">
-            <a:spAutoFit/>
-          </a:bodyPr>
-          <a:lstStyle/>
-          <a:p>
-            <a:pPr algn="ctr">
-              <a:lnSpc>
-                <a:spcPct val="100000"/>
-              </a:lnSpc>
-            </a:pPr>
-            <a:r>
-              <a:rPr sz="1800" b="1">
-                <a:solidFill>
-                  <a:srgbClr val="FFFFFF"/>
-                </a:solidFill>
-                <a:latin typeface="Pretendard"/>
-                <a:ea typeface="Pretendard"/>
-                <a:cs typeface="Pretendard"/>
-              </a:rPr>
-              <a:t>4주차 MinIO 내리기</a:t>
-            </a:r>
-          </a:p>
-        </p:txBody>
-      </p:sp>
-      <p:sp>
-        <p:nvSpPr>
-          <p:cNvPr id="10" name="Rectangle 9"/>
-          <p:cNvSpPr/>
-          <p:nvPr/>
-        </p:nvSpPr>
-        <p:spPr>
-          <a:xfrm>
-            <a:off x="3359313" y="2781300"/>
-            <a:ext cx="13785687" cy="571500"/>
-          </a:xfrm>
-          <a:prstGeom prst="rect">
-            <a:avLst/>
+          <p:cNvPr id="8" name="Rounded Rectangle 7"/>
+          <p:cNvSpPr/>
+          <p:nvPr/>
+        </p:nvSpPr>
+        <p:spPr>
+          <a:xfrm>
+            <a:off x="1143000" y="2933700"/>
+            <a:ext cx="11430000" cy="1095375"/>
+          </a:xfrm>
+          <a:prstGeom prst="roundRect">
+            <a:avLst>
+              <a:gd name="adj" fmla="val 4347"/>
+            </a:avLst>
           </a:prstGeom>
           <a:solidFill>
             <a:srgbClr val="FAFBFD"/>
@@ -7956,57 +9103,16 @@
       </p:sp>
       <p:sp>
         <p:nvSpPr>
-          <p:cNvPr id="11" name="TextBox 10"/>
-          <p:cNvSpPr txBox="1"/>
-          <p:nvPr/>
-        </p:nvSpPr>
-        <p:spPr>
-          <a:xfrm>
-            <a:off x="3511713" y="2781300"/>
-            <a:ext cx="13480887" cy="571500"/>
-          </a:xfrm>
-          <a:prstGeom prst="rect">
-            <a:avLst/>
-          </a:prstGeom>
-          <a:noFill/>
-        </p:spPr>
-        <p:txBody>
-          <a:bodyPr wrap="square" lIns="0" rIns="0" tIns="0" bIns="0" anchor="ctr">
-            <a:spAutoFit/>
-          </a:bodyPr>
-          <a:lstStyle/>
-          <a:p>
-            <a:pPr algn="l">
-              <a:lnSpc>
-                <a:spcPct val="115000"/>
-              </a:lnSpc>
-            </a:pPr>
-            <a:r>
-              <a:rPr sz="1800" b="0">
-                <a:solidFill>
-                  <a:srgbClr val="3D3D3D"/>
-                </a:solidFill>
-                <a:latin typeface="Pretendard"/>
-                <a:ea typeface="Pretendard"/>
-                <a:cs typeface="Pretendard"/>
-              </a:rPr>
-              <a:t>cd ~/lakehouse &amp;&amp; docker compose stop</a:t>
-            </a:r>
-          </a:p>
-        </p:txBody>
-      </p:sp>
-      <p:sp>
-        <p:nvSpPr>
-          <p:cNvPr id="12" name="Rectangle 11"/>
-          <p:cNvSpPr/>
-          <p:nvPr/>
-        </p:nvSpPr>
-        <p:spPr>
-          <a:xfrm>
-            <a:off x="1143000" y="3429000"/>
-            <a:ext cx="2216313" cy="571500"/>
-          </a:xfrm>
-          <a:prstGeom prst="rect">
+          <p:cNvPr id="9" name="Oval 8"/>
+          <p:cNvSpPr/>
+          <p:nvPr/>
+        </p:nvSpPr>
+        <p:spPr>
+          <a:xfrm>
+            <a:off x="1447800" y="3181350"/>
+            <a:ext cx="590550" cy="590550"/>
+          </a:xfrm>
+          <a:prstGeom prst="ellipse">
             <a:avLst/>
           </a:prstGeom>
           <a:solidFill>
@@ -8027,22 +9133,22 @@
       </p:sp>
       <p:sp>
         <p:nvSpPr>
-          <p:cNvPr id="13" name="TextBox 12"/>
-          <p:cNvSpPr txBox="1"/>
-          <p:nvPr/>
-        </p:nvSpPr>
-        <p:spPr>
-          <a:xfrm>
-            <a:off x="1143000" y="3429000"/>
-            <a:ext cx="2216313" cy="571500"/>
-          </a:xfrm>
-          <a:prstGeom prst="rect">
-            <a:avLst/>
-          </a:prstGeom>
-          <a:noFill/>
-        </p:spPr>
-        <p:txBody>
-          <a:bodyPr wrap="square" lIns="0" rIns="0" tIns="0" bIns="0" anchor="ctr">
+          <p:cNvPr id="10" name="TextBox 9"/>
+          <p:cNvSpPr txBox="1"/>
+          <p:nvPr/>
+        </p:nvSpPr>
+        <p:spPr>
+          <a:xfrm>
+            <a:off x="1447800" y="3333750"/>
+            <a:ext cx="590550" cy="323850"/>
+          </a:xfrm>
+          <a:prstGeom prst="rect">
+            <a:avLst/>
+          </a:prstGeom>
+          <a:noFill/>
+        </p:spPr>
+        <p:txBody>
+          <a:bodyPr wrap="square" lIns="0" rIns="0" tIns="0" bIns="0" anchor="t">
             <a:spAutoFit/>
           </a:bodyPr>
           <a:lstStyle/>
@@ -8053,7 +9159,7 @@
               </a:lnSpc>
             </a:pPr>
             <a:r>
-              <a:rPr sz="1800" b="1">
+              <a:rPr sz="2250" b="1">
                 <a:solidFill>
                   <a:srgbClr val="FFFFFF"/>
                 </a:solidFill>
@@ -8061,24 +9167,108 @@
                 <a:ea typeface="Pretendard"/>
                 <a:cs typeface="Pretendard"/>
               </a:rPr>
-              <a:t>기동</a:t>
-            </a:r>
-          </a:p>
-        </p:txBody>
-      </p:sp>
-      <p:sp>
-        <p:nvSpPr>
-          <p:cNvPr id="14" name="Rectangle 13"/>
-          <p:cNvSpPr/>
-          <p:nvPr/>
-        </p:nvSpPr>
-        <p:spPr>
-          <a:xfrm>
-            <a:off x="3359313" y="3429000"/>
-            <a:ext cx="13785687" cy="571500"/>
-          </a:xfrm>
-          <a:prstGeom prst="rect">
-            <a:avLst/>
+              <a:t>1</a:t>
+            </a:r>
+          </a:p>
+        </p:txBody>
+      </p:sp>
+      <p:sp>
+        <p:nvSpPr>
+          <p:cNvPr id="11" name="TextBox 10"/>
+          <p:cNvSpPr txBox="1"/>
+          <p:nvPr/>
+        </p:nvSpPr>
+        <p:spPr>
+          <a:xfrm>
+            <a:off x="2324100" y="3143250"/>
+            <a:ext cx="9906000" cy="400050"/>
+          </a:xfrm>
+          <a:prstGeom prst="rect">
+            <a:avLst/>
+          </a:prstGeom>
+          <a:noFill/>
+        </p:spPr>
+        <p:txBody>
+          <a:bodyPr wrap="square" lIns="0" rIns="0" tIns="0" bIns="0" anchor="t">
+            <a:spAutoFit/>
+          </a:bodyPr>
+          <a:lstStyle/>
+          <a:p>
+            <a:pPr algn="l">
+              <a:lnSpc>
+                <a:spcPct val="110000"/>
+              </a:lnSpc>
+            </a:pPr>
+            <a:r>
+              <a:rPr sz="2475" b="1">
+                <a:solidFill>
+                  <a:srgbClr val="0D2B5E"/>
+                </a:solidFill>
+                <a:latin typeface="Pretendard"/>
+                <a:ea typeface="Pretendard"/>
+                <a:cs typeface="Pretendard"/>
+              </a:rPr>
+              <a:t>cat &gt; lake-pyspark.sh &lt;&lt; 'EOF'</a:t>
+            </a:r>
+          </a:p>
+        </p:txBody>
+      </p:sp>
+      <p:sp>
+        <p:nvSpPr>
+          <p:cNvPr id="12" name="TextBox 11"/>
+          <p:cNvSpPr txBox="1"/>
+          <p:nvPr/>
+        </p:nvSpPr>
+        <p:spPr>
+          <a:xfrm>
+            <a:off x="2324100" y="3543300"/>
+            <a:ext cx="9906000" cy="361950"/>
+          </a:xfrm>
+          <a:prstGeom prst="rect">
+            <a:avLst/>
+          </a:prstGeom>
+          <a:noFill/>
+        </p:spPr>
+        <p:txBody>
+          <a:bodyPr wrap="square" lIns="0" rIns="0" tIns="0" bIns="0" anchor="t">
+            <a:spAutoFit/>
+          </a:bodyPr>
+          <a:lstStyle/>
+          <a:p>
+            <a:pPr algn="l">
+              <a:lnSpc>
+                <a:spcPct val="120000"/>
+              </a:lnSpc>
+            </a:pPr>
+            <a:r>
+              <a:rPr sz="2025" b="0">
+                <a:solidFill>
+                  <a:srgbClr val="3D3D3D"/>
+                </a:solidFill>
+                <a:latin typeface="Pretendard"/>
+                <a:ea typeface="Pretendard"/>
+                <a:cs typeface="Pretendard"/>
+              </a:rPr>
+              <a:t>exec spark-master pyspark + --master · --packages · --conf</a:t>
+            </a:r>
+          </a:p>
+        </p:txBody>
+      </p:sp>
+      <p:sp>
+        <p:nvSpPr>
+          <p:cNvPr id="13" name="Rounded Rectangle 12"/>
+          <p:cNvSpPr/>
+          <p:nvPr/>
+        </p:nvSpPr>
+        <p:spPr>
+          <a:xfrm>
+            <a:off x="1143000" y="4200525"/>
+            <a:ext cx="11430000" cy="1095375"/>
+          </a:xfrm>
+          <a:prstGeom prst="roundRect">
+            <a:avLst>
+              <a:gd name="adj" fmla="val 4347"/>
+            </a:avLst>
           </a:prstGeom>
           <a:solidFill>
             <a:srgbClr val="FAFBFD"/>
@@ -8100,57 +9290,16 @@
       </p:sp>
       <p:sp>
         <p:nvSpPr>
-          <p:cNvPr id="15" name="TextBox 14"/>
-          <p:cNvSpPr txBox="1"/>
-          <p:nvPr/>
-        </p:nvSpPr>
-        <p:spPr>
-          <a:xfrm>
-            <a:off x="3511713" y="3429000"/>
-            <a:ext cx="13480887" cy="571500"/>
-          </a:xfrm>
-          <a:prstGeom prst="rect">
-            <a:avLst/>
-          </a:prstGeom>
-          <a:noFill/>
-        </p:spPr>
-        <p:txBody>
-          <a:bodyPr wrap="square" lIns="0" rIns="0" tIns="0" bIns="0" anchor="ctr">
-            <a:spAutoFit/>
-          </a:bodyPr>
-          <a:lstStyle/>
-          <a:p>
-            <a:pPr algn="l">
-              <a:lnSpc>
-                <a:spcPct val="115000"/>
-              </a:lnSpc>
-            </a:pPr>
-            <a:r>
-              <a:rPr sz="1800" b="0">
-                <a:solidFill>
-                  <a:srgbClr val="3D3D3D"/>
-                </a:solidFill>
-                <a:latin typeface="Pretendard"/>
-                <a:ea typeface="Pretendard"/>
-                <a:cs typeface="Pretendard"/>
-              </a:rPr>
-              <a:t>cd ~/data-eng/week5 &amp;&amp; docker compose up -d</a:t>
-            </a:r>
-          </a:p>
-        </p:txBody>
-      </p:sp>
-      <p:sp>
-        <p:nvSpPr>
-          <p:cNvPr id="16" name="Rectangle 15"/>
-          <p:cNvSpPr/>
-          <p:nvPr/>
-        </p:nvSpPr>
-        <p:spPr>
-          <a:xfrm>
-            <a:off x="1143000" y="4076700"/>
-            <a:ext cx="2216313" cy="571500"/>
-          </a:xfrm>
-          <a:prstGeom prst="rect">
+          <p:cNvPr id="14" name="Oval 13"/>
+          <p:cNvSpPr/>
+          <p:nvPr/>
+        </p:nvSpPr>
+        <p:spPr>
+          <a:xfrm>
+            <a:off x="1447800" y="4448175"/>
+            <a:ext cx="590550" cy="590550"/>
+          </a:xfrm>
+          <a:prstGeom prst="ellipse">
             <a:avLst/>
           </a:prstGeom>
           <a:solidFill>
@@ -8171,58 +9320,142 @@
       </p:sp>
       <p:sp>
         <p:nvSpPr>
+          <p:cNvPr id="15" name="TextBox 14"/>
+          <p:cNvSpPr txBox="1"/>
+          <p:nvPr/>
+        </p:nvSpPr>
+        <p:spPr>
+          <a:xfrm>
+            <a:off x="1447800" y="4600575"/>
+            <a:ext cx="590550" cy="323850"/>
+          </a:xfrm>
+          <a:prstGeom prst="rect">
+            <a:avLst/>
+          </a:prstGeom>
+          <a:noFill/>
+        </p:spPr>
+        <p:txBody>
+          <a:bodyPr wrap="square" lIns="0" rIns="0" tIns="0" bIns="0" anchor="t">
+            <a:spAutoFit/>
+          </a:bodyPr>
+          <a:lstStyle/>
+          <a:p>
+            <a:pPr algn="ctr">
+              <a:lnSpc>
+                <a:spcPct val="100000"/>
+              </a:lnSpc>
+            </a:pPr>
+            <a:r>
+              <a:rPr sz="2250" b="1">
+                <a:solidFill>
+                  <a:srgbClr val="FFFFFF"/>
+                </a:solidFill>
+                <a:latin typeface="Pretendard"/>
+                <a:ea typeface="Pretendard"/>
+                <a:cs typeface="Pretendard"/>
+              </a:rPr>
+              <a:t>2</a:t>
+            </a:r>
+          </a:p>
+        </p:txBody>
+      </p:sp>
+      <p:sp>
+        <p:nvSpPr>
+          <p:cNvPr id="16" name="TextBox 15"/>
+          <p:cNvSpPr txBox="1"/>
+          <p:nvPr/>
+        </p:nvSpPr>
+        <p:spPr>
+          <a:xfrm>
+            <a:off x="2324100" y="4410075"/>
+            <a:ext cx="9906000" cy="400050"/>
+          </a:xfrm>
+          <a:prstGeom prst="rect">
+            <a:avLst/>
+          </a:prstGeom>
+          <a:noFill/>
+        </p:spPr>
+        <p:txBody>
+          <a:bodyPr wrap="square" lIns="0" rIns="0" tIns="0" bIns="0" anchor="t">
+            <a:spAutoFit/>
+          </a:bodyPr>
+          <a:lstStyle/>
+          <a:p>
+            <a:pPr algn="l">
+              <a:lnSpc>
+                <a:spcPct val="110000"/>
+              </a:lnSpc>
+            </a:pPr>
+            <a:r>
+              <a:rPr sz="2475" b="1">
+                <a:solidFill>
+                  <a:srgbClr val="0D2B5E"/>
+                </a:solidFill>
+                <a:latin typeface="Pretendard"/>
+                <a:ea typeface="Pretendard"/>
+                <a:cs typeface="Pretendard"/>
+              </a:rPr>
+              <a:t>--conf spark.jars.ivy=/tmp/.ivy2</a:t>
+            </a:r>
+          </a:p>
+        </p:txBody>
+      </p:sp>
+      <p:sp>
+        <p:nvSpPr>
           <p:cNvPr id="17" name="TextBox 16"/>
           <p:cNvSpPr txBox="1"/>
           <p:nvPr/>
         </p:nvSpPr>
         <p:spPr>
           <a:xfrm>
-            <a:off x="1143000" y="4076700"/>
-            <a:ext cx="2216313" cy="571500"/>
-          </a:xfrm>
-          <a:prstGeom prst="rect">
-            <a:avLst/>
-          </a:prstGeom>
-          <a:noFill/>
-        </p:spPr>
-        <p:txBody>
-          <a:bodyPr wrap="square" lIns="0" rIns="0" tIns="0" bIns="0" anchor="ctr">
-            <a:spAutoFit/>
-          </a:bodyPr>
-          <a:lstStyle/>
-          <a:p>
-            <a:pPr algn="ctr">
-              <a:lnSpc>
-                <a:spcPct val="100000"/>
-              </a:lnSpc>
-            </a:pPr>
-            <a:r>
-              <a:rPr sz="1800" b="1">
-                <a:solidFill>
-                  <a:srgbClr val="FFFFFF"/>
-                </a:solidFill>
-                <a:latin typeface="Pretendard"/>
-                <a:ea typeface="Pretendard"/>
-                <a:cs typeface="Pretendard"/>
-              </a:rPr>
-              <a:t>상태</a:t>
-            </a:r>
-          </a:p>
-        </p:txBody>
-      </p:sp>
-      <p:sp>
-        <p:nvSpPr>
-          <p:cNvPr id="18" name="Rectangle 17"/>
-          <p:cNvSpPr/>
-          <p:nvPr/>
-        </p:nvSpPr>
-        <p:spPr>
-          <a:xfrm>
-            <a:off x="3359313" y="4076700"/>
-            <a:ext cx="13785687" cy="571500"/>
-          </a:xfrm>
-          <a:prstGeom prst="rect">
-            <a:avLst/>
+            <a:off x="2324100" y="4810125"/>
+            <a:ext cx="9906000" cy="361950"/>
+          </a:xfrm>
+          <a:prstGeom prst="rect">
+            <a:avLst/>
+          </a:prstGeom>
+          <a:noFill/>
+        </p:spPr>
+        <p:txBody>
+          <a:bodyPr wrap="square" lIns="0" rIns="0" tIns="0" bIns="0" anchor="t">
+            <a:spAutoFit/>
+          </a:bodyPr>
+          <a:lstStyle/>
+          <a:p>
+            <a:pPr algn="l">
+              <a:lnSpc>
+                <a:spcPct val="120000"/>
+              </a:lnSpc>
+            </a:pPr>
+            <a:r>
+              <a:rPr sz="2025" b="0">
+                <a:solidFill>
+                  <a:srgbClr val="3D3D3D"/>
+                </a:solidFill>
+                <a:latin typeface="Pretendard"/>
+                <a:ea typeface="Pretendard"/>
+                <a:cs typeface="Pretendard"/>
+              </a:rPr>
+              <a:t>받은 jar 를 둘 곳 — 이 줄이 없으면 바로 끝난다</a:t>
+            </a:r>
+          </a:p>
+        </p:txBody>
+      </p:sp>
+      <p:sp>
+        <p:nvSpPr>
+          <p:cNvPr id="18" name="Rounded Rectangle 17"/>
+          <p:cNvSpPr/>
+          <p:nvPr/>
+        </p:nvSpPr>
+        <p:spPr>
+          <a:xfrm>
+            <a:off x="1143000" y="5467350"/>
+            <a:ext cx="11430000" cy="1095375"/>
+          </a:xfrm>
+          <a:prstGeom prst="roundRect">
+            <a:avLst>
+              <a:gd name="adj" fmla="val 4347"/>
+            </a:avLst>
           </a:prstGeom>
           <a:solidFill>
             <a:srgbClr val="FAFBFD"/>
@@ -8244,57 +9477,16 @@
       </p:sp>
       <p:sp>
         <p:nvSpPr>
-          <p:cNvPr id="19" name="TextBox 18"/>
-          <p:cNvSpPr txBox="1"/>
-          <p:nvPr/>
-        </p:nvSpPr>
-        <p:spPr>
-          <a:xfrm>
-            <a:off x="3511713" y="4076700"/>
-            <a:ext cx="13480887" cy="571500"/>
-          </a:xfrm>
-          <a:prstGeom prst="rect">
-            <a:avLst/>
-          </a:prstGeom>
-          <a:noFill/>
-        </p:spPr>
-        <p:txBody>
-          <a:bodyPr wrap="square" lIns="0" rIns="0" tIns="0" bIns="0" anchor="ctr">
-            <a:spAutoFit/>
-          </a:bodyPr>
-          <a:lstStyle/>
-          <a:p>
-            <a:pPr algn="l">
-              <a:lnSpc>
-                <a:spcPct val="115000"/>
-              </a:lnSpc>
-            </a:pPr>
-            <a:r>
-              <a:rPr sz="1800" b="0">
-                <a:solidFill>
-                  <a:srgbClr val="3D3D3D"/>
-                </a:solidFill>
-                <a:latin typeface="Pretendard"/>
-                <a:ea typeface="Pretendard"/>
-                <a:cs typeface="Pretendard"/>
-              </a:rPr>
-              <a:t>docker compose ps — 세 서비스 Up</a:t>
-            </a:r>
-          </a:p>
-        </p:txBody>
-      </p:sp>
-      <p:sp>
-        <p:nvSpPr>
-          <p:cNvPr id="20" name="Rectangle 19"/>
-          <p:cNvSpPr/>
-          <p:nvPr/>
-        </p:nvSpPr>
-        <p:spPr>
-          <a:xfrm>
-            <a:off x="1143000" y="4724400"/>
-            <a:ext cx="2216313" cy="571500"/>
-          </a:xfrm>
-          <a:prstGeom prst="rect">
+          <p:cNvPr id="19" name="Oval 18"/>
+          <p:cNvSpPr/>
+          <p:nvPr/>
+        </p:nvSpPr>
+        <p:spPr>
+          <a:xfrm>
+            <a:off x="1447800" y="5715000"/>
+            <a:ext cx="590550" cy="590550"/>
+          </a:xfrm>
+          <a:prstGeom prst="ellipse">
             <a:avLst/>
           </a:prstGeom>
           <a:solidFill>
@@ -8315,65 +9507,149 @@
       </p:sp>
       <p:sp>
         <p:nvSpPr>
+          <p:cNvPr id="20" name="TextBox 19"/>
+          <p:cNvSpPr txBox="1"/>
+          <p:nvPr/>
+        </p:nvSpPr>
+        <p:spPr>
+          <a:xfrm>
+            <a:off x="1447800" y="5867400"/>
+            <a:ext cx="590550" cy="323850"/>
+          </a:xfrm>
+          <a:prstGeom prst="rect">
+            <a:avLst/>
+          </a:prstGeom>
+          <a:noFill/>
+        </p:spPr>
+        <p:txBody>
+          <a:bodyPr wrap="square" lIns="0" rIns="0" tIns="0" bIns="0" anchor="t">
+            <a:spAutoFit/>
+          </a:bodyPr>
+          <a:lstStyle/>
+          <a:p>
+            <a:pPr algn="ctr">
+              <a:lnSpc>
+                <a:spcPct val="100000"/>
+              </a:lnSpc>
+            </a:pPr>
+            <a:r>
+              <a:rPr sz="2250" b="1">
+                <a:solidFill>
+                  <a:srgbClr val="FFFFFF"/>
+                </a:solidFill>
+                <a:latin typeface="Pretendard"/>
+                <a:ea typeface="Pretendard"/>
+                <a:cs typeface="Pretendard"/>
+              </a:rPr>
+              <a:t>3</a:t>
+            </a:r>
+          </a:p>
+        </p:txBody>
+      </p:sp>
+      <p:sp>
+        <p:nvSpPr>
           <p:cNvPr id="21" name="TextBox 20"/>
           <p:cNvSpPr txBox="1"/>
           <p:nvPr/>
         </p:nvSpPr>
         <p:spPr>
           <a:xfrm>
-            <a:off x="1143000" y="4724400"/>
-            <a:ext cx="2216313" cy="571500"/>
-          </a:xfrm>
-          <a:prstGeom prst="rect">
-            <a:avLst/>
-          </a:prstGeom>
-          <a:noFill/>
-        </p:spPr>
-        <p:txBody>
-          <a:bodyPr wrap="square" lIns="0" rIns="0" tIns="0" bIns="0" anchor="ctr">
-            <a:spAutoFit/>
-          </a:bodyPr>
-          <a:lstStyle/>
-          <a:p>
-            <a:pPr algn="ctr">
-              <a:lnSpc>
-                <a:spcPct val="100000"/>
-              </a:lnSpc>
-            </a:pPr>
-            <a:r>
-              <a:rPr sz="1800" b="1">
-                <a:solidFill>
-                  <a:srgbClr val="FFFFFF"/>
-                </a:solidFill>
-                <a:latin typeface="Pretendard"/>
-                <a:ea typeface="Pretendard"/>
-                <a:cs typeface="Pretendard"/>
-              </a:rPr>
-              <a:t>버킷(mc)</a:t>
-            </a:r>
-          </a:p>
-        </p:txBody>
-      </p:sp>
-      <p:sp>
-        <p:nvSpPr>
-          <p:cNvPr id="22" name="Rectangle 21"/>
-          <p:cNvSpPr/>
-          <p:nvPr/>
-        </p:nvSpPr>
-        <p:spPr>
-          <a:xfrm>
-            <a:off x="3359313" y="4724400"/>
-            <a:ext cx="13785687" cy="571500"/>
-          </a:xfrm>
-          <a:prstGeom prst="rect">
-            <a:avLst/>
-          </a:prstGeom>
-          <a:solidFill>
-            <a:srgbClr val="FAFBFD"/>
+            <a:off x="2324100" y="5676900"/>
+            <a:ext cx="9906000" cy="400050"/>
+          </a:xfrm>
+          <a:prstGeom prst="rect">
+            <a:avLst/>
+          </a:prstGeom>
+          <a:noFill/>
+        </p:spPr>
+        <p:txBody>
+          <a:bodyPr wrap="square" lIns="0" rIns="0" tIns="0" bIns="0" anchor="t">
+            <a:spAutoFit/>
+          </a:bodyPr>
+          <a:lstStyle/>
+          <a:p>
+            <a:pPr algn="l">
+              <a:lnSpc>
+                <a:spcPct val="110000"/>
+              </a:lnSpc>
+            </a:pPr>
+            <a:r>
+              <a:rPr sz="2475" b="1">
+                <a:solidFill>
+                  <a:srgbClr val="0D2B5E"/>
+                </a:solidFill>
+                <a:latin typeface="Pretendard"/>
+                <a:ea typeface="Pretendard"/>
+                <a:cs typeface="Pretendard"/>
+              </a:rPr>
+              <a:t>s3a 4줄 + Iceberg 4줄</a:t>
+            </a:r>
+          </a:p>
+        </p:txBody>
+      </p:sp>
+      <p:sp>
+        <p:nvSpPr>
+          <p:cNvPr id="22" name="TextBox 21"/>
+          <p:cNvSpPr txBox="1"/>
+          <p:nvPr/>
+        </p:nvSpPr>
+        <p:spPr>
+          <a:xfrm>
+            <a:off x="2324100" y="6076950"/>
+            <a:ext cx="9906000" cy="361950"/>
+          </a:xfrm>
+          <a:prstGeom prst="rect">
+            <a:avLst/>
+          </a:prstGeom>
+          <a:noFill/>
+        </p:spPr>
+        <p:txBody>
+          <a:bodyPr wrap="square" lIns="0" rIns="0" tIns="0" bIns="0" anchor="t">
+            <a:spAutoFit/>
+          </a:bodyPr>
+          <a:lstStyle/>
+          <a:p>
+            <a:pPr algn="l">
+              <a:lnSpc>
+                <a:spcPct val="120000"/>
+              </a:lnSpc>
+            </a:pPr>
+            <a:r>
+              <a:rPr sz="2025" b="0">
+                <a:solidFill>
+                  <a:srgbClr val="3D3D3D"/>
+                </a:solidFill>
+                <a:latin typeface="Pretendard"/>
+                <a:ea typeface="Pretendard"/>
+                <a:cs typeface="Pretendard"/>
+              </a:rPr>
+              <a:t>endpoint http://minio:9000 · admin · warehouse=s3a://warehouse/lake</a:t>
+            </a:r>
+          </a:p>
+        </p:txBody>
+      </p:sp>
+      <p:sp>
+        <p:nvSpPr>
+          <p:cNvPr id="23" name="Rounded Rectangle 22"/>
+          <p:cNvSpPr/>
+          <p:nvPr/>
+        </p:nvSpPr>
+        <p:spPr>
+          <a:xfrm>
+            <a:off x="13144500" y="2933700"/>
+            <a:ext cx="4000500" cy="3629025"/>
+          </a:xfrm>
+          <a:prstGeom prst="roundRect">
+            <a:avLst>
+              <a:gd name="adj" fmla="val 1312"/>
+            </a:avLst>
+          </a:prstGeom>
+          <a:solidFill>
+            <a:srgbClr val="EDF3FD"/>
           </a:solidFill>
           <a:ln w="9525">
             <a:solidFill>
-              <a:srgbClr val="DCE1E8"/>
+              <a:srgbClr val="BFD3F5"/>
             </a:solidFill>
           </a:ln>
           <a:effectLst/>
@@ -8388,61 +9664,120 @@
       </p:sp>
       <p:sp>
         <p:nvSpPr>
-          <p:cNvPr id="23" name="TextBox 22"/>
-          <p:cNvSpPr txBox="1"/>
-          <p:nvPr/>
-        </p:nvSpPr>
-        <p:spPr>
-          <a:xfrm>
-            <a:off x="3511713" y="4724400"/>
-            <a:ext cx="13480887" cy="571500"/>
-          </a:xfrm>
-          <a:prstGeom prst="rect">
-            <a:avLst/>
-          </a:prstGeom>
-          <a:noFill/>
-        </p:spPr>
-        <p:txBody>
-          <a:bodyPr wrap="square" lIns="0" rIns="0" tIns="0" bIns="0" anchor="ctr">
+          <p:cNvPr id="24" name="TextBox 23"/>
+          <p:cNvSpPr txBox="1"/>
+          <p:nvPr/>
+        </p:nvSpPr>
+        <p:spPr>
+          <a:xfrm>
+            <a:off x="13487400" y="3929062"/>
+            <a:ext cx="3314700" cy="304800"/>
+          </a:xfrm>
+          <a:prstGeom prst="rect">
+            <a:avLst/>
+          </a:prstGeom>
+          <a:noFill/>
+        </p:spPr>
+        <p:txBody>
+          <a:bodyPr wrap="square" lIns="0" rIns="0" tIns="0" bIns="0" anchor="t">
             <a:spAutoFit/>
           </a:bodyPr>
           <a:lstStyle/>
           <a:p>
             <a:pPr algn="l">
               <a:lnSpc>
-                <a:spcPct val="115000"/>
-              </a:lnSpc>
-            </a:pPr>
-            <a:r>
-              <a:rPr sz="1800" b="0">
-                <a:solidFill>
-                  <a:srgbClr val="3D3D3D"/>
-                </a:solidFill>
-                <a:latin typeface="Pretendard"/>
-                <a:ea typeface="Pretendard"/>
-                <a:cs typeface="Pretendard"/>
-              </a:rPr>
-              <a:t>mc mb -p m/warehouse (--network week5_default)</a:t>
-            </a:r>
-          </a:p>
-        </p:txBody>
-      </p:sp>
-      <p:sp>
-        <p:nvSpPr>
-          <p:cNvPr id="24" name="Rectangle 23"/>
-          <p:cNvSpPr/>
-          <p:nvPr/>
-        </p:nvSpPr>
-        <p:spPr>
-          <a:xfrm>
-            <a:off x="1143000" y="5372100"/>
-            <a:ext cx="2216313" cy="571500"/>
-          </a:xfrm>
-          <a:prstGeom prst="rect">
-            <a:avLst/>
-          </a:prstGeom>
-          <a:solidFill>
-            <a:srgbClr val="0D2B5E"/>
+                <a:spcPct val="100000"/>
+              </a:lnSpc>
+            </a:pPr>
+            <a:r>
+              <a:rPr sz="1800" b="1" spc="190">
+                <a:solidFill>
+                  <a:srgbClr val="1E5BC6"/>
+                </a:solidFill>
+                <a:latin typeface="Pretendard"/>
+                <a:ea typeface="Pretendard"/>
+                <a:cs typeface="Pretendard"/>
+              </a:rPr>
+              <a:t>띄우기</a:t>
+            </a:r>
+          </a:p>
+        </p:txBody>
+      </p:sp>
+      <p:sp>
+        <p:nvSpPr>
+          <p:cNvPr id="25" name="TextBox 24"/>
+          <p:cNvSpPr txBox="1"/>
+          <p:nvPr/>
+        </p:nvSpPr>
+        <p:spPr>
+          <a:xfrm>
+            <a:off x="13487400" y="4329112"/>
+            <a:ext cx="3314700" cy="1238250"/>
+          </a:xfrm>
+          <a:prstGeom prst="rect">
+            <a:avLst/>
+          </a:prstGeom>
+          <a:noFill/>
+        </p:spPr>
+        <p:txBody>
+          <a:bodyPr wrap="square" lIns="0" rIns="0" tIns="0" bIns="0" anchor="t">
+            <a:spAutoFit/>
+          </a:bodyPr>
+          <a:lstStyle/>
+          <a:p>
+            <a:pPr algn="l">
+              <a:lnSpc>
+                <a:spcPct val="138000"/>
+              </a:lnSpc>
+            </a:pPr>
+            <a:r>
+              <a:rPr sz="2700" b="1">
+                <a:solidFill>
+                  <a:srgbClr val="0D2B5E"/>
+                </a:solidFill>
+                <a:latin typeface="Pretendard"/>
+                <a:ea typeface="Pretendard"/>
+                <a:cs typeface="Pretendard"/>
+              </a:rPr>
+              <a:t>bash</a:t>
+            </a:r>
+          </a:p>
+          <a:p>
+            <a:pPr algn="l">
+              <a:lnSpc>
+                <a:spcPct val="138000"/>
+              </a:lnSpc>
+            </a:pPr>
+            <a:r>
+              <a:rPr sz="2700" b="1">
+                <a:solidFill>
+                  <a:srgbClr val="0D2B5E"/>
+                </a:solidFill>
+                <a:latin typeface="Pretendard"/>
+                <a:ea typeface="Pretendard"/>
+                <a:cs typeface="Pretendard"/>
+              </a:rPr>
+              <a:t>lake-pyspark.sh</a:t>
+            </a:r>
+          </a:p>
+        </p:txBody>
+      </p:sp>
+      <p:sp>
+        <p:nvSpPr>
+          <p:cNvPr id="26" name="Rectangle 25"/>
+          <p:cNvSpPr/>
+          <p:nvPr/>
+        </p:nvSpPr>
+        <p:spPr>
+          <a:xfrm>
+            <a:off x="1143000" y="7581900"/>
+            <a:ext cx="38100" cy="323850"/>
+          </a:xfrm>
+          <a:prstGeom prst="rect">
+            <a:avLst/>
+          </a:prstGeom>
+          <a:solidFill>
+            <a:srgbClr val="BFD3F5"/>
           </a:solidFill>
           <a:ln>
             <a:noFill/>
@@ -8459,147 +9794,33 @@
       </p:sp>
       <p:sp>
         <p:nvSpPr>
-          <p:cNvPr id="25" name="TextBox 24"/>
-          <p:cNvSpPr txBox="1"/>
-          <p:nvPr/>
-        </p:nvSpPr>
-        <p:spPr>
-          <a:xfrm>
-            <a:off x="1143000" y="5372100"/>
-            <a:ext cx="2216313" cy="571500"/>
-          </a:xfrm>
-          <a:prstGeom prst="rect">
-            <a:avLst/>
-          </a:prstGeom>
-          <a:noFill/>
-        </p:spPr>
-        <p:txBody>
-          <a:bodyPr wrap="square" lIns="0" rIns="0" tIns="0" bIns="0" anchor="ctr">
-            <a:spAutoFit/>
-          </a:bodyPr>
-          <a:lstStyle/>
-          <a:p>
-            <a:pPr algn="ctr">
+          <p:cNvPr id="27" name="TextBox 26"/>
+          <p:cNvSpPr txBox="1"/>
+          <p:nvPr/>
+        </p:nvSpPr>
+        <p:spPr>
+          <a:xfrm>
+            <a:off x="1314450" y="7581900"/>
+            <a:ext cx="15830550" cy="342900"/>
+          </a:xfrm>
+          <a:prstGeom prst="rect">
+            <a:avLst/>
+          </a:prstGeom>
+          <a:noFill/>
+        </p:spPr>
+        <p:txBody>
+          <a:bodyPr wrap="square" lIns="0" rIns="0" tIns="0" bIns="0" anchor="t">
+            <a:spAutoFit/>
+          </a:bodyPr>
+          <a:lstStyle/>
+          <a:p>
+            <a:pPr algn="l">
               <a:lnSpc>
                 <a:spcPct val="100000"/>
               </a:lnSpc>
             </a:pPr>
             <a:r>
-              <a:rPr sz="1800" b="1">
-                <a:solidFill>
-                  <a:srgbClr val="FFFFFF"/>
-                </a:solidFill>
-                <a:latin typeface="Pretendard"/>
-                <a:ea typeface="Pretendard"/>
-                <a:cs typeface="Pretendard"/>
-              </a:rPr>
-              <a:t>콘솔</a:t>
-            </a:r>
-          </a:p>
-        </p:txBody>
-      </p:sp>
-      <p:sp>
-        <p:nvSpPr>
-          <p:cNvPr id="26" name="Rectangle 25"/>
-          <p:cNvSpPr/>
-          <p:nvPr/>
-        </p:nvSpPr>
-        <p:spPr>
-          <a:xfrm>
-            <a:off x="3359313" y="5372100"/>
-            <a:ext cx="13785687" cy="571500"/>
-          </a:xfrm>
-          <a:prstGeom prst="rect">
-            <a:avLst/>
-          </a:prstGeom>
-          <a:solidFill>
-            <a:srgbClr val="FAFBFD"/>
-          </a:solidFill>
-          <a:ln w="9525">
-            <a:solidFill>
-              <a:srgbClr val="DCE1E8"/>
-            </a:solidFill>
-          </a:ln>
-          <a:effectLst/>
-        </p:spPr>
-        <p:txBody>
-          <a:bodyPr rtlCol="0" anchor="ctr" wrap="square"/>
-          <a:lstStyle/>
-          <a:p>
-            <a:pPr algn="ctr"/>
-          </a:p>
-        </p:txBody>
-      </p:sp>
-      <p:sp>
-        <p:nvSpPr>
-          <p:cNvPr id="27" name="TextBox 26"/>
-          <p:cNvSpPr txBox="1"/>
-          <p:nvPr/>
-        </p:nvSpPr>
-        <p:spPr>
-          <a:xfrm>
-            <a:off x="3511713" y="5372100"/>
-            <a:ext cx="13480887" cy="571500"/>
-          </a:xfrm>
-          <a:prstGeom prst="rect">
-            <a:avLst/>
-          </a:prstGeom>
-          <a:noFill/>
-        </p:spPr>
-        <p:txBody>
-          <a:bodyPr wrap="square" lIns="0" rIns="0" tIns="0" bIns="0" anchor="ctr">
-            <a:spAutoFit/>
-          </a:bodyPr>
-          <a:lstStyle/>
-          <a:p>
-            <a:pPr algn="l">
-              <a:lnSpc>
-                <a:spcPct val="115000"/>
-              </a:lnSpc>
-            </a:pPr>
-            <a:r>
-              <a:rPr sz="1800" b="0">
-                <a:solidFill>
-                  <a:srgbClr val="3D3D3D"/>
-                </a:solidFill>
-                <a:latin typeface="Pretendard"/>
-                <a:ea typeface="Pretendard"/>
-                <a:cs typeface="Pretendard"/>
-              </a:rPr>
-              <a:t>localhost:9001 · admin / password123</a:t>
-            </a:r>
-          </a:p>
-        </p:txBody>
-      </p:sp>
-      <p:sp>
-        <p:nvSpPr>
-          <p:cNvPr id="28" name="TextBox 27"/>
-          <p:cNvSpPr txBox="1"/>
-          <p:nvPr/>
-        </p:nvSpPr>
-        <p:spPr>
-          <a:xfrm>
-            <a:off x="1143000" y="7620000"/>
-            <a:ext cx="16002000" cy="342900"/>
-          </a:xfrm>
-          <a:prstGeom prst="rect">
-            <a:avLst/>
-          </a:prstGeom>
-          <a:noFill/>
-        </p:spPr>
-        <p:txBody>
-          <a:bodyPr wrap="square" lIns="0" rIns="0" tIns="0" bIns="0" anchor="t">
-            <a:spAutoFit/>
-          </a:bodyPr>
-          <a:lstStyle/>
-          <a:p>
-            <a:pPr algn="l">
-              <a:lnSpc>
-                <a:spcPct val="100000"/>
-              </a:lnSpc>
-            </a:pPr>
-            <a:r>
-              <a:rPr sz="1875" b="1">
+              <a:rPr sz="1725" b="1">
                 <a:solidFill>
                   <a:srgbClr val="7D7D7D"/>
                 </a:solidFill>
@@ -8607,14 +9828,14 @@
                 <a:ea typeface="Pretendard"/>
                 <a:cs typeface="Pretendard"/>
               </a:rPr>
-              <a:t>네트워크 이름은 docker network ls 로 확인 — 폴더 이름에 따라 week5_default 가 아닐 수 있다</a:t>
-            </a:r>
-          </a:p>
-        </p:txBody>
-      </p:sp>
-      <p:sp>
-        <p:nvSpPr>
-          <p:cNvPr id="29" name="Rectangle 28"/>
+              <a:t>endpoint 는 localhost 가 아니라 minio(서비스 이름) — 셸이 컨테이너 안에서 돈다</a:t>
+            </a:r>
+          </a:p>
+        </p:txBody>
+      </p:sp>
+      <p:sp>
+        <p:nvSpPr>
+          <p:cNvPr id="28" name="Rectangle 27"/>
           <p:cNvSpPr/>
           <p:nvPr/>
         </p:nvSpPr>
@@ -8644,7 +9865,7 @@
       </p:sp>
       <p:sp>
         <p:nvSpPr>
-          <p:cNvPr id="30" name="TextBox 29"/>
+          <p:cNvPr id="29" name="TextBox 28"/>
           <p:cNvSpPr txBox="1"/>
           <p:nvPr/>
         </p:nvSpPr>
@@ -8685,7 +9906,7 @@
       </p:sp>
       <p:sp>
         <p:nvSpPr>
-          <p:cNvPr id="31" name="TextBox 30"/>
+          <p:cNvPr id="30" name="TextBox 29"/>
           <p:cNvSpPr txBox="1"/>
           <p:nvPr/>
         </p:nvSpPr>
@@ -8868,7 +10089,7 @@
                 <a:ea typeface="Pretendard"/>
                 <a:cs typeface="Pretendard"/>
               </a:rPr>
-              <a:t>3단계</a:t>
+              <a:t>3단계 — 왜 spark.jars.ivy 인가</a:t>
             </a:r>
           </a:p>
         </p:txBody>
@@ -8909,7 +10130,7 @@
                 <a:ea typeface="Pretendard"/>
                 <a:cs typeface="Pretendard"/>
               </a:rPr>
-              <a:t>라이브러리와 설정을 담아 PySpark 를 띄운다</a:t>
+              <a:t>jar 를 둘 곳 · 받는 데 걸리는 시간</a:t>
             </a:r>
           </a:p>
         </p:txBody>
@@ -8946,18 +10167,100 @@
       </p:sp>
       <p:sp>
         <p:nvSpPr>
-          <p:cNvPr id="8" name="Rounded Rectangle 7"/>
-          <p:cNvSpPr/>
-          <p:nvPr/>
-        </p:nvSpPr>
-        <p:spPr>
-          <a:xfrm>
-            <a:off x="1143000" y="2933700"/>
-            <a:ext cx="11430000" cy="1095375"/>
+          <p:cNvPr id="8" name="TextBox 7"/>
+          <p:cNvSpPr txBox="1"/>
+          <p:nvPr/>
+        </p:nvSpPr>
+        <p:spPr>
+          <a:xfrm>
+            <a:off x="1143000" y="2857500"/>
+            <a:ext cx="7372350" cy="533400"/>
+          </a:xfrm>
+          <a:prstGeom prst="rect">
+            <a:avLst/>
+          </a:prstGeom>
+          <a:noFill/>
+        </p:spPr>
+        <p:txBody>
+          <a:bodyPr wrap="square" lIns="0" rIns="0" tIns="0" bIns="0" anchor="t">
+            <a:spAutoFit/>
+          </a:bodyPr>
+          <a:lstStyle/>
+          <a:p>
+            <a:pPr algn="l">
+              <a:lnSpc>
+                <a:spcPct val="110000"/>
+              </a:lnSpc>
+            </a:pPr>
+            <a:r>
+              <a:rPr sz="3150" b="1">
+                <a:solidFill>
+                  <a:srgbClr val="0D2B5E"/>
+                </a:solidFill>
+                <a:latin typeface="Pretendard"/>
+                <a:ea typeface="Pretendard"/>
+                <a:cs typeface="Pretendard"/>
+              </a:rPr>
+              <a:t>빼면 — 바로 실패</a:t>
+            </a:r>
+          </a:p>
+        </p:txBody>
+      </p:sp>
+      <p:sp>
+        <p:nvSpPr>
+          <p:cNvPr id="9" name="TextBox 8"/>
+          <p:cNvSpPr txBox="1"/>
+          <p:nvPr/>
+        </p:nvSpPr>
+        <p:spPr>
+          <a:xfrm>
+            <a:off x="1143000" y="3467100"/>
+            <a:ext cx="7372350" cy="876300"/>
+          </a:xfrm>
+          <a:prstGeom prst="rect">
+            <a:avLst/>
+          </a:prstGeom>
+          <a:noFill/>
+        </p:spPr>
+        <p:txBody>
+          <a:bodyPr wrap="square" lIns="0" rIns="0" tIns="0" bIns="0" anchor="t">
+            <a:spAutoFit/>
+          </a:bodyPr>
+          <a:lstStyle/>
+          <a:p>
+            <a:pPr algn="l">
+              <a:lnSpc>
+                <a:spcPct val="146000"/>
+              </a:lnSpc>
+            </a:pPr>
+            <a:r>
+              <a:rPr sz="2250" b="0">
+                <a:solidFill>
+                  <a:srgbClr val="3D3D3D"/>
+                </a:solidFill>
+                <a:latin typeface="Pretendard"/>
+                <a:ea typeface="Pretendard"/>
+                <a:cs typeface="Pretendard"/>
+              </a:rPr>
+              <a:t>apache/spark 이미지의 spark 사용자는 홈 폴더가 없다</a:t>
+            </a:r>
+          </a:p>
+        </p:txBody>
+      </p:sp>
+      <p:sp>
+        <p:nvSpPr>
+          <p:cNvPr id="10" name="Rounded Rectangle 9"/>
+          <p:cNvSpPr/>
+          <p:nvPr/>
+        </p:nvSpPr>
+        <p:spPr>
+          <a:xfrm>
+            <a:off x="1143000" y="4610100"/>
+            <a:ext cx="7372350" cy="2857500"/>
           </a:xfrm>
           <a:prstGeom prst="roundRect">
             <a:avLst>
-              <a:gd name="adj" fmla="val 4347"/>
+              <a:gd name="adj" fmla="val 1666"/>
             </a:avLst>
           </a:prstGeom>
           <a:solidFill>
@@ -8980,16 +10283,16 @@
       </p:sp>
       <p:sp>
         <p:nvSpPr>
-          <p:cNvPr id="9" name="Oval 8"/>
-          <p:cNvSpPr/>
-          <p:nvPr/>
-        </p:nvSpPr>
-        <p:spPr>
-          <a:xfrm>
-            <a:off x="1447800" y="3181350"/>
-            <a:ext cx="590550" cy="590550"/>
-          </a:xfrm>
-          <a:prstGeom prst="ellipse">
+          <p:cNvPr id="11" name="Rectangle 10"/>
+          <p:cNvSpPr/>
+          <p:nvPr/>
+        </p:nvSpPr>
+        <p:spPr>
+          <a:xfrm>
+            <a:off x="1390650" y="4838700"/>
+            <a:ext cx="2152015" cy="599122"/>
+          </a:xfrm>
+          <a:prstGeom prst="rect">
             <a:avLst/>
           </a:prstGeom>
           <a:solidFill>
@@ -9010,22 +10313,22 @@
       </p:sp>
       <p:sp>
         <p:nvSpPr>
-          <p:cNvPr id="10" name="TextBox 9"/>
-          <p:cNvSpPr txBox="1"/>
-          <p:nvPr/>
-        </p:nvSpPr>
-        <p:spPr>
-          <a:xfrm>
-            <a:off x="1447800" y="3333750"/>
-            <a:ext cx="590550" cy="323850"/>
-          </a:xfrm>
-          <a:prstGeom prst="rect">
-            <a:avLst/>
-          </a:prstGeom>
-          <a:noFill/>
-        </p:spPr>
-        <p:txBody>
-          <a:bodyPr wrap="square" lIns="0" rIns="0" tIns="0" bIns="0" anchor="t">
+          <p:cNvPr id="12" name="TextBox 11"/>
+          <p:cNvSpPr txBox="1"/>
+          <p:nvPr/>
+        </p:nvSpPr>
+        <p:spPr>
+          <a:xfrm>
+            <a:off x="1390650" y="4838700"/>
+            <a:ext cx="2152015" cy="599122"/>
+          </a:xfrm>
+          <a:prstGeom prst="rect">
+            <a:avLst/>
+          </a:prstGeom>
+          <a:noFill/>
+        </p:spPr>
+        <p:txBody>
+          <a:bodyPr wrap="square" lIns="0" rIns="0" tIns="0" bIns="0" anchor="ctr">
             <a:spAutoFit/>
           </a:bodyPr>
           <a:lstStyle/>
@@ -9036,7 +10339,7 @@
               </a:lnSpc>
             </a:pPr>
             <a:r>
-              <a:rPr sz="2250" b="1">
+              <a:rPr sz="1875" b="1">
                 <a:solidFill>
                   <a:srgbClr val="FFFFFF"/>
                 </a:solidFill>
@@ -9044,89 +10347,7 @@
                 <a:ea typeface="Pretendard"/>
                 <a:cs typeface="Pretendard"/>
               </a:rPr>
-              <a:t>1</a:t>
-            </a:r>
-          </a:p>
-        </p:txBody>
-      </p:sp>
-      <p:sp>
-        <p:nvSpPr>
-          <p:cNvPr id="11" name="TextBox 10"/>
-          <p:cNvSpPr txBox="1"/>
-          <p:nvPr/>
-        </p:nvSpPr>
-        <p:spPr>
-          <a:xfrm>
-            <a:off x="2324100" y="3143250"/>
-            <a:ext cx="9906000" cy="400050"/>
-          </a:xfrm>
-          <a:prstGeom prst="rect">
-            <a:avLst/>
-          </a:prstGeom>
-          <a:noFill/>
-        </p:spPr>
-        <p:txBody>
-          <a:bodyPr wrap="square" lIns="0" rIns="0" tIns="0" bIns="0" anchor="t">
-            <a:spAutoFit/>
-          </a:bodyPr>
-          <a:lstStyle/>
-          <a:p>
-            <a:pPr algn="l">
-              <a:lnSpc>
-                <a:spcPct val="110000"/>
-              </a:lnSpc>
-            </a:pPr>
-            <a:r>
-              <a:rPr sz="2475" b="1">
-                <a:solidFill>
-                  <a:srgbClr val="0D2B5E"/>
-                </a:solidFill>
-                <a:latin typeface="Pretendard"/>
-                <a:ea typeface="Pretendard"/>
-                <a:cs typeface="Pretendard"/>
-              </a:rPr>
-              <a:t>--packages 둘</a:t>
-            </a:r>
-          </a:p>
-        </p:txBody>
-      </p:sp>
-      <p:sp>
-        <p:nvSpPr>
-          <p:cNvPr id="12" name="TextBox 11"/>
-          <p:cNvSpPr txBox="1"/>
-          <p:nvPr/>
-        </p:nvSpPr>
-        <p:spPr>
-          <a:xfrm>
-            <a:off x="2324100" y="3543300"/>
-            <a:ext cx="9906000" cy="361950"/>
-          </a:xfrm>
-          <a:prstGeom prst="rect">
-            <a:avLst/>
-          </a:prstGeom>
-          <a:noFill/>
-        </p:spPr>
-        <p:txBody>
-          <a:bodyPr wrap="square" lIns="0" rIns="0" tIns="0" bIns="0" anchor="t">
-            <a:spAutoFit/>
-          </a:bodyPr>
-          <a:lstStyle/>
-          <a:p>
-            <a:pPr algn="l">
-              <a:lnSpc>
-                <a:spcPct val="120000"/>
-              </a:lnSpc>
-            </a:pPr>
-            <a:r>
-              <a:rPr sz="2025" b="0">
-                <a:solidFill>
-                  <a:srgbClr val="3D3D3D"/>
-                </a:solidFill>
-                <a:latin typeface="Pretendard"/>
-                <a:ea typeface="Pretendard"/>
-                <a:cs typeface="Pretendard"/>
-              </a:rPr>
-              <a:t>hadoop-aws:3.3.4 · iceberg-spark-runtime-3.5_2.12:1.5.2 — 첫 실행은 몇 분</a:t>
+              <a:t>--packages</a:t>
             </a:r>
           </a:p>
         </p:txBody>
@@ -9139,12 +10360,12 @@
         </p:nvSpPr>
         <p:spPr>
           <a:xfrm>
-            <a:off x="1143000" y="4200525"/>
-            <a:ext cx="11430000" cy="1095375"/>
+            <a:off x="1390650" y="5583555"/>
+            <a:ext cx="2152015" cy="1214438"/>
           </a:xfrm>
           <a:prstGeom prst="roundRect">
             <a:avLst>
-              <a:gd name="adj" fmla="val 4347"/>
+              <a:gd name="adj" fmla="val 3921"/>
             </a:avLst>
           </a:prstGeom>
           <a:solidFill>
@@ -9167,20 +10388,61 @@
       </p:sp>
       <p:sp>
         <p:nvSpPr>
-          <p:cNvPr id="14" name="Oval 13"/>
-          <p:cNvSpPr/>
-          <p:nvPr/>
-        </p:nvSpPr>
-        <p:spPr>
-          <a:xfrm>
-            <a:off x="1447800" y="4448175"/>
-            <a:ext cx="590550" cy="590550"/>
-          </a:xfrm>
-          <a:prstGeom prst="ellipse">
-            <a:avLst/>
-          </a:prstGeom>
-          <a:solidFill>
-            <a:srgbClr val="0D2B5E"/>
+          <p:cNvPr id="14" name="TextBox 13"/>
+          <p:cNvSpPr txBox="1"/>
+          <p:nvPr/>
+        </p:nvSpPr>
+        <p:spPr>
+          <a:xfrm>
+            <a:off x="1524000" y="5583555"/>
+            <a:ext cx="1885315" cy="1214438"/>
+          </a:xfrm>
+          <a:prstGeom prst="rect">
+            <a:avLst/>
+          </a:prstGeom>
+          <a:noFill/>
+        </p:spPr>
+        <p:txBody>
+          <a:bodyPr wrap="square" lIns="0" rIns="0" tIns="0" bIns="0" anchor="ctr">
+            <a:spAutoFit/>
+          </a:bodyPr>
+          <a:lstStyle/>
+          <a:p>
+            <a:pPr algn="ctr">
+              <a:lnSpc>
+                <a:spcPct val="135000"/>
+              </a:lnSpc>
+            </a:pPr>
+            <a:r>
+              <a:rPr sz="1500" b="0">
+                <a:solidFill>
+                  <a:srgbClr val="3D3D3D"/>
+                </a:solidFill>
+                <a:latin typeface="Pretendard"/>
+                <a:ea typeface="Pretendard"/>
+                <a:cs typeface="Pretendard"/>
+              </a:rPr>
+              <a:t>~/.ivy2 에 받으려 함</a:t>
+            </a:r>
+          </a:p>
+        </p:txBody>
+      </p:sp>
+      <p:sp>
+        <p:nvSpPr>
+          <p:cNvPr id="15" name="Right Arrow 14"/>
+          <p:cNvSpPr/>
+          <p:nvPr/>
+        </p:nvSpPr>
+        <p:spPr>
+          <a:xfrm>
+            <a:off x="3561715" y="5049202"/>
+            <a:ext cx="172402" cy="178118"/>
+          </a:xfrm>
+          <a:prstGeom prst="rightArrow">
+            <a:avLst/>
+          </a:prstGeom>
+          <a:solidFill>
+            <a:srgbClr val="1E5BC6"/>
           </a:solidFill>
           <a:ln>
             <a:noFill/>
@@ -9197,22 +10459,52 @@
       </p:sp>
       <p:sp>
         <p:nvSpPr>
-          <p:cNvPr id="15" name="TextBox 14"/>
-          <p:cNvSpPr txBox="1"/>
-          <p:nvPr/>
-        </p:nvSpPr>
-        <p:spPr>
-          <a:xfrm>
-            <a:off x="1447800" y="4600575"/>
-            <a:ext cx="590550" cy="323850"/>
-          </a:xfrm>
-          <a:prstGeom prst="rect">
-            <a:avLst/>
-          </a:prstGeom>
-          <a:noFill/>
-        </p:spPr>
-        <p:txBody>
-          <a:bodyPr wrap="square" lIns="0" rIns="0" tIns="0" bIns="0" anchor="t">
+          <p:cNvPr id="16" name="Rectangle 15"/>
+          <p:cNvSpPr/>
+          <p:nvPr/>
+        </p:nvSpPr>
+        <p:spPr>
+          <a:xfrm>
+            <a:off x="3753167" y="4838700"/>
+            <a:ext cx="2152015" cy="599122"/>
+          </a:xfrm>
+          <a:prstGeom prst="rect">
+            <a:avLst/>
+          </a:prstGeom>
+          <a:solidFill>
+            <a:srgbClr val="1E5BC6"/>
+          </a:solidFill>
+          <a:ln>
+            <a:noFill/>
+          </a:ln>
+          <a:effectLst/>
+        </p:spPr>
+        <p:txBody>
+          <a:bodyPr rtlCol="0" anchor="ctr" wrap="square"/>
+          <a:lstStyle/>
+          <a:p>
+            <a:pPr algn="ctr"/>
+          </a:p>
+        </p:txBody>
+      </p:sp>
+      <p:sp>
+        <p:nvSpPr>
+          <p:cNvPr id="17" name="TextBox 16"/>
+          <p:cNvSpPr txBox="1"/>
+          <p:nvPr/>
+        </p:nvSpPr>
+        <p:spPr>
+          <a:xfrm>
+            <a:off x="3753167" y="4838700"/>
+            <a:ext cx="2152015" cy="599122"/>
+          </a:xfrm>
+          <a:prstGeom prst="rect">
+            <a:avLst/>
+          </a:prstGeom>
+          <a:noFill/>
+        </p:spPr>
+        <p:txBody>
+          <a:bodyPr wrap="square" lIns="0" rIns="0" tIns="0" bIns="0" anchor="ctr">
             <a:spAutoFit/>
           </a:bodyPr>
           <a:lstStyle/>
@@ -9223,7 +10515,7 @@
               </a:lnSpc>
             </a:pPr>
             <a:r>
-              <a:rPr sz="2250" b="1">
+              <a:rPr sz="1875" b="1">
                 <a:solidFill>
                   <a:srgbClr val="FFFFFF"/>
                 </a:solidFill>
@@ -9231,89 +10523,7 @@
                 <a:ea typeface="Pretendard"/>
                 <a:cs typeface="Pretendard"/>
               </a:rPr>
-              <a:t>2</a:t>
-            </a:r>
-          </a:p>
-        </p:txBody>
-      </p:sp>
-      <p:sp>
-        <p:nvSpPr>
-          <p:cNvPr id="16" name="TextBox 15"/>
-          <p:cNvSpPr txBox="1"/>
-          <p:nvPr/>
-        </p:nvSpPr>
-        <p:spPr>
-          <a:xfrm>
-            <a:off x="2324100" y="4410075"/>
-            <a:ext cx="9906000" cy="400050"/>
-          </a:xfrm>
-          <a:prstGeom prst="rect">
-            <a:avLst/>
-          </a:prstGeom>
-          <a:noFill/>
-        </p:spPr>
-        <p:txBody>
-          <a:bodyPr wrap="square" lIns="0" rIns="0" tIns="0" bIns="0" anchor="t">
-            <a:spAutoFit/>
-          </a:bodyPr>
-          <a:lstStyle/>
-          <a:p>
-            <a:pPr algn="l">
-              <a:lnSpc>
-                <a:spcPct val="110000"/>
-              </a:lnSpc>
-            </a:pPr>
-            <a:r>
-              <a:rPr sz="2475" b="1">
-                <a:solidFill>
-                  <a:srgbClr val="0D2B5E"/>
-                </a:solidFill>
-                <a:latin typeface="Pretendard"/>
-                <a:ea typeface="Pretendard"/>
-                <a:cs typeface="Pretendard"/>
-              </a:rPr>
-              <a:t>--conf (1) 주소와 열쇠</a:t>
-            </a:r>
-          </a:p>
-        </p:txBody>
-      </p:sp>
-      <p:sp>
-        <p:nvSpPr>
-          <p:cNvPr id="17" name="TextBox 16"/>
-          <p:cNvSpPr txBox="1"/>
-          <p:nvPr/>
-        </p:nvSpPr>
-        <p:spPr>
-          <a:xfrm>
-            <a:off x="2324100" y="4810125"/>
-            <a:ext cx="9906000" cy="361950"/>
-          </a:xfrm>
-          <a:prstGeom prst="rect">
-            <a:avLst/>
-          </a:prstGeom>
-          <a:noFill/>
-        </p:spPr>
-        <p:txBody>
-          <a:bodyPr wrap="square" lIns="0" rIns="0" tIns="0" bIns="0" anchor="t">
-            <a:spAutoFit/>
-          </a:bodyPr>
-          <a:lstStyle/>
-          <a:p>
-            <a:pPr algn="l">
-              <a:lnSpc>
-                <a:spcPct val="120000"/>
-              </a:lnSpc>
-            </a:pPr>
-            <a:r>
-              <a:rPr sz="2025" b="0">
-                <a:solidFill>
-                  <a:srgbClr val="3D3D3D"/>
-                </a:solidFill>
-                <a:latin typeface="Pretendard"/>
-                <a:ea typeface="Pretendard"/>
-                <a:cs typeface="Pretendard"/>
-              </a:rPr>
-              <a:t>endpoint=http://minio:9000 · admin / password123 · path.style.access=true</a:t>
+              <a:t>/home/spark 없음</a:t>
             </a:r>
           </a:p>
         </p:txBody>
@@ -9326,12 +10536,12 @@
         </p:nvSpPr>
         <p:spPr>
           <a:xfrm>
-            <a:off x="1143000" y="5467350"/>
-            <a:ext cx="11430000" cy="1095375"/>
+            <a:off x="3753167" y="5583555"/>
+            <a:ext cx="2152015" cy="1214438"/>
           </a:xfrm>
           <a:prstGeom prst="roundRect">
             <a:avLst>
-              <a:gd name="adj" fmla="val 4347"/>
+              <a:gd name="adj" fmla="val 3921"/>
             </a:avLst>
           </a:prstGeom>
           <a:solidFill>
@@ -9354,20 +10564,61 @@
       </p:sp>
       <p:sp>
         <p:nvSpPr>
-          <p:cNvPr id="19" name="Oval 18"/>
-          <p:cNvSpPr/>
-          <p:nvPr/>
-        </p:nvSpPr>
-        <p:spPr>
-          <a:xfrm>
-            <a:off x="1447800" y="5715000"/>
-            <a:ext cx="590550" cy="590550"/>
-          </a:xfrm>
-          <a:prstGeom prst="ellipse">
-            <a:avLst/>
-          </a:prstGeom>
-          <a:solidFill>
-            <a:srgbClr val="0D2B5E"/>
+          <p:cNvPr id="19" name="TextBox 18"/>
+          <p:cNvSpPr txBox="1"/>
+          <p:nvPr/>
+        </p:nvSpPr>
+        <p:spPr>
+          <a:xfrm>
+            <a:off x="3886517" y="5583555"/>
+            <a:ext cx="1885315" cy="1214438"/>
+          </a:xfrm>
+          <a:prstGeom prst="rect">
+            <a:avLst/>
+          </a:prstGeom>
+          <a:noFill/>
+        </p:spPr>
+        <p:txBody>
+          <a:bodyPr wrap="square" lIns="0" rIns="0" tIns="0" bIns="0" anchor="ctr">
+            <a:spAutoFit/>
+          </a:bodyPr>
+          <a:lstStyle/>
+          <a:p>
+            <a:pPr algn="ctr">
+              <a:lnSpc>
+                <a:spcPct val="135000"/>
+              </a:lnSpc>
+            </a:pPr>
+            <a:r>
+              <a:rPr sz="1500" b="0">
+                <a:solidFill>
+                  <a:srgbClr val="3D3D3D"/>
+                </a:solidFill>
+                <a:latin typeface="Pretendard"/>
+                <a:ea typeface="Pretendard"/>
+                <a:cs typeface="Pretendard"/>
+              </a:rPr>
+              <a:t>둘 곳이 없다</a:t>
+            </a:r>
+          </a:p>
+        </p:txBody>
+      </p:sp>
+      <p:sp>
+        <p:nvSpPr>
+          <p:cNvPr id="20" name="Right Arrow 19"/>
+          <p:cNvSpPr/>
+          <p:nvPr/>
+        </p:nvSpPr>
+        <p:spPr>
+          <a:xfrm>
+            <a:off x="5924232" y="5049202"/>
+            <a:ext cx="172402" cy="178118"/>
+          </a:xfrm>
+          <a:prstGeom prst="rightArrow">
+            <a:avLst/>
+          </a:prstGeom>
+          <a:solidFill>
+            <a:srgbClr val="1E5BC6"/>
           </a:solidFill>
           <a:ln>
             <a:noFill/>
@@ -9384,22 +10635,52 @@
       </p:sp>
       <p:sp>
         <p:nvSpPr>
-          <p:cNvPr id="20" name="TextBox 19"/>
-          <p:cNvSpPr txBox="1"/>
-          <p:nvPr/>
-        </p:nvSpPr>
-        <p:spPr>
-          <a:xfrm>
-            <a:off x="1447800" y="5867400"/>
-            <a:ext cx="590550" cy="323850"/>
-          </a:xfrm>
-          <a:prstGeom prst="rect">
-            <a:avLst/>
-          </a:prstGeom>
-          <a:noFill/>
-        </p:spPr>
-        <p:txBody>
-          <a:bodyPr wrap="square" lIns="0" rIns="0" tIns="0" bIns="0" anchor="t">
+          <p:cNvPr id="21" name="Rectangle 20"/>
+          <p:cNvSpPr/>
+          <p:nvPr/>
+        </p:nvSpPr>
+        <p:spPr>
+          <a:xfrm>
+            <a:off x="6115685" y="4838700"/>
+            <a:ext cx="2152015" cy="599122"/>
+          </a:xfrm>
+          <a:prstGeom prst="rect">
+            <a:avLst/>
+          </a:prstGeom>
+          <a:solidFill>
+            <a:srgbClr val="0D2B5E"/>
+          </a:solidFill>
+          <a:ln>
+            <a:noFill/>
+          </a:ln>
+          <a:effectLst/>
+        </p:spPr>
+        <p:txBody>
+          <a:bodyPr rtlCol="0" anchor="ctr" wrap="square"/>
+          <a:lstStyle/>
+          <a:p>
+            <a:pPr algn="ctr"/>
+          </a:p>
+        </p:txBody>
+      </p:sp>
+      <p:sp>
+        <p:nvSpPr>
+          <p:cNvPr id="22" name="TextBox 21"/>
+          <p:cNvSpPr txBox="1"/>
+          <p:nvPr/>
+        </p:nvSpPr>
+        <p:spPr>
+          <a:xfrm>
+            <a:off x="6115685" y="4838700"/>
+            <a:ext cx="2152015" cy="599122"/>
+          </a:xfrm>
+          <a:prstGeom prst="rect">
+            <a:avLst/>
+          </a:prstGeom>
+          <a:noFill/>
+        </p:spPr>
+        <p:txBody>
+          <a:bodyPr wrap="square" lIns="0" rIns="0" tIns="0" bIns="0" anchor="ctr">
             <a:spAutoFit/>
           </a:bodyPr>
           <a:lstStyle/>
@@ -9410,7 +10691,7 @@
               </a:lnSpc>
             </a:pPr>
             <a:r>
-              <a:rPr sz="2250" b="1">
+              <a:rPr sz="1875" b="1">
                 <a:solidFill>
                   <a:srgbClr val="FFFFFF"/>
                 </a:solidFill>
@@ -9418,89 +10699,7 @@
                 <a:ea typeface="Pretendard"/>
                 <a:cs typeface="Pretendard"/>
               </a:rPr>
-              <a:t>3</a:t>
-            </a:r>
-          </a:p>
-        </p:txBody>
-      </p:sp>
-      <p:sp>
-        <p:nvSpPr>
-          <p:cNvPr id="21" name="TextBox 20"/>
-          <p:cNvSpPr txBox="1"/>
-          <p:nvPr/>
-        </p:nvSpPr>
-        <p:spPr>
-          <a:xfrm>
-            <a:off x="2324100" y="5676900"/>
-            <a:ext cx="9906000" cy="400050"/>
-          </a:xfrm>
-          <a:prstGeom prst="rect">
-            <a:avLst/>
-          </a:prstGeom>
-          <a:noFill/>
-        </p:spPr>
-        <p:txBody>
-          <a:bodyPr wrap="square" lIns="0" rIns="0" tIns="0" bIns="0" anchor="t">
-            <a:spAutoFit/>
-          </a:bodyPr>
-          <a:lstStyle/>
-          <a:p>
-            <a:pPr algn="l">
-              <a:lnSpc>
-                <a:spcPct val="110000"/>
-              </a:lnSpc>
-            </a:pPr>
-            <a:r>
-              <a:rPr sz="2475" b="1">
-                <a:solidFill>
-                  <a:srgbClr val="0D2B5E"/>
-                </a:solidFill>
-                <a:latin typeface="Pretendard"/>
-                <a:ea typeface="Pretendard"/>
-                <a:cs typeface="Pretendard"/>
-              </a:rPr>
-              <a:t>--conf (2)(3) 확장과 카탈로그</a:t>
-            </a:r>
-          </a:p>
-        </p:txBody>
-      </p:sp>
-      <p:sp>
-        <p:nvSpPr>
-          <p:cNvPr id="22" name="TextBox 21"/>
-          <p:cNvSpPr txBox="1"/>
-          <p:nvPr/>
-        </p:nvSpPr>
-        <p:spPr>
-          <a:xfrm>
-            <a:off x="2324100" y="6076950"/>
-            <a:ext cx="9906000" cy="361950"/>
-          </a:xfrm>
-          <a:prstGeom prst="rect">
-            <a:avLst/>
-          </a:prstGeom>
-          <a:noFill/>
-        </p:spPr>
-        <p:txBody>
-          <a:bodyPr wrap="square" lIns="0" rIns="0" tIns="0" bIns="0" anchor="t">
-            <a:spAutoFit/>
-          </a:bodyPr>
-          <a:lstStyle/>
-          <a:p>
-            <a:pPr algn="l">
-              <a:lnSpc>
-                <a:spcPct val="120000"/>
-              </a:lnSpc>
-            </a:pPr>
-            <a:r>
-              <a:rPr sz="2025" b="0">
-                <a:solidFill>
-                  <a:srgbClr val="3D3D3D"/>
-                </a:solidFill>
-                <a:latin typeface="Pretendard"/>
-                <a:ea typeface="Pretendard"/>
-                <a:cs typeface="Pretendard"/>
-              </a:rPr>
-              <a:t>sql.extensions 한 줄 + spark.sql.catalog.lake 세 줄(hadoop · s3a://warehouse/)</a:t>
+              <a:t>FileNotFound</a:t>
             </a:r>
           </a:p>
         </p:txBody>
@@ -9513,20 +10712,20 @@
         </p:nvSpPr>
         <p:spPr>
           <a:xfrm>
-            <a:off x="13144500" y="2933700"/>
-            <a:ext cx="4000500" cy="3629025"/>
+            <a:off x="6115685" y="5583555"/>
+            <a:ext cx="2152015" cy="1214438"/>
           </a:xfrm>
           <a:prstGeom prst="roundRect">
             <a:avLst>
-              <a:gd name="adj" fmla="val 1312"/>
+              <a:gd name="adj" fmla="val 3921"/>
             </a:avLst>
           </a:prstGeom>
           <a:solidFill>
-            <a:srgbClr val="EDF3FD"/>
+            <a:srgbClr val="FAFBFD"/>
           </a:solidFill>
           <a:ln w="9525">
             <a:solidFill>
-              <a:srgbClr val="BFD3F5"/>
+              <a:srgbClr val="DCE1E8"/>
             </a:solidFill>
           </a:ln>
           <a:effectLst/>
@@ -9547,8 +10746,49 @@
         </p:nvSpPr>
         <p:spPr>
           <a:xfrm>
-            <a:off x="13487400" y="3929062"/>
-            <a:ext cx="3314700" cy="304800"/>
+            <a:off x="6249035" y="5583555"/>
+            <a:ext cx="1885315" cy="1214438"/>
+          </a:xfrm>
+          <a:prstGeom prst="rect">
+            <a:avLst/>
+          </a:prstGeom>
+          <a:noFill/>
+        </p:spPr>
+        <p:txBody>
+          <a:bodyPr wrap="square" lIns="0" rIns="0" tIns="0" bIns="0" anchor="ctr">
+            <a:spAutoFit/>
+          </a:bodyPr>
+          <a:lstStyle/>
+          <a:p>
+            <a:pPr algn="ctr">
+              <a:lnSpc>
+                <a:spcPct val="135000"/>
+              </a:lnSpc>
+            </a:pPr>
+            <a:r>
+              <a:rPr sz="1500" b="0">
+                <a:solidFill>
+                  <a:srgbClr val="3D3D3D"/>
+                </a:solidFill>
+                <a:latin typeface="Pretendard"/>
+                <a:ea typeface="Pretendard"/>
+                <a:cs typeface="Pretendard"/>
+              </a:rPr>
+              <a:t>…/resolved-…xml</a:t>
+            </a:r>
+          </a:p>
+        </p:txBody>
+      </p:sp>
+      <p:sp>
+        <p:nvSpPr>
+          <p:cNvPr id="25" name="TextBox 24"/>
+          <p:cNvSpPr txBox="1"/>
+          <p:nvPr/>
+        </p:nvSpPr>
+        <p:spPr>
+          <a:xfrm>
+            <a:off x="9772650" y="2857500"/>
+            <a:ext cx="7372350" cy="533400"/>
           </a:xfrm>
           <a:prstGeom prst="rect">
             <a:avLst/>
@@ -9563,33 +10803,33 @@
           <a:p>
             <a:pPr algn="l">
               <a:lnSpc>
-                <a:spcPct val="100000"/>
-              </a:lnSpc>
-            </a:pPr>
-            <a:r>
-              <a:rPr sz="1800" b="1" spc="190">
-                <a:solidFill>
-                  <a:srgbClr val="1E5BC6"/>
-                </a:solidFill>
-                <a:latin typeface="Pretendard"/>
-                <a:ea typeface="Pretendard"/>
-                <a:cs typeface="Pretendard"/>
-              </a:rPr>
-              <a:t>endpoint 호스트</a:t>
-            </a:r>
-          </a:p>
-        </p:txBody>
-      </p:sp>
-      <p:sp>
-        <p:nvSpPr>
-          <p:cNvPr id="25" name="TextBox 24"/>
-          <p:cNvSpPr txBox="1"/>
-          <p:nvPr/>
-        </p:nvSpPr>
-        <p:spPr>
-          <a:xfrm>
-            <a:off x="13487400" y="4329112"/>
-            <a:ext cx="3314700" cy="1238250"/>
+                <a:spcPct val="110000"/>
+              </a:lnSpc>
+            </a:pPr>
+            <a:r>
+              <a:rPr sz="3150" b="1">
+                <a:solidFill>
+                  <a:srgbClr val="0D2B5E"/>
+                </a:solidFill>
+                <a:latin typeface="Pretendard"/>
+                <a:ea typeface="Pretendard"/>
+                <a:cs typeface="Pretendard"/>
+              </a:rPr>
+              <a:t>넣으면 — /tmp/.ivy2</a:t>
+            </a:r>
+          </a:p>
+        </p:txBody>
+      </p:sp>
+      <p:sp>
+        <p:nvSpPr>
+          <p:cNvPr id="26" name="TextBox 25"/>
+          <p:cNvSpPr txBox="1"/>
+          <p:nvPr/>
+        </p:nvSpPr>
+        <p:spPr>
+          <a:xfrm>
+            <a:off x="9772650" y="3467100"/>
+            <a:ext cx="7372350" cy="876300"/>
           </a:xfrm>
           <a:prstGeom prst="rect">
             <a:avLst/>
@@ -9604,57 +10844,73 @@
           <a:p>
             <a:pPr algn="l">
               <a:lnSpc>
-                <a:spcPct val="138000"/>
-              </a:lnSpc>
-            </a:pPr>
-            <a:r>
-              <a:rPr sz="2700" b="1">
-                <a:solidFill>
-                  <a:srgbClr val="0D2B5E"/>
-                </a:solidFill>
-                <a:latin typeface="Pretendard"/>
-                <a:ea typeface="Pretendard"/>
-                <a:cs typeface="Pretendard"/>
-              </a:rPr>
-              <a:t>minio</a:t>
-            </a:r>
-          </a:p>
-          <a:p>
-            <a:pPr algn="l">
-              <a:lnSpc>
-                <a:spcPct val="138000"/>
-              </a:lnSpc>
-            </a:pPr>
-            <a:r>
-              <a:rPr sz="2700" b="1">
-                <a:solidFill>
-                  <a:srgbClr val="0D2B5E"/>
-                </a:solidFill>
-                <a:latin typeface="Pretendard"/>
-                <a:ea typeface="Pretendard"/>
-                <a:cs typeface="Pretendard"/>
-              </a:rPr>
-              <a:t>서비스 이름</a:t>
-            </a:r>
-          </a:p>
-        </p:txBody>
-      </p:sp>
-      <p:sp>
-        <p:nvSpPr>
-          <p:cNvPr id="26" name="Rectangle 25"/>
-          <p:cNvSpPr/>
-          <p:nvPr/>
-        </p:nvSpPr>
-        <p:spPr>
-          <a:xfrm>
-            <a:off x="1143000" y="7581900"/>
-            <a:ext cx="38100" cy="323850"/>
-          </a:xfrm>
-          <a:prstGeom prst="rect">
-            <a:avLst/>
-          </a:prstGeom>
-          <a:solidFill>
-            <a:srgbClr val="BFD3F5"/>
+                <a:spcPct val="146000"/>
+              </a:lnSpc>
+            </a:pPr>
+            <a:r>
+              <a:rPr sz="2250" b="0">
+                <a:solidFill>
+                  <a:srgbClr val="3D3D3D"/>
+                </a:solidFill>
+                <a:latin typeface="Pretendard"/>
+                <a:ea typeface="Pretendard"/>
+                <a:cs typeface="Pretendard"/>
+              </a:rPr>
+              <a:t>캐시는 컨테이너 안 — stop 뒤 남고 down 하면 다시 받음</a:t>
+            </a:r>
+          </a:p>
+        </p:txBody>
+      </p:sp>
+      <p:sp>
+        <p:nvSpPr>
+          <p:cNvPr id="27" name="Rounded Rectangle 26"/>
+          <p:cNvSpPr/>
+          <p:nvPr/>
+        </p:nvSpPr>
+        <p:spPr>
+          <a:xfrm>
+            <a:off x="9772650" y="4610100"/>
+            <a:ext cx="7372350" cy="2857500"/>
+          </a:xfrm>
+          <a:prstGeom prst="roundRect">
+            <a:avLst>
+              <a:gd name="adj" fmla="val 1666"/>
+            </a:avLst>
+          </a:prstGeom>
+          <a:solidFill>
+            <a:srgbClr val="FAFBFD"/>
+          </a:solidFill>
+          <a:ln w="9525">
+            <a:solidFill>
+              <a:srgbClr val="DCE1E8"/>
+            </a:solidFill>
+          </a:ln>
+          <a:effectLst/>
+        </p:spPr>
+        <p:txBody>
+          <a:bodyPr rtlCol="0" anchor="ctr" wrap="square"/>
+          <a:lstStyle/>
+          <a:p>
+            <a:pPr algn="ctr"/>
+          </a:p>
+        </p:txBody>
+      </p:sp>
+      <p:sp>
+        <p:nvSpPr>
+          <p:cNvPr id="28" name="Rectangle 27"/>
+          <p:cNvSpPr/>
+          <p:nvPr/>
+        </p:nvSpPr>
+        <p:spPr>
+          <a:xfrm>
+            <a:off x="10020300" y="4838700"/>
+            <a:ext cx="2152015" cy="599122"/>
+          </a:xfrm>
+          <a:prstGeom prst="rect">
+            <a:avLst/>
+          </a:prstGeom>
+          <a:solidFill>
+            <a:srgbClr val="0D2B5E"/>
           </a:solidFill>
           <a:ln>
             <a:noFill/>
@@ -9671,14 +10927,512 @@
       </p:sp>
       <p:sp>
         <p:nvSpPr>
-          <p:cNvPr id="27" name="TextBox 26"/>
-          <p:cNvSpPr txBox="1"/>
-          <p:nvPr/>
-        </p:nvSpPr>
-        <p:spPr>
-          <a:xfrm>
-            <a:off x="1314450" y="7581900"/>
-            <a:ext cx="15830550" cy="342900"/>
+          <p:cNvPr id="29" name="TextBox 28"/>
+          <p:cNvSpPr txBox="1"/>
+          <p:nvPr/>
+        </p:nvSpPr>
+        <p:spPr>
+          <a:xfrm>
+            <a:off x="10020300" y="4838700"/>
+            <a:ext cx="2152015" cy="599122"/>
+          </a:xfrm>
+          <a:prstGeom prst="rect">
+            <a:avLst/>
+          </a:prstGeom>
+          <a:noFill/>
+        </p:spPr>
+        <p:txBody>
+          <a:bodyPr wrap="square" lIns="0" rIns="0" tIns="0" bIns="0" anchor="ctr">
+            <a:spAutoFit/>
+          </a:bodyPr>
+          <a:lstStyle/>
+          <a:p>
+            <a:pPr algn="ctr">
+              <a:lnSpc>
+                <a:spcPct val="100000"/>
+              </a:lnSpc>
+            </a:pPr>
+            <a:r>
+              <a:rPr sz="2025" b="1">
+                <a:solidFill>
+                  <a:srgbClr val="FFFFFF"/>
+                </a:solidFill>
+                <a:latin typeface="Pretendard"/>
+                <a:ea typeface="Pretendard"/>
+                <a:cs typeface="Pretendard"/>
+              </a:rPr>
+              <a:t>첫 실행 1~2분</a:t>
+            </a:r>
+          </a:p>
+        </p:txBody>
+      </p:sp>
+      <p:sp>
+        <p:nvSpPr>
+          <p:cNvPr id="30" name="Rounded Rectangle 29"/>
+          <p:cNvSpPr/>
+          <p:nvPr/>
+        </p:nvSpPr>
+        <p:spPr>
+          <a:xfrm>
+            <a:off x="10020300" y="5583555"/>
+            <a:ext cx="2152015" cy="1214438"/>
+          </a:xfrm>
+          <a:prstGeom prst="roundRect">
+            <a:avLst>
+              <a:gd name="adj" fmla="val 3921"/>
+            </a:avLst>
+          </a:prstGeom>
+          <a:solidFill>
+            <a:srgbClr val="FAFBFD"/>
+          </a:solidFill>
+          <a:ln w="9525">
+            <a:solidFill>
+              <a:srgbClr val="DCE1E8"/>
+            </a:solidFill>
+          </a:ln>
+          <a:effectLst/>
+        </p:spPr>
+        <p:txBody>
+          <a:bodyPr rtlCol="0" anchor="ctr" wrap="square"/>
+          <a:lstStyle/>
+          <a:p>
+            <a:pPr algn="ctr"/>
+          </a:p>
+        </p:txBody>
+      </p:sp>
+      <p:sp>
+        <p:nvSpPr>
+          <p:cNvPr id="31" name="TextBox 30"/>
+          <p:cNvSpPr txBox="1"/>
+          <p:nvPr/>
+        </p:nvSpPr>
+        <p:spPr>
+          <a:xfrm>
+            <a:off x="10153650" y="5583555"/>
+            <a:ext cx="1885315" cy="1214438"/>
+          </a:xfrm>
+          <a:prstGeom prst="rect">
+            <a:avLst/>
+          </a:prstGeom>
+          <a:noFill/>
+        </p:spPr>
+        <p:txBody>
+          <a:bodyPr wrap="square" lIns="0" rIns="0" tIns="0" bIns="0" anchor="ctr">
+            <a:spAutoFit/>
+          </a:bodyPr>
+          <a:lstStyle/>
+          <a:p>
+            <a:pPr algn="ctr">
+              <a:lnSpc>
+                <a:spcPct val="135000"/>
+              </a:lnSpc>
+            </a:pPr>
+            <a:r>
+              <a:rPr sz="1500" b="0">
+                <a:solidFill>
+                  <a:srgbClr val="3D3D3D"/>
+                </a:solidFill>
+                <a:latin typeface="Pretendard"/>
+                <a:ea typeface="Pretendard"/>
+                <a:cs typeface="Pretendard"/>
+              </a:rPr>
+              <a:t>jar 4개 316MB</a:t>
+            </a:r>
+          </a:p>
+        </p:txBody>
+      </p:sp>
+      <p:sp>
+        <p:nvSpPr>
+          <p:cNvPr id="32" name="Right Arrow 31"/>
+          <p:cNvSpPr/>
+          <p:nvPr/>
+        </p:nvSpPr>
+        <p:spPr>
+          <a:xfrm>
+            <a:off x="12191365" y="5049202"/>
+            <a:ext cx="172402" cy="178118"/>
+          </a:xfrm>
+          <a:prstGeom prst="rightArrow">
+            <a:avLst/>
+          </a:prstGeom>
+          <a:solidFill>
+            <a:srgbClr val="1E5BC6"/>
+          </a:solidFill>
+          <a:ln>
+            <a:noFill/>
+          </a:ln>
+          <a:effectLst/>
+        </p:spPr>
+        <p:txBody>
+          <a:bodyPr rtlCol="0" anchor="ctr" wrap="square"/>
+          <a:lstStyle/>
+          <a:p>
+            <a:pPr algn="ctr"/>
+          </a:p>
+        </p:txBody>
+      </p:sp>
+      <p:sp>
+        <p:nvSpPr>
+          <p:cNvPr id="33" name="Rectangle 32"/>
+          <p:cNvSpPr/>
+          <p:nvPr/>
+        </p:nvSpPr>
+        <p:spPr>
+          <a:xfrm>
+            <a:off x="12382818" y="4838700"/>
+            <a:ext cx="2152015" cy="599122"/>
+          </a:xfrm>
+          <a:prstGeom prst="rect">
+            <a:avLst/>
+          </a:prstGeom>
+          <a:solidFill>
+            <a:srgbClr val="1E5BC6"/>
+          </a:solidFill>
+          <a:ln>
+            <a:noFill/>
+          </a:ln>
+          <a:effectLst/>
+        </p:spPr>
+        <p:txBody>
+          <a:bodyPr rtlCol="0" anchor="ctr" wrap="square"/>
+          <a:lstStyle/>
+          <a:p>
+            <a:pPr algn="ctr"/>
+          </a:p>
+        </p:txBody>
+      </p:sp>
+      <p:sp>
+        <p:nvSpPr>
+          <p:cNvPr id="34" name="TextBox 33"/>
+          <p:cNvSpPr txBox="1"/>
+          <p:nvPr/>
+        </p:nvSpPr>
+        <p:spPr>
+          <a:xfrm>
+            <a:off x="12382818" y="4838700"/>
+            <a:ext cx="2152015" cy="599122"/>
+          </a:xfrm>
+          <a:prstGeom prst="rect">
+            <a:avLst/>
+          </a:prstGeom>
+          <a:noFill/>
+        </p:spPr>
+        <p:txBody>
+          <a:bodyPr wrap="square" lIns="0" rIns="0" tIns="0" bIns="0" anchor="ctr">
+            <a:spAutoFit/>
+          </a:bodyPr>
+          <a:lstStyle/>
+          <a:p>
+            <a:pPr algn="ctr">
+              <a:lnSpc>
+                <a:spcPct val="100000"/>
+              </a:lnSpc>
+            </a:pPr>
+            <a:r>
+              <a:rPr sz="2025" b="1">
+                <a:solidFill>
+                  <a:srgbClr val="FFFFFF"/>
+                </a:solidFill>
+                <a:latin typeface="Pretendard"/>
+                <a:ea typeface="Pretendard"/>
+                <a:cs typeface="Pretendard"/>
+              </a:rPr>
+              <a:t>aws-java-sdk</a:t>
+            </a:r>
+          </a:p>
+        </p:txBody>
+      </p:sp>
+      <p:sp>
+        <p:nvSpPr>
+          <p:cNvPr id="35" name="Rounded Rectangle 34"/>
+          <p:cNvSpPr/>
+          <p:nvPr/>
+        </p:nvSpPr>
+        <p:spPr>
+          <a:xfrm>
+            <a:off x="12382818" y="5583555"/>
+            <a:ext cx="2152015" cy="1214438"/>
+          </a:xfrm>
+          <a:prstGeom prst="roundRect">
+            <a:avLst>
+              <a:gd name="adj" fmla="val 3921"/>
+            </a:avLst>
+          </a:prstGeom>
+          <a:solidFill>
+            <a:srgbClr val="FAFBFD"/>
+          </a:solidFill>
+          <a:ln w="9525">
+            <a:solidFill>
+              <a:srgbClr val="DCE1E8"/>
+            </a:solidFill>
+          </a:ln>
+          <a:effectLst/>
+        </p:spPr>
+        <p:txBody>
+          <a:bodyPr rtlCol="0" anchor="ctr" wrap="square"/>
+          <a:lstStyle/>
+          <a:p>
+            <a:pPr algn="ctr"/>
+          </a:p>
+        </p:txBody>
+      </p:sp>
+      <p:sp>
+        <p:nvSpPr>
+          <p:cNvPr id="36" name="TextBox 35"/>
+          <p:cNvSpPr txBox="1"/>
+          <p:nvPr/>
+        </p:nvSpPr>
+        <p:spPr>
+          <a:xfrm>
+            <a:off x="12516168" y="5583555"/>
+            <a:ext cx="1885315" cy="1214438"/>
+          </a:xfrm>
+          <a:prstGeom prst="rect">
+            <a:avLst/>
+          </a:prstGeom>
+          <a:noFill/>
+        </p:spPr>
+        <p:txBody>
+          <a:bodyPr wrap="square" lIns="0" rIns="0" tIns="0" bIns="0" anchor="ctr">
+            <a:spAutoFit/>
+          </a:bodyPr>
+          <a:lstStyle/>
+          <a:p>
+            <a:pPr algn="ctr">
+              <a:lnSpc>
+                <a:spcPct val="135000"/>
+              </a:lnSpc>
+            </a:pPr>
+            <a:r>
+              <a:rPr sz="1500" b="0">
+                <a:solidFill>
+                  <a:srgbClr val="3D3D3D"/>
+                </a:solidFill>
+                <a:latin typeface="Pretendard"/>
+                <a:ea typeface="Pretendard"/>
+                <a:cs typeface="Pretendard"/>
+              </a:rPr>
+              <a:t>혼자 74.6초</a:t>
+            </a:r>
+          </a:p>
+        </p:txBody>
+      </p:sp>
+      <p:sp>
+        <p:nvSpPr>
+          <p:cNvPr id="37" name="Right Arrow 36"/>
+          <p:cNvSpPr/>
+          <p:nvPr/>
+        </p:nvSpPr>
+        <p:spPr>
+          <a:xfrm>
+            <a:off x="14553882" y="5049202"/>
+            <a:ext cx="172402" cy="178118"/>
+          </a:xfrm>
+          <a:prstGeom prst="rightArrow">
+            <a:avLst/>
+          </a:prstGeom>
+          <a:solidFill>
+            <a:srgbClr val="1E5BC6"/>
+          </a:solidFill>
+          <a:ln>
+            <a:noFill/>
+          </a:ln>
+          <a:effectLst/>
+        </p:spPr>
+        <p:txBody>
+          <a:bodyPr rtlCol="0" anchor="ctr" wrap="square"/>
+          <a:lstStyle/>
+          <a:p>
+            <a:pPr algn="ctr"/>
+          </a:p>
+        </p:txBody>
+      </p:sp>
+      <p:sp>
+        <p:nvSpPr>
+          <p:cNvPr id="38" name="Rectangle 37"/>
+          <p:cNvSpPr/>
+          <p:nvPr/>
+        </p:nvSpPr>
+        <p:spPr>
+          <a:xfrm>
+            <a:off x="14745335" y="4838700"/>
+            <a:ext cx="2152015" cy="599122"/>
+          </a:xfrm>
+          <a:prstGeom prst="rect">
+            <a:avLst/>
+          </a:prstGeom>
+          <a:solidFill>
+            <a:srgbClr val="0D2B5E"/>
+          </a:solidFill>
+          <a:ln>
+            <a:noFill/>
+          </a:ln>
+          <a:effectLst/>
+        </p:spPr>
+        <p:txBody>
+          <a:bodyPr rtlCol="0" anchor="ctr" wrap="square"/>
+          <a:lstStyle/>
+          <a:p>
+            <a:pPr algn="ctr"/>
+          </a:p>
+        </p:txBody>
+      </p:sp>
+      <p:sp>
+        <p:nvSpPr>
+          <p:cNvPr id="39" name="TextBox 38"/>
+          <p:cNvSpPr txBox="1"/>
+          <p:nvPr/>
+        </p:nvSpPr>
+        <p:spPr>
+          <a:xfrm>
+            <a:off x="14745335" y="4838700"/>
+            <a:ext cx="2152015" cy="599122"/>
+          </a:xfrm>
+          <a:prstGeom prst="rect">
+            <a:avLst/>
+          </a:prstGeom>
+          <a:noFill/>
+        </p:spPr>
+        <p:txBody>
+          <a:bodyPr wrap="square" lIns="0" rIns="0" tIns="0" bIns="0" anchor="ctr">
+            <a:spAutoFit/>
+          </a:bodyPr>
+          <a:lstStyle/>
+          <a:p>
+            <a:pPr algn="ctr">
+              <a:lnSpc>
+                <a:spcPct val="100000"/>
+              </a:lnSpc>
+            </a:pPr>
+            <a:r>
+              <a:rPr sz="2025" b="1">
+                <a:solidFill>
+                  <a:srgbClr val="FFFFFF"/>
+                </a:solidFill>
+                <a:latin typeface="Pretendard"/>
+                <a:ea typeface="Pretendard"/>
+                <a:cs typeface="Pretendard"/>
+              </a:rPr>
+              <a:t>두 번째 10~20초</a:t>
+            </a:r>
+          </a:p>
+        </p:txBody>
+      </p:sp>
+      <p:sp>
+        <p:nvSpPr>
+          <p:cNvPr id="40" name="Rounded Rectangle 39"/>
+          <p:cNvSpPr/>
+          <p:nvPr/>
+        </p:nvSpPr>
+        <p:spPr>
+          <a:xfrm>
+            <a:off x="14745335" y="5583555"/>
+            <a:ext cx="2152015" cy="1214438"/>
+          </a:xfrm>
+          <a:prstGeom prst="roundRect">
+            <a:avLst>
+              <a:gd name="adj" fmla="val 3921"/>
+            </a:avLst>
+          </a:prstGeom>
+          <a:solidFill>
+            <a:srgbClr val="FAFBFD"/>
+          </a:solidFill>
+          <a:ln w="9525">
+            <a:solidFill>
+              <a:srgbClr val="DCE1E8"/>
+            </a:solidFill>
+          </a:ln>
+          <a:effectLst/>
+        </p:spPr>
+        <p:txBody>
+          <a:bodyPr rtlCol="0" anchor="ctr" wrap="square"/>
+          <a:lstStyle/>
+          <a:p>
+            <a:pPr algn="ctr"/>
+          </a:p>
+        </p:txBody>
+      </p:sp>
+      <p:sp>
+        <p:nvSpPr>
+          <p:cNvPr id="41" name="TextBox 40"/>
+          <p:cNvSpPr txBox="1"/>
+          <p:nvPr/>
+        </p:nvSpPr>
+        <p:spPr>
+          <a:xfrm>
+            <a:off x="14878685" y="5583555"/>
+            <a:ext cx="1885315" cy="1214438"/>
+          </a:xfrm>
+          <a:prstGeom prst="rect">
+            <a:avLst/>
+          </a:prstGeom>
+          <a:noFill/>
+        </p:spPr>
+        <p:txBody>
+          <a:bodyPr wrap="square" lIns="0" rIns="0" tIns="0" bIns="0" anchor="ctr">
+            <a:spAutoFit/>
+          </a:bodyPr>
+          <a:lstStyle/>
+          <a:p>
+            <a:pPr algn="ctr">
+              <a:lnSpc>
+                <a:spcPct val="135000"/>
+              </a:lnSpc>
+            </a:pPr>
+            <a:r>
+              <a:rPr sz="1500" b="0">
+                <a:solidFill>
+                  <a:srgbClr val="3D3D3D"/>
+                </a:solidFill>
+                <a:latin typeface="Pretendard"/>
+                <a:ea typeface="Pretendard"/>
+                <a:cs typeface="Pretendard"/>
+              </a:rPr>
+              <a:t>4 already retrieved</a:t>
+            </a:r>
+          </a:p>
+        </p:txBody>
+      </p:sp>
+      <p:sp>
+        <p:nvSpPr>
+          <p:cNvPr id="42" name="Oval 41"/>
+          <p:cNvSpPr/>
+          <p:nvPr/>
+        </p:nvSpPr>
+        <p:spPr>
+          <a:xfrm>
+            <a:off x="8686800" y="3771900"/>
+            <a:ext cx="914400" cy="914400"/>
+          </a:xfrm>
+          <a:prstGeom prst="ellipse">
+            <a:avLst/>
+          </a:prstGeom>
+          <a:solidFill>
+            <a:srgbClr val="0D2B5E"/>
+          </a:solidFill>
+          <a:ln>
+            <a:noFill/>
+          </a:ln>
+          <a:effectLst/>
+        </p:spPr>
+        <p:txBody>
+          <a:bodyPr rtlCol="0" anchor="ctr" wrap="square"/>
+          <a:lstStyle/>
+          <a:p>
+            <a:pPr algn="ctr"/>
+          </a:p>
+        </p:txBody>
+      </p:sp>
+      <p:sp>
+        <p:nvSpPr>
+          <p:cNvPr id="43" name="TextBox 42"/>
+          <p:cNvSpPr txBox="1"/>
+          <p:nvPr/>
+        </p:nvSpPr>
+        <p:spPr>
+          <a:xfrm>
+            <a:off x="8686800" y="4057650"/>
+            <a:ext cx="914400" cy="381000"/>
           </a:xfrm>
           <a:prstGeom prst="rect">
             <a:avLst/>
@@ -9691,28 +11445,28 @@
           </a:bodyPr>
           <a:lstStyle/>
           <a:p>
-            <a:pPr algn="l">
+            <a:pPr algn="ctr">
               <a:lnSpc>
                 <a:spcPct val="100000"/>
               </a:lnSpc>
             </a:pPr>
             <a:r>
-              <a:rPr sz="1725" b="1">
-                <a:solidFill>
-                  <a:srgbClr val="7D7D7D"/>
-                </a:solidFill>
-                <a:latin typeface="Pretendard"/>
-                <a:ea typeface="Pretendard"/>
-                <a:cs typeface="Pretendard"/>
-              </a:rPr>
-              <a:t>의존성 로그가 지나간 뒤 &gt;&gt;&gt; 가 뜨면 성공 — 긴 명령은 셸 함수나 스크립트로 저장해 두세요</a:t>
-            </a:r>
-          </a:p>
-        </p:txBody>
-      </p:sp>
-      <p:sp>
-        <p:nvSpPr>
-          <p:cNvPr id="28" name="Rectangle 27"/>
+              <a:rPr sz="2250" b="1">
+                <a:solidFill>
+                  <a:srgbClr val="FFFFFF"/>
+                </a:solidFill>
+                <a:latin typeface="Pretendard"/>
+                <a:ea typeface="Pretendard"/>
+                <a:cs typeface="Pretendard"/>
+              </a:rPr>
+              <a:t>VS</a:t>
+            </a:r>
+          </a:p>
+        </p:txBody>
+      </p:sp>
+      <p:sp>
+        <p:nvSpPr>
+          <p:cNvPr id="44" name="Rectangle 43"/>
           <p:cNvSpPr/>
           <p:nvPr/>
         </p:nvSpPr>
@@ -9742,7 +11496,7 @@
       </p:sp>
       <p:sp>
         <p:nvSpPr>
-          <p:cNvPr id="29" name="TextBox 28"/>
+          <p:cNvPr id="45" name="TextBox 44"/>
           <p:cNvSpPr txBox="1"/>
           <p:nvPr/>
         </p:nvSpPr>
@@ -9783,7 +11537,7 @@
       </p:sp>
       <p:sp>
         <p:nvSpPr>
-          <p:cNvPr id="30" name="TextBox 29"/>
+          <p:cNvPr id="46" name="TextBox 45"/>
           <p:cNvSpPr txBox="1"/>
           <p:nvPr/>
         </p:nvSpPr>
@@ -10007,7 +11761,7 @@
                 <a:ea typeface="Pretendard"/>
                 <a:cs typeface="Pretendard"/>
               </a:rPr>
-              <a:t>s3a 왕복 — count 가 100 이면 연결 완료</a:t>
+              <a:t>s3a 왕복 — count 100 이면 연결 완료</a:t>
             </a:r>
           </a:p>
         </p:txBody>
@@ -10733,7 +12487,7 @@
                 <a:ea typeface="Pretendard"/>
                 <a:cs typeface="Pretendard"/>
               </a:rPr>
-              <a:t>콘솔에서 part 파일 개수를 비교</a:t>
+              <a:t>셸에서는 4 — 워커 둘의 코어 4개만큼</a:t>
             </a:r>
           </a:p>
         </p:txBody>
@@ -10913,7 +12667,7 @@
                 <a:ea typeface="Pretendard"/>
                 <a:cs typeface="Pretendard"/>
               </a:rPr>
-              <a:t>파티션 수</a:t>
+              <a:t>4</a:t>
             </a:r>
           </a:p>
         </p:txBody>
@@ -11089,7 +12843,7 @@
                 <a:ea typeface="Pretendard"/>
                 <a:cs typeface="Pretendard"/>
               </a:rPr>
-              <a:t>part 여러 개</a:t>
+              <a:t>part 4개</a:t>
             </a:r>
           </a:p>
         </p:txBody>
@@ -11265,7 +13019,7 @@
                 <a:ea typeface="Pretendard"/>
                 <a:cs typeface="Pretendard"/>
               </a:rPr>
-              <a:t>smoke-one/ 하나</a:t>
+              <a:t>smoke-one/ 1개</a:t>
             </a:r>
           </a:p>
         </p:txBody>
@@ -11638,7 +13392,7 @@
                 <a:ea typeface="Pretendard"/>
                 <a:cs typeface="Pretendard"/>
               </a:rPr>
-              <a:t>없는 버킷을 읽어 본다 — 오류 세 가지를 구분</a:t>
+              <a:t>셸 안에서 다시 시도를 1번으로 줄이고 틀린다</a:t>
             </a:r>
           </a:p>
         </p:txBody>
@@ -11675,16 +13429,50 @@
       </p:sp>
       <p:sp>
         <p:nvSpPr>
-          <p:cNvPr id="8" name="Rectangle 7"/>
-          <p:cNvSpPr/>
-          <p:nvPr/>
-        </p:nvSpPr>
-        <p:spPr>
-          <a:xfrm>
-            <a:off x="1143000" y="2781300"/>
-            <a:ext cx="5722620" cy="590550"/>
-          </a:xfrm>
-          <a:prstGeom prst="rect">
+          <p:cNvPr id="8" name="Rounded Rectangle 7"/>
+          <p:cNvSpPr/>
+          <p:nvPr/>
+        </p:nvSpPr>
+        <p:spPr>
+          <a:xfrm>
+            <a:off x="1143000" y="2933700"/>
+            <a:ext cx="11430000" cy="1095375"/>
+          </a:xfrm>
+          <a:prstGeom prst="roundRect">
+            <a:avLst>
+              <a:gd name="adj" fmla="val 4347"/>
+            </a:avLst>
+          </a:prstGeom>
+          <a:solidFill>
+            <a:srgbClr val="FAFBFD"/>
+          </a:solidFill>
+          <a:ln w="9525">
+            <a:solidFill>
+              <a:srgbClr val="DCE1E8"/>
+            </a:solidFill>
+          </a:ln>
+          <a:effectLst/>
+        </p:spPr>
+        <p:txBody>
+          <a:bodyPr rtlCol="0" anchor="ctr" wrap="square"/>
+          <a:lstStyle/>
+          <a:p>
+            <a:pPr algn="ctr"/>
+          </a:p>
+        </p:txBody>
+      </p:sp>
+      <p:sp>
+        <p:nvSpPr>
+          <p:cNvPr id="9" name="Oval 8"/>
+          <p:cNvSpPr/>
+          <p:nvPr/>
+        </p:nvSpPr>
+        <p:spPr>
+          <a:xfrm>
+            <a:off x="1447800" y="3181350"/>
+            <a:ext cx="590550" cy="590550"/>
+          </a:xfrm>
+          <a:prstGeom prst="ellipse">
             <a:avLst/>
           </a:prstGeom>
           <a:solidFill>
@@ -11705,22 +13493,22 @@
       </p:sp>
       <p:sp>
         <p:nvSpPr>
-          <p:cNvPr id="9" name="TextBox 8"/>
-          <p:cNvSpPr txBox="1"/>
-          <p:nvPr/>
-        </p:nvSpPr>
-        <p:spPr>
-          <a:xfrm>
-            <a:off x="1143000" y="2781300"/>
-            <a:ext cx="5722620" cy="590550"/>
-          </a:xfrm>
-          <a:prstGeom prst="rect">
-            <a:avLst/>
-          </a:prstGeom>
-          <a:noFill/>
-        </p:spPr>
-        <p:txBody>
-          <a:bodyPr wrap="square" lIns="0" rIns="0" tIns="0" bIns="0" anchor="ctr">
+          <p:cNvPr id="10" name="TextBox 9"/>
+          <p:cNvSpPr txBox="1"/>
+          <p:nvPr/>
+        </p:nvSpPr>
+        <p:spPr>
+          <a:xfrm>
+            <a:off x="1447800" y="3333750"/>
+            <a:ext cx="590550" cy="323850"/>
+          </a:xfrm>
+          <a:prstGeom prst="rect">
+            <a:avLst/>
+          </a:prstGeom>
+          <a:noFill/>
+        </p:spPr>
+        <p:txBody>
+          <a:bodyPr wrap="square" lIns="0" rIns="0" tIns="0" bIns="0" anchor="t">
             <a:spAutoFit/>
           </a:bodyPr>
           <a:lstStyle/>
@@ -11731,7 +13519,7 @@
               </a:lnSpc>
             </a:pPr>
             <a:r>
-              <a:rPr sz="2025" b="1">
+              <a:rPr sz="2250" b="1">
                 <a:solidFill>
                   <a:srgbClr val="FFFFFF"/>
                 </a:solidFill>
@@ -11739,27 +13527,143 @@
                 <a:ea typeface="Pretendard"/>
                 <a:cs typeface="Pretendard"/>
               </a:rPr>
-              <a:t>틀린 것</a:t>
-            </a:r>
-          </a:p>
-        </p:txBody>
-      </p:sp>
-      <p:sp>
-        <p:nvSpPr>
-          <p:cNvPr id="10" name="Rectangle 9"/>
-          <p:cNvSpPr/>
-          <p:nvPr/>
-        </p:nvSpPr>
-        <p:spPr>
-          <a:xfrm>
-            <a:off x="6903720" y="2781300"/>
-            <a:ext cx="4762500" cy="590550"/>
-          </a:xfrm>
-          <a:prstGeom prst="rect">
-            <a:avLst/>
-          </a:prstGeom>
-          <a:solidFill>
-            <a:srgbClr val="1E5BC6"/>
+              <a:t>1</a:t>
+            </a:r>
+          </a:p>
+        </p:txBody>
+      </p:sp>
+      <p:sp>
+        <p:nvSpPr>
+          <p:cNvPr id="11" name="TextBox 10"/>
+          <p:cNvSpPr txBox="1"/>
+          <p:nvPr/>
+        </p:nvSpPr>
+        <p:spPr>
+          <a:xfrm>
+            <a:off x="2324100" y="3143250"/>
+            <a:ext cx="9906000" cy="400050"/>
+          </a:xfrm>
+          <a:prstGeom prst="rect">
+            <a:avLst/>
+          </a:prstGeom>
+          <a:noFill/>
+        </p:spPr>
+        <p:txBody>
+          <a:bodyPr wrap="square" lIns="0" rIns="0" tIns="0" bIns="0" anchor="t">
+            <a:spAutoFit/>
+          </a:bodyPr>
+          <a:lstStyle/>
+          <a:p>
+            <a:pPr algn="l">
+              <a:lnSpc>
+                <a:spcPct val="110000"/>
+              </a:lnSpc>
+            </a:pPr>
+            <a:r>
+              <a:rPr sz="2475" b="1">
+                <a:solidFill>
+                  <a:srgbClr val="0D2B5E"/>
+                </a:solidFill>
+                <a:latin typeface="Pretendard"/>
+                <a:ea typeface="Pretendard"/>
+                <a:cs typeface="Pretendard"/>
+              </a:rPr>
+              <a:t>setLogLevel("ERROR")</a:t>
+            </a:r>
+          </a:p>
+        </p:txBody>
+      </p:sp>
+      <p:sp>
+        <p:nvSpPr>
+          <p:cNvPr id="12" name="TextBox 11"/>
+          <p:cNvSpPr txBox="1"/>
+          <p:nvPr/>
+        </p:nvSpPr>
+        <p:spPr>
+          <a:xfrm>
+            <a:off x="2324100" y="3543300"/>
+            <a:ext cx="9906000" cy="361950"/>
+          </a:xfrm>
+          <a:prstGeom prst="rect">
+            <a:avLst/>
+          </a:prstGeom>
+          <a:noFill/>
+        </p:spPr>
+        <p:txBody>
+          <a:bodyPr wrap="square" lIns="0" rIns="0" tIns="0" bIns="0" anchor="t">
+            <a:spAutoFit/>
+          </a:bodyPr>
+          <a:lstStyle/>
+          <a:p>
+            <a:pPr algn="l">
+              <a:lnSpc>
+                <a:spcPct val="120000"/>
+              </a:lnSpc>
+            </a:pPr>
+            <a:r>
+              <a:rPr sz="2025" b="0">
+                <a:solidFill>
+                  <a:srgbClr val="3D3D3D"/>
+                </a:solidFill>
+                <a:latin typeface="Pretendard"/>
+                <a:ea typeface="Pretendard"/>
+                <a:cs typeface="Pretendard"/>
+              </a:rPr>
+              <a:t>빼면 S3A 재시도 경고가 자바 스택 수십 줄로 결과를 덮는다</a:t>
+            </a:r>
+          </a:p>
+        </p:txBody>
+      </p:sp>
+      <p:sp>
+        <p:nvSpPr>
+          <p:cNvPr id="13" name="Rounded Rectangle 12"/>
+          <p:cNvSpPr/>
+          <p:nvPr/>
+        </p:nvSpPr>
+        <p:spPr>
+          <a:xfrm>
+            <a:off x="1143000" y="4200525"/>
+            <a:ext cx="11430000" cy="1095375"/>
+          </a:xfrm>
+          <a:prstGeom prst="roundRect">
+            <a:avLst>
+              <a:gd name="adj" fmla="val 4347"/>
+            </a:avLst>
+          </a:prstGeom>
+          <a:solidFill>
+            <a:srgbClr val="FAFBFD"/>
+          </a:solidFill>
+          <a:ln w="9525">
+            <a:solidFill>
+              <a:srgbClr val="DCE1E8"/>
+            </a:solidFill>
+          </a:ln>
+          <a:effectLst/>
+        </p:spPr>
+        <p:txBody>
+          <a:bodyPr rtlCol="0" anchor="ctr" wrap="square"/>
+          <a:lstStyle/>
+          <a:p>
+            <a:pPr algn="ctr"/>
+          </a:p>
+        </p:txBody>
+      </p:sp>
+      <p:sp>
+        <p:nvSpPr>
+          <p:cNvPr id="14" name="Oval 13"/>
+          <p:cNvSpPr/>
+          <p:nvPr/>
+        </p:nvSpPr>
+        <p:spPr>
+          <a:xfrm>
+            <a:off x="1447800" y="4448175"/>
+            <a:ext cx="590550" cy="590550"/>
+          </a:xfrm>
+          <a:prstGeom prst="ellipse">
+            <a:avLst/>
+          </a:prstGeom>
+          <a:solidFill>
+            <a:srgbClr val="0D2B5E"/>
           </a:solidFill>
           <a:ln>
             <a:noFill/>
@@ -11776,22 +13680,22 @@
       </p:sp>
       <p:sp>
         <p:nvSpPr>
-          <p:cNvPr id="11" name="TextBox 10"/>
-          <p:cNvSpPr txBox="1"/>
-          <p:nvPr/>
-        </p:nvSpPr>
-        <p:spPr>
-          <a:xfrm>
-            <a:off x="6903720" y="2781300"/>
-            <a:ext cx="4762500" cy="590550"/>
-          </a:xfrm>
-          <a:prstGeom prst="rect">
-            <a:avLst/>
-          </a:prstGeom>
-          <a:noFill/>
-        </p:spPr>
-        <p:txBody>
-          <a:bodyPr wrap="square" lIns="0" rIns="0" tIns="0" bIns="0" anchor="ctr">
+          <p:cNvPr id="15" name="TextBox 14"/>
+          <p:cNvSpPr txBox="1"/>
+          <p:nvPr/>
+        </p:nvSpPr>
+        <p:spPr>
+          <a:xfrm>
+            <a:off x="1447800" y="4600575"/>
+            <a:ext cx="590550" cy="323850"/>
+          </a:xfrm>
+          <a:prstGeom prst="rect">
+            <a:avLst/>
+          </a:prstGeom>
+          <a:noFill/>
+        </p:spPr>
+        <p:txBody>
+          <a:bodyPr wrap="square" lIns="0" rIns="0" tIns="0" bIns="0" anchor="t">
             <a:spAutoFit/>
           </a:bodyPr>
           <a:lstStyle/>
@@ -11802,7 +13706,7 @@
               </a:lnSpc>
             </a:pPr>
             <a:r>
-              <a:rPr sz="2025" b="1">
+              <a:rPr sz="2250" b="1">
                 <a:solidFill>
                   <a:srgbClr val="FFFFFF"/>
                 </a:solidFill>
@@ -11810,27 +13714,143 @@
                 <a:ea typeface="Pretendard"/>
                 <a:cs typeface="Pretendard"/>
               </a:rPr>
-              <a:t>나는 오류</a:t>
-            </a:r>
-          </a:p>
-        </p:txBody>
-      </p:sp>
-      <p:sp>
-        <p:nvSpPr>
-          <p:cNvPr id="12" name="Rectangle 11"/>
-          <p:cNvSpPr/>
-          <p:nvPr/>
-        </p:nvSpPr>
-        <p:spPr>
-          <a:xfrm>
-            <a:off x="11704320" y="2781300"/>
-            <a:ext cx="5440680" cy="590550"/>
-          </a:xfrm>
-          <a:prstGeom prst="rect">
-            <a:avLst/>
-          </a:prstGeom>
-          <a:solidFill>
-            <a:srgbClr val="1E5BC6"/>
+              <a:t>2</a:t>
+            </a:r>
+          </a:p>
+        </p:txBody>
+      </p:sp>
+      <p:sp>
+        <p:nvSpPr>
+          <p:cNvPr id="16" name="TextBox 15"/>
+          <p:cNvSpPr txBox="1"/>
+          <p:nvPr/>
+        </p:nvSpPr>
+        <p:spPr>
+          <a:xfrm>
+            <a:off x="2324100" y="4410075"/>
+            <a:ext cx="9906000" cy="400050"/>
+          </a:xfrm>
+          <a:prstGeom prst="rect">
+            <a:avLst/>
+          </a:prstGeom>
+          <a:noFill/>
+        </p:spPr>
+        <p:txBody>
+          <a:bodyPr wrap="square" lIns="0" rIns="0" tIns="0" bIns="0" anchor="t">
+            <a:spAutoFit/>
+          </a:bodyPr>
+          <a:lstStyle/>
+          <a:p>
+            <a:pPr algn="l">
+              <a:lnSpc>
+                <a:spcPct val="110000"/>
+              </a:lnSpc>
+            </a:pPr>
+            <a:r>
+              <a:rPr sz="2475" b="1">
+                <a:solidFill>
+                  <a:srgbClr val="0D2B5E"/>
+                </a:solidFill>
+                <a:latin typeface="Pretendard"/>
+                <a:ea typeface="Pretendard"/>
+                <a:cs typeface="Pretendard"/>
+              </a:rPr>
+              <a:t>try_read("s3a://no-such-bucket/x/")</a:t>
+            </a:r>
+          </a:p>
+        </p:txBody>
+      </p:sp>
+      <p:sp>
+        <p:nvSpPr>
+          <p:cNvPr id="17" name="TextBox 16"/>
+          <p:cNvSpPr txBox="1"/>
+          <p:nvPr/>
+        </p:nvSpPr>
+        <p:spPr>
+          <a:xfrm>
+            <a:off x="2324100" y="4810125"/>
+            <a:ext cx="9906000" cy="361950"/>
+          </a:xfrm>
+          <a:prstGeom prst="rect">
+            <a:avLst/>
+          </a:prstGeom>
+          <a:noFill/>
+        </p:spPr>
+        <p:txBody>
+          <a:bodyPr wrap="square" lIns="0" rIns="0" tIns="0" bIns="0" anchor="t">
+            <a:spAutoFit/>
+          </a:bodyPr>
+          <a:lstStyle/>
+          <a:p>
+            <a:pPr algn="l">
+              <a:lnSpc>
+                <a:spcPct val="120000"/>
+              </a:lnSpc>
+            </a:pPr>
+            <a:r>
+              <a:rPr sz="2025" b="0">
+                <a:solidFill>
+                  <a:srgbClr val="3D3D3D"/>
+                </a:solidFill>
+                <a:latin typeface="Pretendard"/>
+                <a:ea typeface="Pretendard"/>
+                <a:cs typeface="Pretendard"/>
+              </a:rPr>
+              <a:t>없는 버킷은 1초 만에 404 — 재시도 없이 바로</a:t>
+            </a:r>
+          </a:p>
+        </p:txBody>
+      </p:sp>
+      <p:sp>
+        <p:nvSpPr>
+          <p:cNvPr id="18" name="Rounded Rectangle 17"/>
+          <p:cNvSpPr/>
+          <p:nvPr/>
+        </p:nvSpPr>
+        <p:spPr>
+          <a:xfrm>
+            <a:off x="1143000" y="5467350"/>
+            <a:ext cx="11430000" cy="1095375"/>
+          </a:xfrm>
+          <a:prstGeom prst="roundRect">
+            <a:avLst>
+              <a:gd name="adj" fmla="val 4347"/>
+            </a:avLst>
+          </a:prstGeom>
+          <a:solidFill>
+            <a:srgbClr val="FAFBFD"/>
+          </a:solidFill>
+          <a:ln w="9525">
+            <a:solidFill>
+              <a:srgbClr val="DCE1E8"/>
+            </a:solidFill>
+          </a:ln>
+          <a:effectLst/>
+        </p:spPr>
+        <p:txBody>
+          <a:bodyPr rtlCol="0" anchor="ctr" wrap="square"/>
+          <a:lstStyle/>
+          <a:p>
+            <a:pPr algn="ctr"/>
+          </a:p>
+        </p:txBody>
+      </p:sp>
+      <p:sp>
+        <p:nvSpPr>
+          <p:cNvPr id="19" name="Oval 18"/>
+          <p:cNvSpPr/>
+          <p:nvPr/>
+        </p:nvSpPr>
+        <p:spPr>
+          <a:xfrm>
+            <a:off x="1447800" y="5715000"/>
+            <a:ext cx="590550" cy="590550"/>
+          </a:xfrm>
+          <a:prstGeom prst="ellipse">
+            <a:avLst/>
+          </a:prstGeom>
+          <a:solidFill>
+            <a:srgbClr val="0D2B5E"/>
           </a:solidFill>
           <a:ln>
             <a:noFill/>
@@ -11847,22 +13867,22 @@
       </p:sp>
       <p:sp>
         <p:nvSpPr>
-          <p:cNvPr id="13" name="TextBox 12"/>
-          <p:cNvSpPr txBox="1"/>
-          <p:nvPr/>
-        </p:nvSpPr>
-        <p:spPr>
-          <a:xfrm>
-            <a:off x="11704320" y="2781300"/>
-            <a:ext cx="5440680" cy="590550"/>
-          </a:xfrm>
-          <a:prstGeom prst="rect">
-            <a:avLst/>
-          </a:prstGeom>
-          <a:noFill/>
-        </p:spPr>
-        <p:txBody>
-          <a:bodyPr wrap="square" lIns="0" rIns="0" tIns="0" bIns="0" anchor="ctr">
+          <p:cNvPr id="20" name="TextBox 19"/>
+          <p:cNvSpPr txBox="1"/>
+          <p:nvPr/>
+        </p:nvSpPr>
+        <p:spPr>
+          <a:xfrm>
+            <a:off x="1447800" y="5867400"/>
+            <a:ext cx="590550" cy="323850"/>
+          </a:xfrm>
+          <a:prstGeom prst="rect">
+            <a:avLst/>
+          </a:prstGeom>
+          <a:noFill/>
+        </p:spPr>
+        <p:txBody>
+          <a:bodyPr wrap="square" lIns="0" rIns="0" tIns="0" bIns="0" anchor="t">
             <a:spAutoFit/>
           </a:bodyPr>
           <a:lstStyle/>
@@ -11873,7 +13893,7 @@
               </a:lnSpc>
             </a:pPr>
             <a:r>
-              <a:rPr sz="2025" b="1">
+              <a:rPr sz="2250" b="1">
                 <a:solidFill>
                   <a:srgbClr val="FFFFFF"/>
                 </a:solidFill>
@@ -11881,25 +13901,107 @@
                 <a:ea typeface="Pretendard"/>
                 <a:cs typeface="Pretendard"/>
               </a:rPr>
-              <a:t>좁히는 법</a:t>
-            </a:r>
-          </a:p>
-        </p:txBody>
-      </p:sp>
-      <p:sp>
-        <p:nvSpPr>
-          <p:cNvPr id="14" name="Rounded Rectangle 13"/>
-          <p:cNvSpPr/>
-          <p:nvPr/>
-        </p:nvSpPr>
-        <p:spPr>
-          <a:xfrm>
-            <a:off x="1143000" y="3448050"/>
-            <a:ext cx="5722620" cy="647700"/>
+              <a:t>3</a:t>
+            </a:r>
+          </a:p>
+        </p:txBody>
+      </p:sp>
+      <p:sp>
+        <p:nvSpPr>
+          <p:cNvPr id="21" name="TextBox 20"/>
+          <p:cNvSpPr txBox="1"/>
+          <p:nvPr/>
+        </p:nvSpPr>
+        <p:spPr>
+          <a:xfrm>
+            <a:off x="2324100" y="5676900"/>
+            <a:ext cx="9906000" cy="400050"/>
+          </a:xfrm>
+          <a:prstGeom prst="rect">
+            <a:avLst/>
+          </a:prstGeom>
+          <a:noFill/>
+        </p:spPr>
+        <p:txBody>
+          <a:bodyPr wrap="square" lIns="0" rIns="0" tIns="0" bIns="0" anchor="t">
+            <a:spAutoFit/>
+          </a:bodyPr>
+          <a:lstStyle/>
+          <a:p>
+            <a:pPr algn="l">
+              <a:lnSpc>
+                <a:spcPct val="110000"/>
+              </a:lnSpc>
+            </a:pPr>
+            <a:r>
+              <a:rPr sz="2475" b="1">
+                <a:solidFill>
+                  <a:srgbClr val="0D2B5E"/>
+                </a:solidFill>
+                <a:latin typeface="Pretendard"/>
+                <a:ea typeface="Pretendard"/>
+                <a:cs typeface="Pretendard"/>
+              </a:rPr>
+              <a:t>attempts.maximum · retry.limit = 1</a:t>
+            </a:r>
+          </a:p>
+        </p:txBody>
+      </p:sp>
+      <p:sp>
+        <p:nvSpPr>
+          <p:cNvPr id="22" name="TextBox 21"/>
+          <p:cNvSpPr txBox="1"/>
+          <p:nvPr/>
+        </p:nvSpPr>
+        <p:spPr>
+          <a:xfrm>
+            <a:off x="2324100" y="6076950"/>
+            <a:ext cx="9906000" cy="361950"/>
+          </a:xfrm>
+          <a:prstGeom prst="rect">
+            <a:avLst/>
+          </a:prstGeom>
+          <a:noFill/>
+        </p:spPr>
+        <p:txBody>
+          <a:bodyPr wrap="square" lIns="0" rIns="0" tIns="0" bIns="0" anchor="t">
+            <a:spAutoFit/>
+          </a:bodyPr>
+          <a:lstStyle/>
+          <a:p>
+            <a:pPr algn="l">
+              <a:lnSpc>
+                <a:spcPct val="120000"/>
+              </a:lnSpc>
+            </a:pPr>
+            <a:r>
+              <a:rPr sz="2025" b="0">
+                <a:solidFill>
+                  <a:srgbClr val="3D3D3D"/>
+                </a:solidFill>
+                <a:latin typeface="Pretendard"/>
+                <a:ea typeface="Pretendard"/>
+                <a:cs typeface="Pretendard"/>
+              </a:rPr>
+              <a:t>+ impl.disable.cache=true — 하나씩 틀렸다 같은 줄에서 되돌림</a:t>
+            </a:r>
+          </a:p>
+        </p:txBody>
+      </p:sp>
+      <p:sp>
+        <p:nvSpPr>
+          <p:cNvPr id="23" name="Rounded Rectangle 22"/>
+          <p:cNvSpPr/>
+          <p:nvPr/>
+        </p:nvSpPr>
+        <p:spPr>
+          <a:xfrm>
+            <a:off x="13144500" y="2933700"/>
+            <a:ext cx="4000500" cy="3629025"/>
           </a:xfrm>
           <a:prstGeom prst="roundRect">
             <a:avLst>
-              <a:gd name="adj" fmla="val 5882"/>
+              <a:gd name="adj" fmla="val 1312"/>
             </a:avLst>
           </a:prstGeom>
           <a:solidFill>
@@ -11922,33 +14024,74 @@
       </p:sp>
       <p:sp>
         <p:nvSpPr>
-          <p:cNvPr id="15" name="TextBox 14"/>
-          <p:cNvSpPr txBox="1"/>
-          <p:nvPr/>
-        </p:nvSpPr>
-        <p:spPr>
-          <a:xfrm>
-            <a:off x="1238250" y="3448050"/>
-            <a:ext cx="5532120" cy="647700"/>
-          </a:xfrm>
-          <a:prstGeom prst="rect">
-            <a:avLst/>
-          </a:prstGeom>
-          <a:noFill/>
-        </p:spPr>
-        <p:txBody>
-          <a:bodyPr wrap="square" lIns="0" rIns="0" tIns="0" bIns="0" anchor="ctr">
+          <p:cNvPr id="24" name="TextBox 23"/>
+          <p:cNvSpPr txBox="1"/>
+          <p:nvPr/>
+        </p:nvSpPr>
+        <p:spPr>
+          <a:xfrm>
+            <a:off x="13487400" y="3929062"/>
+            <a:ext cx="3314700" cy="304800"/>
+          </a:xfrm>
+          <a:prstGeom prst="rect">
+            <a:avLst/>
+          </a:prstGeom>
+          <a:noFill/>
+        </p:spPr>
+        <p:txBody>
+          <a:bodyPr wrap="square" lIns="0" rIns="0" tIns="0" bIns="0" anchor="t">
             <a:spAutoFit/>
           </a:bodyPr>
           <a:lstStyle/>
           <a:p>
             <a:pPr algn="l">
               <a:lnSpc>
-                <a:spcPct val="115000"/>
-              </a:lnSpc>
-            </a:pPr>
-            <a:r>
-              <a:rPr sz="1875" b="1">
+                <a:spcPct val="100000"/>
+              </a:lnSpc>
+            </a:pPr>
+            <a:r>
+              <a:rPr sz="1800" b="1" spc="190">
+                <a:solidFill>
+                  <a:srgbClr val="1E5BC6"/>
+                </a:solidFill>
+                <a:latin typeface="Pretendard"/>
+                <a:ea typeface="Pretendard"/>
+                <a:cs typeface="Pretendard"/>
+              </a:rPr>
+              <a:t>그냥 두면 주소는</a:t>
+            </a:r>
+          </a:p>
+        </p:txBody>
+      </p:sp>
+      <p:sp>
+        <p:nvSpPr>
+          <p:cNvPr id="25" name="TextBox 24"/>
+          <p:cNvSpPr txBox="1"/>
+          <p:nvPr/>
+        </p:nvSpPr>
+        <p:spPr>
+          <a:xfrm>
+            <a:off x="13487400" y="4329112"/>
+            <a:ext cx="3314700" cy="1238250"/>
+          </a:xfrm>
+          <a:prstGeom prst="rect">
+            <a:avLst/>
+          </a:prstGeom>
+          <a:noFill/>
+        </p:spPr>
+        <p:txBody>
+          <a:bodyPr wrap="square" lIns="0" rIns="0" tIns="0" bIns="0" anchor="t">
+            <a:spAutoFit/>
+          </a:bodyPr>
+          <a:lstStyle/>
+          <a:p>
+            <a:pPr algn="l">
+              <a:lnSpc>
+                <a:spcPct val="138000"/>
+              </a:lnSpc>
+            </a:pPr>
+            <a:r>
+              <a:rPr sz="2700" b="1">
                 <a:solidFill>
                   <a:srgbClr val="0D2B5E"/>
                 </a:solidFill>
@@ -11956,224 +14099,17 @@
                 <a:ea typeface="Pretendard"/>
                 <a:cs typeface="Pretendard"/>
               </a:rPr>
-              <a:t>s3a://no-such-bucket/x/</a:t>
-            </a:r>
-          </a:p>
-        </p:txBody>
-      </p:sp>
-      <p:sp>
-        <p:nvSpPr>
-          <p:cNvPr id="16" name="Rounded Rectangle 15"/>
-          <p:cNvSpPr/>
-          <p:nvPr/>
-        </p:nvSpPr>
-        <p:spPr>
-          <a:xfrm>
-            <a:off x="6903720" y="3448050"/>
-            <a:ext cx="4762500" cy="647700"/>
-          </a:xfrm>
-          <a:prstGeom prst="roundRect">
-            <a:avLst>
-              <a:gd name="adj" fmla="val 5882"/>
-            </a:avLst>
-          </a:prstGeom>
-          <a:solidFill>
-            <a:srgbClr val="FAFBFD"/>
-          </a:solidFill>
-          <a:ln w="9525">
-            <a:solidFill>
-              <a:srgbClr val="DCE1E8"/>
-            </a:solidFill>
-          </a:ln>
-          <a:effectLst/>
-        </p:spPr>
-        <p:txBody>
-          <a:bodyPr rtlCol="0" anchor="ctr" wrap="square"/>
-          <a:lstStyle/>
-          <a:p>
-            <a:pPr algn="ctr"/>
-          </a:p>
-        </p:txBody>
-      </p:sp>
-      <p:sp>
-        <p:nvSpPr>
-          <p:cNvPr id="17" name="TextBox 16"/>
-          <p:cNvSpPr txBox="1"/>
-          <p:nvPr/>
-        </p:nvSpPr>
-        <p:spPr>
-          <a:xfrm>
-            <a:off x="6998970" y="3448050"/>
-            <a:ext cx="4572000" cy="647700"/>
-          </a:xfrm>
-          <a:prstGeom prst="rect">
-            <a:avLst/>
-          </a:prstGeom>
-          <a:noFill/>
-        </p:spPr>
-        <p:txBody>
-          <a:bodyPr wrap="square" lIns="0" rIns="0" tIns="0" bIns="0" anchor="ctr">
-            <a:spAutoFit/>
-          </a:bodyPr>
-          <a:lstStyle/>
-          <a:p>
-            <a:pPr algn="ctr">
-              <a:lnSpc>
-                <a:spcPct val="115000"/>
-              </a:lnSpc>
-            </a:pPr>
-            <a:r>
-              <a:rPr sz="1875" b="0">
-                <a:solidFill>
-                  <a:srgbClr val="3D3D3D"/>
-                </a:solidFill>
-                <a:latin typeface="Pretendard"/>
-                <a:ea typeface="Pretendard"/>
-                <a:cs typeface="Pretendard"/>
-              </a:rPr>
-              <a:t>버킷이 없다는 취지</a:t>
-            </a:r>
-          </a:p>
-        </p:txBody>
-      </p:sp>
-      <p:sp>
-        <p:nvSpPr>
-          <p:cNvPr id="18" name="Rounded Rectangle 17"/>
-          <p:cNvSpPr/>
-          <p:nvPr/>
-        </p:nvSpPr>
-        <p:spPr>
-          <a:xfrm>
-            <a:off x="11704320" y="3448050"/>
-            <a:ext cx="5440680" cy="647700"/>
-          </a:xfrm>
-          <a:prstGeom prst="roundRect">
-            <a:avLst>
-              <a:gd name="adj" fmla="val 5882"/>
-            </a:avLst>
-          </a:prstGeom>
-          <a:solidFill>
-            <a:srgbClr val="FAFBFD"/>
-          </a:solidFill>
-          <a:ln w="9525">
-            <a:solidFill>
-              <a:srgbClr val="DCE1E8"/>
-            </a:solidFill>
-          </a:ln>
-          <a:effectLst/>
-        </p:spPr>
-        <p:txBody>
-          <a:bodyPr rtlCol="0" anchor="ctr" wrap="square"/>
-          <a:lstStyle/>
-          <a:p>
-            <a:pPr algn="ctr"/>
-          </a:p>
-        </p:txBody>
-      </p:sp>
-      <p:sp>
-        <p:nvSpPr>
-          <p:cNvPr id="19" name="TextBox 18"/>
-          <p:cNvSpPr txBox="1"/>
-          <p:nvPr/>
-        </p:nvSpPr>
-        <p:spPr>
-          <a:xfrm>
-            <a:off x="11799570" y="3448050"/>
-            <a:ext cx="5250180" cy="647700"/>
-          </a:xfrm>
-          <a:prstGeom prst="rect">
-            <a:avLst/>
-          </a:prstGeom>
-          <a:noFill/>
-        </p:spPr>
-        <p:txBody>
-          <a:bodyPr wrap="square" lIns="0" rIns="0" tIns="0" bIns="0" anchor="ctr">
-            <a:spAutoFit/>
-          </a:bodyPr>
-          <a:lstStyle/>
-          <a:p>
-            <a:pPr algn="ctr">
-              <a:lnSpc>
-                <a:spcPct val="115000"/>
-              </a:lnSpc>
-            </a:pPr>
-            <a:r>
-              <a:rPr sz="1875" b="0">
-                <a:solidFill>
-                  <a:srgbClr val="3D3D3D"/>
-                </a:solidFill>
-                <a:latin typeface="Pretendard"/>
-                <a:ea typeface="Pretendard"/>
-                <a:cs typeface="Pretendard"/>
-              </a:rPr>
-              <a:t>버킷 이름 · mc ls</a:t>
-            </a:r>
-          </a:p>
-        </p:txBody>
-      </p:sp>
-      <p:sp>
-        <p:nvSpPr>
-          <p:cNvPr id="20" name="Rounded Rectangle 19"/>
-          <p:cNvSpPr/>
-          <p:nvPr/>
-        </p:nvSpPr>
-        <p:spPr>
-          <a:xfrm>
-            <a:off x="1143000" y="4171950"/>
-            <a:ext cx="5722620" cy="647700"/>
-          </a:xfrm>
-          <a:prstGeom prst="roundRect">
-            <a:avLst>
-              <a:gd name="adj" fmla="val 5882"/>
-            </a:avLst>
-          </a:prstGeom>
-          <a:solidFill>
-            <a:srgbClr val="EDF3FD"/>
-          </a:solidFill>
-          <a:ln w="9525">
-            <a:solidFill>
-              <a:srgbClr val="BFD3F5"/>
-            </a:solidFill>
-          </a:ln>
-          <a:effectLst/>
-        </p:spPr>
-        <p:txBody>
-          <a:bodyPr rtlCol="0" anchor="ctr" wrap="square"/>
-          <a:lstStyle/>
-          <a:p>
-            <a:pPr algn="ctr"/>
-          </a:p>
-        </p:txBody>
-      </p:sp>
-      <p:sp>
-        <p:nvSpPr>
-          <p:cNvPr id="21" name="TextBox 20"/>
-          <p:cNvSpPr txBox="1"/>
-          <p:nvPr/>
-        </p:nvSpPr>
-        <p:spPr>
-          <a:xfrm>
-            <a:off x="1238250" y="4171950"/>
-            <a:ext cx="5532120" cy="647700"/>
-          </a:xfrm>
-          <a:prstGeom prst="rect">
-            <a:avLst/>
-          </a:prstGeom>
-          <a:noFill/>
-        </p:spPr>
-        <p:txBody>
-          <a:bodyPr wrap="square" lIns="0" rIns="0" tIns="0" bIns="0" anchor="ctr">
-            <a:spAutoFit/>
-          </a:bodyPr>
-          <a:lstStyle/>
+              <a:t>약 15분</a:t>
+            </a:r>
+          </a:p>
           <a:p>
             <a:pPr algn="l">
               <a:lnSpc>
-                <a:spcPct val="115000"/>
-              </a:lnSpc>
-            </a:pPr>
-            <a:r>
-              <a:rPr sz="1875" b="1">
+                <a:spcPct val="138000"/>
+              </a:lnSpc>
+            </a:pPr>
+            <a:r>
+              <a:rPr sz="2700" b="1">
                 <a:solidFill>
                   <a:srgbClr val="0D2B5E"/>
                 </a:solidFill>
@@ -12181,184 +14117,30 @@
                 <a:ea typeface="Pretendard"/>
                 <a:cs typeface="Pretendard"/>
               </a:rPr>
-              <a:t>자격증명(키)</a:t>
-            </a:r>
-          </a:p>
-        </p:txBody>
-      </p:sp>
-      <p:sp>
-        <p:nvSpPr>
-          <p:cNvPr id="22" name="Rounded Rectangle 21"/>
-          <p:cNvSpPr/>
-          <p:nvPr/>
-        </p:nvSpPr>
-        <p:spPr>
-          <a:xfrm>
-            <a:off x="6903720" y="4171950"/>
-            <a:ext cx="4762500" cy="647700"/>
-          </a:xfrm>
-          <a:prstGeom prst="roundRect">
-            <a:avLst>
-              <a:gd name="adj" fmla="val 5882"/>
-            </a:avLst>
-          </a:prstGeom>
-          <a:solidFill>
-            <a:srgbClr val="FAFBFD"/>
-          </a:solidFill>
-          <a:ln w="9525">
-            <a:solidFill>
-              <a:srgbClr val="DCE1E8"/>
-            </a:solidFill>
-          </a:ln>
-          <a:effectLst/>
-        </p:spPr>
-        <p:txBody>
-          <a:bodyPr rtlCol="0" anchor="ctr" wrap="square"/>
-          <a:lstStyle/>
-          <a:p>
-            <a:pPr algn="ctr"/>
-          </a:p>
-        </p:txBody>
-      </p:sp>
-      <p:sp>
-        <p:nvSpPr>
-          <p:cNvPr id="23" name="TextBox 22"/>
-          <p:cNvSpPr txBox="1"/>
-          <p:nvPr/>
-        </p:nvSpPr>
-        <p:spPr>
-          <a:xfrm>
-            <a:off x="6998970" y="4171950"/>
-            <a:ext cx="4572000" cy="647700"/>
-          </a:xfrm>
-          <a:prstGeom prst="rect">
-            <a:avLst/>
-          </a:prstGeom>
-          <a:noFill/>
-        </p:spPr>
-        <p:txBody>
-          <a:bodyPr wrap="square" lIns="0" rIns="0" tIns="0" bIns="0" anchor="ctr">
-            <a:spAutoFit/>
-          </a:bodyPr>
-          <a:lstStyle/>
-          <a:p>
-            <a:pPr algn="ctr">
-              <a:lnSpc>
-                <a:spcPct val="115000"/>
-              </a:lnSpc>
-            </a:pPr>
-            <a:r>
-              <a:rPr sz="1875" b="0">
-                <a:solidFill>
-                  <a:srgbClr val="3D3D3D"/>
-                </a:solidFill>
-                <a:latin typeface="Pretendard"/>
-                <a:ea typeface="Pretendard"/>
-                <a:cs typeface="Pretendard"/>
-              </a:rPr>
-              <a:t>403</a:t>
-            </a:r>
-          </a:p>
-        </p:txBody>
-      </p:sp>
-      <p:sp>
-        <p:nvSpPr>
-          <p:cNvPr id="24" name="Rounded Rectangle 23"/>
-          <p:cNvSpPr/>
-          <p:nvPr/>
-        </p:nvSpPr>
-        <p:spPr>
-          <a:xfrm>
-            <a:off x="11704320" y="4171950"/>
-            <a:ext cx="5440680" cy="647700"/>
-          </a:xfrm>
-          <a:prstGeom prst="roundRect">
-            <a:avLst>
-              <a:gd name="adj" fmla="val 5882"/>
-            </a:avLst>
-          </a:prstGeom>
-          <a:solidFill>
-            <a:srgbClr val="FAFBFD"/>
-          </a:solidFill>
-          <a:ln w="9525">
-            <a:solidFill>
-              <a:srgbClr val="DCE1E8"/>
-            </a:solidFill>
-          </a:ln>
-          <a:effectLst/>
-        </p:spPr>
-        <p:txBody>
-          <a:bodyPr rtlCol="0" anchor="ctr" wrap="square"/>
-          <a:lstStyle/>
-          <a:p>
-            <a:pPr algn="ctr"/>
-          </a:p>
-        </p:txBody>
-      </p:sp>
-      <p:sp>
-        <p:nvSpPr>
-          <p:cNvPr id="25" name="TextBox 24"/>
-          <p:cNvSpPr txBox="1"/>
-          <p:nvPr/>
-        </p:nvSpPr>
-        <p:spPr>
-          <a:xfrm>
-            <a:off x="11799570" y="4171950"/>
-            <a:ext cx="5250180" cy="647700"/>
-          </a:xfrm>
-          <a:prstGeom prst="rect">
-            <a:avLst/>
-          </a:prstGeom>
-          <a:noFill/>
-        </p:spPr>
-        <p:txBody>
-          <a:bodyPr wrap="square" lIns="0" rIns="0" tIns="0" bIns="0" anchor="ctr">
-            <a:spAutoFit/>
-          </a:bodyPr>
-          <a:lstStyle/>
-          <a:p>
-            <a:pPr algn="ctr">
-              <a:lnSpc>
-                <a:spcPct val="115000"/>
-              </a:lnSpc>
-            </a:pPr>
-            <a:r>
-              <a:rPr sz="1875" b="0">
-                <a:solidFill>
-                  <a:srgbClr val="3D3D3D"/>
-                </a:solidFill>
-                <a:latin typeface="Pretendard"/>
-                <a:ea typeface="Pretendard"/>
-                <a:cs typeface="Pretendard"/>
-              </a:rPr>
-              <a:t>MinIO 계정과 키 값 대조</a:t>
-            </a:r>
-          </a:p>
-        </p:txBody>
-      </p:sp>
-      <p:sp>
-        <p:nvSpPr>
-          <p:cNvPr id="26" name="Rounded Rectangle 25"/>
-          <p:cNvSpPr/>
-          <p:nvPr/>
-        </p:nvSpPr>
-        <p:spPr>
-          <a:xfrm>
-            <a:off x="1143000" y="4895850"/>
-            <a:ext cx="5722620" cy="647700"/>
-          </a:xfrm>
-          <a:prstGeom prst="roundRect">
-            <a:avLst>
-              <a:gd name="adj" fmla="val 5882"/>
-            </a:avLst>
-          </a:prstGeom>
-          <a:solidFill>
-            <a:srgbClr val="EDF3FD"/>
-          </a:solidFill>
-          <a:ln w="9525">
-            <a:solidFill>
-              <a:srgbClr val="BFD3F5"/>
-            </a:solidFill>
+              <a:t>열쇠 약 2.5분</a:t>
+            </a:r>
+          </a:p>
+        </p:txBody>
+      </p:sp>
+      <p:sp>
+        <p:nvSpPr>
+          <p:cNvPr id="26" name="Rectangle 25"/>
+          <p:cNvSpPr/>
+          <p:nvPr/>
+        </p:nvSpPr>
+        <p:spPr>
+          <a:xfrm>
+            <a:off x="1143000" y="7581900"/>
+            <a:ext cx="38100" cy="323850"/>
+          </a:xfrm>
+          <a:prstGeom prst="rect">
+            <a:avLst/>
+          </a:prstGeom>
+          <a:solidFill>
+            <a:srgbClr val="BFD3F5"/>
+          </a:solidFill>
+          <a:ln>
+            <a:noFill/>
           </a:ln>
           <a:effectLst/>
         </p:spPr>
@@ -12378,218 +14160,27 @@
         </p:nvSpPr>
         <p:spPr>
           <a:xfrm>
-            <a:off x="1238250" y="4895850"/>
-            <a:ext cx="5532120" cy="647700"/>
-          </a:xfrm>
-          <a:prstGeom prst="rect">
-            <a:avLst/>
-          </a:prstGeom>
-          <a:noFill/>
-        </p:spPr>
-        <p:txBody>
-          <a:bodyPr wrap="square" lIns="0" rIns="0" tIns="0" bIns="0" anchor="ctr">
+            <a:off x="1314450" y="7581900"/>
+            <a:ext cx="15830550" cy="342900"/>
+          </a:xfrm>
+          <a:prstGeom prst="rect">
+            <a:avLst/>
+          </a:prstGeom>
+          <a:noFill/>
+        </p:spPr>
+        <p:txBody>
+          <a:bodyPr wrap="square" lIns="0" rIns="0" tIns="0" bIns="0" anchor="t">
             <a:spAutoFit/>
           </a:bodyPr>
           <a:lstStyle/>
           <a:p>
             <a:pPr algn="l">
               <a:lnSpc>
-                <a:spcPct val="115000"/>
-              </a:lnSpc>
-            </a:pPr>
-            <a:r>
-              <a:rPr sz="1875" b="1">
-                <a:solidFill>
-                  <a:srgbClr val="0D2B5E"/>
-                </a:solidFill>
-                <a:latin typeface="Pretendard"/>
-                <a:ea typeface="Pretendard"/>
-                <a:cs typeface="Pretendard"/>
-              </a:rPr>
-              <a:t>주소(endpoint)</a:t>
-            </a:r>
-          </a:p>
-        </p:txBody>
-      </p:sp>
-      <p:sp>
-        <p:nvSpPr>
-          <p:cNvPr id="28" name="Rounded Rectangle 27"/>
-          <p:cNvSpPr/>
-          <p:nvPr/>
-        </p:nvSpPr>
-        <p:spPr>
-          <a:xfrm>
-            <a:off x="6903720" y="4895850"/>
-            <a:ext cx="4762500" cy="647700"/>
-          </a:xfrm>
-          <a:prstGeom prst="roundRect">
-            <a:avLst>
-              <a:gd name="adj" fmla="val 5882"/>
-            </a:avLst>
-          </a:prstGeom>
-          <a:solidFill>
-            <a:srgbClr val="FAFBFD"/>
-          </a:solidFill>
-          <a:ln w="9525">
-            <a:solidFill>
-              <a:srgbClr val="DCE1E8"/>
-            </a:solidFill>
-          </a:ln>
-          <a:effectLst/>
-        </p:spPr>
-        <p:txBody>
-          <a:bodyPr rtlCol="0" anchor="ctr" wrap="square"/>
-          <a:lstStyle/>
-          <a:p>
-            <a:pPr algn="ctr"/>
-          </a:p>
-        </p:txBody>
-      </p:sp>
-      <p:sp>
-        <p:nvSpPr>
-          <p:cNvPr id="29" name="TextBox 28"/>
-          <p:cNvSpPr txBox="1"/>
-          <p:nvPr/>
-        </p:nvSpPr>
-        <p:spPr>
-          <a:xfrm>
-            <a:off x="6998970" y="4895850"/>
-            <a:ext cx="4572000" cy="647700"/>
-          </a:xfrm>
-          <a:prstGeom prst="rect">
-            <a:avLst/>
-          </a:prstGeom>
-          <a:noFill/>
-        </p:spPr>
-        <p:txBody>
-          <a:bodyPr wrap="square" lIns="0" rIns="0" tIns="0" bIns="0" anchor="ctr">
-            <a:spAutoFit/>
-          </a:bodyPr>
-          <a:lstStyle/>
-          <a:p>
-            <a:pPr algn="ctr">
-              <a:lnSpc>
-                <a:spcPct val="115000"/>
-              </a:lnSpc>
-            </a:pPr>
-            <a:r>
-              <a:rPr sz="1875" b="0">
-                <a:solidFill>
-                  <a:srgbClr val="3D3D3D"/>
-                </a:solidFill>
-                <a:latin typeface="Pretendard"/>
-                <a:ea typeface="Pretendard"/>
-                <a:cs typeface="Pretendard"/>
-              </a:rPr>
-              <a:t>UnknownHost</a:t>
-            </a:r>
-          </a:p>
-        </p:txBody>
-      </p:sp>
-      <p:sp>
-        <p:nvSpPr>
-          <p:cNvPr id="30" name="Rounded Rectangle 29"/>
-          <p:cNvSpPr/>
-          <p:nvPr/>
-        </p:nvSpPr>
-        <p:spPr>
-          <a:xfrm>
-            <a:off x="11704320" y="4895850"/>
-            <a:ext cx="5440680" cy="647700"/>
-          </a:xfrm>
-          <a:prstGeom prst="roundRect">
-            <a:avLst>
-              <a:gd name="adj" fmla="val 5882"/>
-            </a:avLst>
-          </a:prstGeom>
-          <a:solidFill>
-            <a:srgbClr val="FAFBFD"/>
-          </a:solidFill>
-          <a:ln w="9525">
-            <a:solidFill>
-              <a:srgbClr val="DCE1E8"/>
-            </a:solidFill>
-          </a:ln>
-          <a:effectLst/>
-        </p:spPr>
-        <p:txBody>
-          <a:bodyPr rtlCol="0" anchor="ctr" wrap="square"/>
-          <a:lstStyle/>
-          <a:p>
-            <a:pPr algn="ctr"/>
-          </a:p>
-        </p:txBody>
-      </p:sp>
-      <p:sp>
-        <p:nvSpPr>
-          <p:cNvPr id="31" name="TextBox 30"/>
-          <p:cNvSpPr txBox="1"/>
-          <p:nvPr/>
-        </p:nvSpPr>
-        <p:spPr>
-          <a:xfrm>
-            <a:off x="11799570" y="4895850"/>
-            <a:ext cx="5250180" cy="647700"/>
-          </a:xfrm>
-          <a:prstGeom prst="rect">
-            <a:avLst/>
-          </a:prstGeom>
-          <a:noFill/>
-        </p:spPr>
-        <p:txBody>
-          <a:bodyPr wrap="square" lIns="0" rIns="0" tIns="0" bIns="0" anchor="ctr">
-            <a:spAutoFit/>
-          </a:bodyPr>
-          <a:lstStyle/>
-          <a:p>
-            <a:pPr algn="ctr">
-              <a:lnSpc>
-                <a:spcPct val="115000"/>
-              </a:lnSpc>
-            </a:pPr>
-            <a:r>
-              <a:rPr sz="1875" b="0">
-                <a:solidFill>
-                  <a:srgbClr val="3D3D3D"/>
-                </a:solidFill>
-                <a:latin typeface="Pretendard"/>
-                <a:ea typeface="Pretendard"/>
-                <a:cs typeface="Pretendard"/>
-              </a:rPr>
-              <a:t>서비스 이름 minio 인지</a:t>
-            </a:r>
-          </a:p>
-        </p:txBody>
-      </p:sp>
-      <p:sp>
-        <p:nvSpPr>
-          <p:cNvPr id="32" name="TextBox 31"/>
-          <p:cNvSpPr txBox="1"/>
-          <p:nvPr/>
-        </p:nvSpPr>
-        <p:spPr>
-          <a:xfrm>
-            <a:off x="1143000" y="7620000"/>
-            <a:ext cx="16002000" cy="342900"/>
-          </a:xfrm>
-          <a:prstGeom prst="rect">
-            <a:avLst/>
-          </a:prstGeom>
-          <a:noFill/>
-        </p:spPr>
-        <p:txBody>
-          <a:bodyPr wrap="square" lIns="0" rIns="0" tIns="0" bIns="0" anchor="t">
-            <a:spAutoFit/>
-          </a:bodyPr>
-          <a:lstStyle/>
-          <a:p>
-            <a:pPr algn="l">
-              <a:lnSpc>
                 <a:spcPct val="100000"/>
               </a:lnSpc>
             </a:pPr>
             <a:r>
-              <a:rPr sz="1875" b="1">
+              <a:rPr sz="1725" b="1">
                 <a:solidFill>
                   <a:srgbClr val="7D7D7D"/>
                 </a:solidFill>
@@ -12597,14 +14188,14 @@
                 <a:ea typeface="Pretendard"/>
                 <a:cs typeface="Pretendard"/>
               </a:rPr>
-              <a:t>try/except 로 type(e).__name__ 과 str(e)[:300] 을 찍어 두면 실무에서 원인을 바로 좁힌다</a:t>
-            </a:r>
-          </a:p>
-        </p:txBody>
-      </p:sp>
-      <p:sp>
-        <p:nvSpPr>
-          <p:cNvPr id="33" name="Rectangle 32"/>
+              <a:t>끝나면 성공: 100 → 세 설정 unset → setLogLevel("WARN") 로 원래대로</a:t>
+            </a:r>
+          </a:p>
+        </p:txBody>
+      </p:sp>
+      <p:sp>
+        <p:nvSpPr>
+          <p:cNvPr id="28" name="Rectangle 27"/>
           <p:cNvSpPr/>
           <p:nvPr/>
         </p:nvSpPr>
@@ -12634,7 +14225,7 @@
       </p:sp>
       <p:sp>
         <p:nvSpPr>
-          <p:cNvPr id="34" name="TextBox 33"/>
+          <p:cNvPr id="29" name="TextBox 28"/>
           <p:cNvSpPr txBox="1"/>
           <p:nvPr/>
         </p:nvSpPr>
@@ -12675,7 +14266,7 @@
       </p:sp>
       <p:sp>
         <p:nvSpPr>
-          <p:cNvPr id="35" name="TextBox 34"/>
+          <p:cNvPr id="30" name="TextBox 29"/>
           <p:cNvSpPr txBox="1"/>
           <p:nvPr/>
         </p:nvSpPr>
@@ -12858,7 +14449,7 @@
                 <a:ea typeface="Pretendard"/>
                 <a:cs typeface="Pretendard"/>
               </a:rPr>
-              <a:t>확인 포인트</a:t>
+              <a:t>5단계 — 일부러 실패시키기</a:t>
             </a:r>
           </a:p>
         </p:txBody>
@@ -12899,7 +14490,7 @@
                 <a:ea typeface="Pretendard"/>
                 <a:cs typeface="Pretendard"/>
               </a:rPr>
-              <a:t>이 1.5시간이 끝날 때 확인할 것</a:t>
+              <a:t>틀린 것마다 찍히는 문구가 다르다 (실측)</a:t>
             </a:r>
           </a:p>
         </p:txBody>
@@ -12936,18 +14527,377 @@
       </p:sp>
       <p:sp>
         <p:nvSpPr>
-          <p:cNvPr id="8" name="Rounded Rectangle 7"/>
-          <p:cNvSpPr/>
-          <p:nvPr/>
-        </p:nvSpPr>
-        <p:spPr>
-          <a:xfrm>
-            <a:off x="1143000" y="2990850"/>
-            <a:ext cx="16002000" cy="819150"/>
+          <p:cNvPr id="8" name="Rectangle 7"/>
+          <p:cNvSpPr/>
+          <p:nvPr/>
+        </p:nvSpPr>
+        <p:spPr>
+          <a:xfrm>
+            <a:off x="1143000" y="2781300"/>
+            <a:ext cx="3162300" cy="590550"/>
+          </a:xfrm>
+          <a:prstGeom prst="rect">
+            <a:avLst/>
+          </a:prstGeom>
+          <a:solidFill>
+            <a:srgbClr val="0D2B5E"/>
+          </a:solidFill>
+          <a:ln>
+            <a:noFill/>
+          </a:ln>
+          <a:effectLst/>
+        </p:spPr>
+        <p:txBody>
+          <a:bodyPr rtlCol="0" anchor="ctr" wrap="square"/>
+          <a:lstStyle/>
+          <a:p>
+            <a:pPr algn="ctr"/>
+          </a:p>
+        </p:txBody>
+      </p:sp>
+      <p:sp>
+        <p:nvSpPr>
+          <p:cNvPr id="9" name="TextBox 8"/>
+          <p:cNvSpPr txBox="1"/>
+          <p:nvPr/>
+        </p:nvSpPr>
+        <p:spPr>
+          <a:xfrm>
+            <a:off x="1143000" y="2781300"/>
+            <a:ext cx="3162300" cy="590550"/>
+          </a:xfrm>
+          <a:prstGeom prst="rect">
+            <a:avLst/>
+          </a:prstGeom>
+          <a:noFill/>
+        </p:spPr>
+        <p:txBody>
+          <a:bodyPr wrap="square" lIns="0" rIns="0" tIns="0" bIns="0" anchor="ctr">
+            <a:spAutoFit/>
+          </a:bodyPr>
+          <a:lstStyle/>
+          <a:p>
+            <a:pPr algn="ctr">
+              <a:lnSpc>
+                <a:spcPct val="100000"/>
+              </a:lnSpc>
+            </a:pPr>
+            <a:r>
+              <a:rPr sz="2025" b="1">
+                <a:solidFill>
+                  <a:srgbClr val="FFFFFF"/>
+                </a:solidFill>
+                <a:latin typeface="Pretendard"/>
+                <a:ea typeface="Pretendard"/>
+                <a:cs typeface="Pretendard"/>
+              </a:rPr>
+              <a:t>틀린 것</a:t>
+            </a:r>
+          </a:p>
+        </p:txBody>
+      </p:sp>
+      <p:sp>
+        <p:nvSpPr>
+          <p:cNvPr id="10" name="Rectangle 9"/>
+          <p:cNvSpPr/>
+          <p:nvPr/>
+        </p:nvSpPr>
+        <p:spPr>
+          <a:xfrm>
+            <a:off x="4343400" y="2781300"/>
+            <a:ext cx="6682740" cy="590550"/>
+          </a:xfrm>
+          <a:prstGeom prst="rect">
+            <a:avLst/>
+          </a:prstGeom>
+          <a:solidFill>
+            <a:srgbClr val="1E5BC6"/>
+          </a:solidFill>
+          <a:ln>
+            <a:noFill/>
+          </a:ln>
+          <a:effectLst/>
+        </p:spPr>
+        <p:txBody>
+          <a:bodyPr rtlCol="0" anchor="ctr" wrap="square"/>
+          <a:lstStyle/>
+          <a:p>
+            <a:pPr algn="ctr"/>
+          </a:p>
+        </p:txBody>
+      </p:sp>
+      <p:sp>
+        <p:nvSpPr>
+          <p:cNvPr id="11" name="TextBox 10"/>
+          <p:cNvSpPr txBox="1"/>
+          <p:nvPr/>
+        </p:nvSpPr>
+        <p:spPr>
+          <a:xfrm>
+            <a:off x="4343400" y="2781300"/>
+            <a:ext cx="6682740" cy="590550"/>
+          </a:xfrm>
+          <a:prstGeom prst="rect">
+            <a:avLst/>
+          </a:prstGeom>
+          <a:noFill/>
+        </p:spPr>
+        <p:txBody>
+          <a:bodyPr wrap="square" lIns="0" rIns="0" tIns="0" bIns="0" anchor="ctr">
+            <a:spAutoFit/>
+          </a:bodyPr>
+          <a:lstStyle/>
+          <a:p>
+            <a:pPr algn="ctr">
+              <a:lnSpc>
+                <a:spcPct val="100000"/>
+              </a:lnSpc>
+            </a:pPr>
+            <a:r>
+              <a:rPr sz="2025" b="1">
+                <a:solidFill>
+                  <a:srgbClr val="FFFFFF"/>
+                </a:solidFill>
+                <a:latin typeface="Pretendard"/>
+                <a:ea typeface="Pretendard"/>
+                <a:cs typeface="Pretendard"/>
+              </a:rPr>
+              <a:t>찍히는 문구</a:t>
+            </a:r>
+          </a:p>
+        </p:txBody>
+      </p:sp>
+      <p:sp>
+        <p:nvSpPr>
+          <p:cNvPr id="12" name="Rectangle 11"/>
+          <p:cNvSpPr/>
+          <p:nvPr/>
+        </p:nvSpPr>
+        <p:spPr>
+          <a:xfrm>
+            <a:off x="11064240" y="2781300"/>
+            <a:ext cx="1562100" cy="590550"/>
+          </a:xfrm>
+          <a:prstGeom prst="rect">
+            <a:avLst/>
+          </a:prstGeom>
+          <a:solidFill>
+            <a:srgbClr val="1E5BC6"/>
+          </a:solidFill>
+          <a:ln>
+            <a:noFill/>
+          </a:ln>
+          <a:effectLst/>
+        </p:spPr>
+        <p:txBody>
+          <a:bodyPr rtlCol="0" anchor="ctr" wrap="square"/>
+          <a:lstStyle/>
+          <a:p>
+            <a:pPr algn="ctr"/>
+          </a:p>
+        </p:txBody>
+      </p:sp>
+      <p:sp>
+        <p:nvSpPr>
+          <p:cNvPr id="13" name="TextBox 12"/>
+          <p:cNvSpPr txBox="1"/>
+          <p:nvPr/>
+        </p:nvSpPr>
+        <p:spPr>
+          <a:xfrm>
+            <a:off x="11064240" y="2781300"/>
+            <a:ext cx="1562100" cy="590550"/>
+          </a:xfrm>
+          <a:prstGeom prst="rect">
+            <a:avLst/>
+          </a:prstGeom>
+          <a:noFill/>
+        </p:spPr>
+        <p:txBody>
+          <a:bodyPr wrap="square" lIns="0" rIns="0" tIns="0" bIns="0" anchor="ctr">
+            <a:spAutoFit/>
+          </a:bodyPr>
+          <a:lstStyle/>
+          <a:p>
+            <a:pPr algn="ctr">
+              <a:lnSpc>
+                <a:spcPct val="100000"/>
+              </a:lnSpc>
+            </a:pPr>
+            <a:r>
+              <a:rPr sz="2025" b="1">
+                <a:solidFill>
+                  <a:srgbClr val="FFFFFF"/>
+                </a:solidFill>
+                <a:latin typeface="Pretendard"/>
+                <a:ea typeface="Pretendard"/>
+                <a:cs typeface="Pretendard"/>
+              </a:rPr>
+              <a:t>시간</a:t>
+            </a:r>
+          </a:p>
+        </p:txBody>
+      </p:sp>
+      <p:sp>
+        <p:nvSpPr>
+          <p:cNvPr id="14" name="Rectangle 13"/>
+          <p:cNvSpPr/>
+          <p:nvPr/>
+        </p:nvSpPr>
+        <p:spPr>
+          <a:xfrm>
+            <a:off x="12664440" y="2781300"/>
+            <a:ext cx="4480560" cy="590550"/>
+          </a:xfrm>
+          <a:prstGeom prst="rect">
+            <a:avLst/>
+          </a:prstGeom>
+          <a:solidFill>
+            <a:srgbClr val="1E5BC6"/>
+          </a:solidFill>
+          <a:ln>
+            <a:noFill/>
+          </a:ln>
+          <a:effectLst/>
+        </p:spPr>
+        <p:txBody>
+          <a:bodyPr rtlCol="0" anchor="ctr" wrap="square"/>
+          <a:lstStyle/>
+          <a:p>
+            <a:pPr algn="ctr"/>
+          </a:p>
+        </p:txBody>
+      </p:sp>
+      <p:sp>
+        <p:nvSpPr>
+          <p:cNvPr id="15" name="TextBox 14"/>
+          <p:cNvSpPr txBox="1"/>
+          <p:nvPr/>
+        </p:nvSpPr>
+        <p:spPr>
+          <a:xfrm>
+            <a:off x="12664440" y="2781300"/>
+            <a:ext cx="4480560" cy="590550"/>
+          </a:xfrm>
+          <a:prstGeom prst="rect">
+            <a:avLst/>
+          </a:prstGeom>
+          <a:noFill/>
+        </p:spPr>
+        <p:txBody>
+          <a:bodyPr wrap="square" lIns="0" rIns="0" tIns="0" bIns="0" anchor="ctr">
+            <a:spAutoFit/>
+          </a:bodyPr>
+          <a:lstStyle/>
+          <a:p>
+            <a:pPr algn="ctr">
+              <a:lnSpc>
+                <a:spcPct val="100000"/>
+              </a:lnSpc>
+            </a:pPr>
+            <a:r>
+              <a:rPr sz="2025" b="1">
+                <a:solidFill>
+                  <a:srgbClr val="FFFFFF"/>
+                </a:solidFill>
+                <a:latin typeface="Pretendard"/>
+                <a:ea typeface="Pretendard"/>
+                <a:cs typeface="Pretendard"/>
+              </a:rPr>
+              <a:t>처음 볼 곳</a:t>
+            </a:r>
+          </a:p>
+        </p:txBody>
+      </p:sp>
+      <p:sp>
+        <p:nvSpPr>
+          <p:cNvPr id="16" name="Rounded Rectangle 15"/>
+          <p:cNvSpPr/>
+          <p:nvPr/>
+        </p:nvSpPr>
+        <p:spPr>
+          <a:xfrm>
+            <a:off x="1143000" y="3448050"/>
+            <a:ext cx="3162300" cy="647700"/>
           </a:xfrm>
           <a:prstGeom prst="roundRect">
             <a:avLst>
-              <a:gd name="adj" fmla="val 5813"/>
+              <a:gd name="adj" fmla="val 5882"/>
+            </a:avLst>
+          </a:prstGeom>
+          <a:solidFill>
+            <a:srgbClr val="EDF3FD"/>
+          </a:solidFill>
+          <a:ln w="9525">
+            <a:solidFill>
+              <a:srgbClr val="BFD3F5"/>
+            </a:solidFill>
+          </a:ln>
+          <a:effectLst/>
+        </p:spPr>
+        <p:txBody>
+          <a:bodyPr rtlCol="0" anchor="ctr" wrap="square"/>
+          <a:lstStyle/>
+          <a:p>
+            <a:pPr algn="ctr"/>
+          </a:p>
+        </p:txBody>
+      </p:sp>
+      <p:sp>
+        <p:nvSpPr>
+          <p:cNvPr id="17" name="TextBox 16"/>
+          <p:cNvSpPr txBox="1"/>
+          <p:nvPr/>
+        </p:nvSpPr>
+        <p:spPr>
+          <a:xfrm>
+            <a:off x="1238250" y="3448050"/>
+            <a:ext cx="2971800" cy="647700"/>
+          </a:xfrm>
+          <a:prstGeom prst="rect">
+            <a:avLst/>
+          </a:prstGeom>
+          <a:noFill/>
+        </p:spPr>
+        <p:txBody>
+          <a:bodyPr wrap="square" lIns="0" rIns="0" tIns="0" bIns="0" anchor="ctr">
+            <a:spAutoFit/>
+          </a:bodyPr>
+          <a:lstStyle/>
+          <a:p>
+            <a:pPr algn="l">
+              <a:lnSpc>
+                <a:spcPct val="115000"/>
+              </a:lnSpc>
+            </a:pPr>
+            <a:r>
+              <a:rPr sz="1875" b="1">
+                <a:solidFill>
+                  <a:srgbClr val="0D2B5E"/>
+                </a:solidFill>
+                <a:latin typeface="Pretendard"/>
+                <a:ea typeface="Pretendard"/>
+                <a:cs typeface="Pretendard"/>
+              </a:rPr>
+              <a:t>버킷 이름</a:t>
+            </a:r>
+          </a:p>
+        </p:txBody>
+      </p:sp>
+      <p:sp>
+        <p:nvSpPr>
+          <p:cNvPr id="18" name="Rounded Rectangle 17"/>
+          <p:cNvSpPr/>
+          <p:nvPr/>
+        </p:nvSpPr>
+        <p:spPr>
+          <a:xfrm>
+            <a:off x="4343400" y="3448050"/>
+            <a:ext cx="6682740" cy="647700"/>
+          </a:xfrm>
+          <a:prstGeom prst="roundRect">
+            <a:avLst>
+              <a:gd name="adj" fmla="val 5882"/>
             </a:avLst>
           </a:prstGeom>
           <a:solidFill>
@@ -12970,130 +14920,77 @@
       </p:sp>
       <p:sp>
         <p:nvSpPr>
-          <p:cNvPr id="9" name="Oval 8"/>
-          <p:cNvSpPr/>
-          <p:nvPr/>
-        </p:nvSpPr>
-        <p:spPr>
-          <a:xfrm>
-            <a:off x="1390650" y="3133725"/>
-            <a:ext cx="533400" cy="533400"/>
-          </a:xfrm>
-          <a:prstGeom prst="ellipse">
-            <a:avLst/>
-          </a:prstGeom>
-          <a:solidFill>
-            <a:srgbClr val="0D2B5E"/>
-          </a:solidFill>
-          <a:ln>
-            <a:noFill/>
-          </a:ln>
-          <a:effectLst/>
-        </p:spPr>
-        <p:txBody>
-          <a:bodyPr rtlCol="0" anchor="ctr" wrap="square"/>
-          <a:lstStyle/>
-          <a:p>
-            <a:pPr algn="ctr"/>
-          </a:p>
-        </p:txBody>
-      </p:sp>
-      <p:sp>
-        <p:nvSpPr>
-          <p:cNvPr id="10" name="TextBox 9"/>
-          <p:cNvSpPr txBox="1"/>
-          <p:nvPr/>
-        </p:nvSpPr>
-        <p:spPr>
-          <a:xfrm>
-            <a:off x="1390650" y="3257550"/>
-            <a:ext cx="533400" cy="323850"/>
-          </a:xfrm>
-          <a:prstGeom prst="rect">
-            <a:avLst/>
-          </a:prstGeom>
-          <a:noFill/>
-        </p:spPr>
-        <p:txBody>
-          <a:bodyPr wrap="square" lIns="0" rIns="0" tIns="0" bIns="0" anchor="t">
+          <p:cNvPr id="19" name="TextBox 18"/>
+          <p:cNvSpPr txBox="1"/>
+          <p:nvPr/>
+        </p:nvSpPr>
+        <p:spPr>
+          <a:xfrm>
+            <a:off x="4438650" y="3448050"/>
+            <a:ext cx="6492240" cy="647700"/>
+          </a:xfrm>
+          <a:prstGeom prst="rect">
+            <a:avLst/>
+          </a:prstGeom>
+          <a:noFill/>
+        </p:spPr>
+        <p:txBody>
+          <a:bodyPr wrap="square" lIns="0" rIns="0" tIns="0" bIns="0" anchor="ctr">
             <a:spAutoFit/>
           </a:bodyPr>
           <a:lstStyle/>
           <a:p>
             <a:pPr algn="ctr">
               <a:lnSpc>
-                <a:spcPct val="100000"/>
-              </a:lnSpc>
-            </a:pPr>
-            <a:r>
-              <a:rPr sz="2100" b="1">
-                <a:solidFill>
-                  <a:srgbClr val="FFFFFF"/>
-                </a:solidFill>
-                <a:latin typeface="Pretendard"/>
-                <a:ea typeface="Pretendard"/>
-                <a:cs typeface="Pretendard"/>
-              </a:rPr>
-              <a:t>1</a:t>
-            </a:r>
-          </a:p>
-        </p:txBody>
-      </p:sp>
-      <p:sp>
-        <p:nvSpPr>
-          <p:cNvPr id="11" name="TextBox 10"/>
-          <p:cNvSpPr txBox="1"/>
-          <p:nvPr/>
-        </p:nvSpPr>
-        <p:spPr>
-          <a:xfrm>
-            <a:off x="2190750" y="2990850"/>
-            <a:ext cx="14573250" cy="819150"/>
-          </a:xfrm>
-          <a:prstGeom prst="rect">
-            <a:avLst/>
-          </a:prstGeom>
-          <a:noFill/>
-        </p:spPr>
-        <p:txBody>
-          <a:bodyPr wrap="square" lIns="0" rIns="0" tIns="0" bIns="0" anchor="ctr">
-            <a:spAutoFit/>
-          </a:bodyPr>
-          <a:lstStyle/>
-          <a:p>
-            <a:pPr algn="l">
-              <a:lnSpc>
-                <a:spcPct val="100000"/>
-              </a:lnSpc>
-            </a:pPr>
-            <a:r>
-              <a:rPr sz="2325" b="1">
-                <a:solidFill>
-                  <a:srgbClr val="0D2B5E"/>
-                </a:solidFill>
-                <a:latin typeface="Pretendard"/>
-                <a:ea typeface="Pretendard"/>
-                <a:cs typeface="Pretendard"/>
-              </a:rPr>
-              <a:t>docker compose ps 에 spark-master · spark-worker · minio 가 Up</a:t>
-            </a:r>
-          </a:p>
-        </p:txBody>
-      </p:sp>
-      <p:sp>
-        <p:nvSpPr>
-          <p:cNvPr id="12" name="Rounded Rectangle 11"/>
-          <p:cNvSpPr/>
-          <p:nvPr/>
-        </p:nvSpPr>
-        <p:spPr>
-          <a:xfrm>
-            <a:off x="1143000" y="3981450"/>
-            <a:ext cx="16002000" cy="819150"/>
+                <a:spcPct val="115000"/>
+              </a:lnSpc>
+            </a:pPr>
+            <a:r>
+              <a:rPr sz="1875" b="0">
+                <a:solidFill>
+                  <a:srgbClr val="3D3D3D"/>
+                </a:solidFill>
+                <a:latin typeface="Pretendard"/>
+                <a:ea typeface="Pretendard"/>
+                <a:cs typeface="Pretendard"/>
+              </a:rPr>
+              <a:t>UnknownStoreException</a:t>
+            </a:r>
+          </a:p>
+          <a:p>
+            <a:pPr algn="ctr">
+              <a:lnSpc>
+                <a:spcPct val="115000"/>
+              </a:lnSpc>
+            </a:pPr>
+            <a:r>
+              <a:rPr sz="1875" b="0">
+                <a:solidFill>
+                  <a:srgbClr val="3D3D3D"/>
+                </a:solidFill>
+                <a:latin typeface="Pretendard"/>
+                <a:ea typeface="Pretendard"/>
+                <a:cs typeface="Pretendard"/>
+              </a:rPr>
+              <a:t>NoSuchBucket (404)</a:t>
+            </a:r>
+          </a:p>
+        </p:txBody>
+      </p:sp>
+      <p:sp>
+        <p:nvSpPr>
+          <p:cNvPr id="20" name="Rounded Rectangle 19"/>
+          <p:cNvSpPr/>
+          <p:nvPr/>
+        </p:nvSpPr>
+        <p:spPr>
+          <a:xfrm>
+            <a:off x="11064240" y="3448050"/>
+            <a:ext cx="1562100" cy="647700"/>
           </a:xfrm>
           <a:prstGeom prst="roundRect">
             <a:avLst>
-              <a:gd name="adj" fmla="val 5813"/>
+              <a:gd name="adj" fmla="val 5882"/>
             </a:avLst>
           </a:prstGeom>
           <a:solidFill>
@@ -13116,130 +15013,59 @@
       </p:sp>
       <p:sp>
         <p:nvSpPr>
-          <p:cNvPr id="13" name="Oval 12"/>
-          <p:cNvSpPr/>
-          <p:nvPr/>
-        </p:nvSpPr>
-        <p:spPr>
-          <a:xfrm>
-            <a:off x="1390650" y="4124325"/>
-            <a:ext cx="533400" cy="533400"/>
-          </a:xfrm>
-          <a:prstGeom prst="ellipse">
-            <a:avLst/>
-          </a:prstGeom>
-          <a:solidFill>
-            <a:srgbClr val="0D2B5E"/>
-          </a:solidFill>
-          <a:ln>
-            <a:noFill/>
-          </a:ln>
-          <a:effectLst/>
-        </p:spPr>
-        <p:txBody>
-          <a:bodyPr rtlCol="0" anchor="ctr" wrap="square"/>
-          <a:lstStyle/>
-          <a:p>
-            <a:pPr algn="ctr"/>
-          </a:p>
-        </p:txBody>
-      </p:sp>
-      <p:sp>
-        <p:nvSpPr>
-          <p:cNvPr id="14" name="TextBox 13"/>
-          <p:cNvSpPr txBox="1"/>
-          <p:nvPr/>
-        </p:nvSpPr>
-        <p:spPr>
-          <a:xfrm>
-            <a:off x="1390650" y="4248150"/>
-            <a:ext cx="533400" cy="323850"/>
-          </a:xfrm>
-          <a:prstGeom prst="rect">
-            <a:avLst/>
-          </a:prstGeom>
-          <a:noFill/>
-        </p:spPr>
-        <p:txBody>
-          <a:bodyPr wrap="square" lIns="0" rIns="0" tIns="0" bIns="0" anchor="t">
+          <p:cNvPr id="21" name="TextBox 20"/>
+          <p:cNvSpPr txBox="1"/>
+          <p:nvPr/>
+        </p:nvSpPr>
+        <p:spPr>
+          <a:xfrm>
+            <a:off x="11159490" y="3448050"/>
+            <a:ext cx="1371600" cy="647700"/>
+          </a:xfrm>
+          <a:prstGeom prst="rect">
+            <a:avLst/>
+          </a:prstGeom>
+          <a:noFill/>
+        </p:spPr>
+        <p:txBody>
+          <a:bodyPr wrap="square" lIns="0" rIns="0" tIns="0" bIns="0" anchor="ctr">
             <a:spAutoFit/>
           </a:bodyPr>
           <a:lstStyle/>
           <a:p>
             <a:pPr algn="ctr">
               <a:lnSpc>
-                <a:spcPct val="100000"/>
-              </a:lnSpc>
-            </a:pPr>
-            <a:r>
-              <a:rPr sz="2100" b="1">
-                <a:solidFill>
-                  <a:srgbClr val="FFFFFF"/>
-                </a:solidFill>
-                <a:latin typeface="Pretendard"/>
-                <a:ea typeface="Pretendard"/>
-                <a:cs typeface="Pretendard"/>
-              </a:rPr>
-              <a:t>2</a:t>
-            </a:r>
-          </a:p>
-        </p:txBody>
-      </p:sp>
-      <p:sp>
-        <p:nvSpPr>
-          <p:cNvPr id="15" name="TextBox 14"/>
-          <p:cNvSpPr txBox="1"/>
-          <p:nvPr/>
-        </p:nvSpPr>
-        <p:spPr>
-          <a:xfrm>
-            <a:off x="2190750" y="3981450"/>
-            <a:ext cx="14573250" cy="819150"/>
-          </a:xfrm>
-          <a:prstGeom prst="rect">
-            <a:avLst/>
-          </a:prstGeom>
-          <a:noFill/>
-        </p:spPr>
-        <p:txBody>
-          <a:bodyPr wrap="square" lIns="0" rIns="0" tIns="0" bIns="0" anchor="ctr">
-            <a:spAutoFit/>
-          </a:bodyPr>
-          <a:lstStyle/>
-          <a:p>
-            <a:pPr algn="l">
-              <a:lnSpc>
-                <a:spcPct val="100000"/>
-              </a:lnSpc>
-            </a:pPr>
-            <a:r>
-              <a:rPr sz="2325" b="1">
-                <a:solidFill>
-                  <a:srgbClr val="0D2B5E"/>
-                </a:solidFill>
-                <a:latin typeface="Pretendard"/>
-                <a:ea typeface="Pretendard"/>
-                <a:cs typeface="Pretendard"/>
-              </a:rPr>
-              <a:t>localhost:9001 에 admin / password123 으로 로그인된다</a:t>
-            </a:r>
-          </a:p>
-        </p:txBody>
-      </p:sp>
-      <p:sp>
-        <p:nvSpPr>
-          <p:cNvPr id="16" name="Rounded Rectangle 15"/>
-          <p:cNvSpPr/>
-          <p:nvPr/>
-        </p:nvSpPr>
-        <p:spPr>
-          <a:xfrm>
-            <a:off x="1143000" y="4972050"/>
-            <a:ext cx="16002000" cy="819150"/>
+                <a:spcPct val="115000"/>
+              </a:lnSpc>
+            </a:pPr>
+            <a:r>
+              <a:rPr sz="1875" b="0">
+                <a:solidFill>
+                  <a:srgbClr val="3D3D3D"/>
+                </a:solidFill>
+                <a:latin typeface="Pretendard"/>
+                <a:ea typeface="Pretendard"/>
+                <a:cs typeface="Pretendard"/>
+              </a:rPr>
+              <a:t>1초</a:t>
+            </a:r>
+          </a:p>
+        </p:txBody>
+      </p:sp>
+      <p:sp>
+        <p:nvSpPr>
+          <p:cNvPr id="22" name="Rounded Rectangle 21"/>
+          <p:cNvSpPr/>
+          <p:nvPr/>
+        </p:nvSpPr>
+        <p:spPr>
+          <a:xfrm>
+            <a:off x="12664440" y="3448050"/>
+            <a:ext cx="4480560" cy="647700"/>
           </a:xfrm>
           <a:prstGeom prst="roundRect">
             <a:avLst>
-              <a:gd name="adj" fmla="val 5813"/>
+              <a:gd name="adj" fmla="val 5882"/>
             </a:avLst>
           </a:prstGeom>
           <a:solidFill>
@@ -13262,130 +15088,134 @@
       </p:sp>
       <p:sp>
         <p:nvSpPr>
-          <p:cNvPr id="17" name="Oval 16"/>
-          <p:cNvSpPr/>
-          <p:nvPr/>
-        </p:nvSpPr>
-        <p:spPr>
-          <a:xfrm>
-            <a:off x="1390650" y="5114925"/>
-            <a:ext cx="533400" cy="533400"/>
-          </a:xfrm>
-          <a:prstGeom prst="ellipse">
-            <a:avLst/>
-          </a:prstGeom>
-          <a:solidFill>
-            <a:srgbClr val="0D2B5E"/>
-          </a:solidFill>
-          <a:ln>
-            <a:noFill/>
-          </a:ln>
-          <a:effectLst/>
-        </p:spPr>
-        <p:txBody>
-          <a:bodyPr rtlCol="0" anchor="ctr" wrap="square"/>
-          <a:lstStyle/>
-          <a:p>
-            <a:pPr algn="ctr"/>
-          </a:p>
-        </p:txBody>
-      </p:sp>
-      <p:sp>
-        <p:nvSpPr>
-          <p:cNvPr id="18" name="TextBox 17"/>
-          <p:cNvSpPr txBox="1"/>
-          <p:nvPr/>
-        </p:nvSpPr>
-        <p:spPr>
-          <a:xfrm>
-            <a:off x="1390650" y="5238750"/>
-            <a:ext cx="533400" cy="323850"/>
-          </a:xfrm>
-          <a:prstGeom prst="rect">
-            <a:avLst/>
-          </a:prstGeom>
-          <a:noFill/>
-        </p:spPr>
-        <p:txBody>
-          <a:bodyPr wrap="square" lIns="0" rIns="0" tIns="0" bIns="0" anchor="t">
+          <p:cNvPr id="23" name="TextBox 22"/>
+          <p:cNvSpPr txBox="1"/>
+          <p:nvPr/>
+        </p:nvSpPr>
+        <p:spPr>
+          <a:xfrm>
+            <a:off x="12759690" y="3448050"/>
+            <a:ext cx="4290060" cy="647700"/>
+          </a:xfrm>
+          <a:prstGeom prst="rect">
+            <a:avLst/>
+          </a:prstGeom>
+          <a:noFill/>
+        </p:spPr>
+        <p:txBody>
+          <a:bodyPr wrap="square" lIns="0" rIns="0" tIns="0" bIns="0" anchor="ctr">
             <a:spAutoFit/>
           </a:bodyPr>
           <a:lstStyle/>
           <a:p>
             <a:pPr algn="ctr">
               <a:lnSpc>
-                <a:spcPct val="100000"/>
-              </a:lnSpc>
-            </a:pPr>
-            <a:r>
-              <a:rPr sz="2100" b="1">
-                <a:solidFill>
-                  <a:srgbClr val="FFFFFF"/>
-                </a:solidFill>
-                <a:latin typeface="Pretendard"/>
-                <a:ea typeface="Pretendard"/>
-                <a:cs typeface="Pretendard"/>
-              </a:rPr>
-              <a:t>3</a:t>
-            </a:r>
-          </a:p>
-        </p:txBody>
-      </p:sp>
-      <p:sp>
-        <p:nvSpPr>
-          <p:cNvPr id="19" name="TextBox 18"/>
-          <p:cNvSpPr txBox="1"/>
-          <p:nvPr/>
-        </p:nvSpPr>
-        <p:spPr>
-          <a:xfrm>
-            <a:off x="2190750" y="4972050"/>
-            <a:ext cx="14573250" cy="819150"/>
-          </a:xfrm>
-          <a:prstGeom prst="rect">
-            <a:avLst/>
-          </a:prstGeom>
-          <a:noFill/>
-        </p:spPr>
-        <p:txBody>
-          <a:bodyPr wrap="square" lIns="0" rIns="0" tIns="0" bIns="0" anchor="ctr">
-            <a:spAutoFit/>
-          </a:bodyPr>
-          <a:lstStyle/>
-          <a:p>
-            <a:pPr algn="l">
-              <a:lnSpc>
-                <a:spcPct val="100000"/>
-              </a:lnSpc>
-            </a:pPr>
-            <a:r>
-              <a:rPr sz="2325" b="1">
-                <a:solidFill>
-                  <a:srgbClr val="0D2B5E"/>
-                </a:solidFill>
-                <a:latin typeface="Pretendard"/>
-                <a:ea typeface="Pretendard"/>
-                <a:cs typeface="Pretendard"/>
-              </a:rPr>
-              <a:t>PySpark 에 &gt;&gt;&gt; 가 뜨고 endpoint 호스트명이 minio 다</a:t>
-            </a:r>
-          </a:p>
-        </p:txBody>
-      </p:sp>
-      <p:sp>
-        <p:nvSpPr>
-          <p:cNvPr id="20" name="Rounded Rectangle 19"/>
-          <p:cNvSpPr/>
-          <p:nvPr/>
-        </p:nvSpPr>
-        <p:spPr>
-          <a:xfrm>
-            <a:off x="1143000" y="5962650"/>
-            <a:ext cx="16002000" cy="819150"/>
+                <a:spcPct val="115000"/>
+              </a:lnSpc>
+            </a:pPr>
+            <a:r>
+              <a:rPr sz="1875" b="0">
+                <a:solidFill>
+                  <a:srgbClr val="3D3D3D"/>
+                </a:solidFill>
+                <a:latin typeface="Pretendard"/>
+                <a:ea typeface="Pretendard"/>
+                <a:cs typeface="Pretendard"/>
+              </a:rPr>
+              <a:t>콘솔의 버킷 목록</a:t>
+            </a:r>
+          </a:p>
+        </p:txBody>
+      </p:sp>
+      <p:sp>
+        <p:nvSpPr>
+          <p:cNvPr id="24" name="Rounded Rectangle 23"/>
+          <p:cNvSpPr/>
+          <p:nvPr/>
+        </p:nvSpPr>
+        <p:spPr>
+          <a:xfrm>
+            <a:off x="1143000" y="4171950"/>
+            <a:ext cx="3162300" cy="647700"/>
           </a:xfrm>
           <a:prstGeom prst="roundRect">
             <a:avLst>
-              <a:gd name="adj" fmla="val 5813"/>
+              <a:gd name="adj" fmla="val 5882"/>
+            </a:avLst>
+          </a:prstGeom>
+          <a:solidFill>
+            <a:srgbClr val="EDF3FD"/>
+          </a:solidFill>
+          <a:ln w="9525">
+            <a:solidFill>
+              <a:srgbClr val="BFD3F5"/>
+            </a:solidFill>
+          </a:ln>
+          <a:effectLst/>
+        </p:spPr>
+        <p:txBody>
+          <a:bodyPr rtlCol="0" anchor="ctr" wrap="square"/>
+          <a:lstStyle/>
+          <a:p>
+            <a:pPr algn="ctr"/>
+          </a:p>
+        </p:txBody>
+      </p:sp>
+      <p:sp>
+        <p:nvSpPr>
+          <p:cNvPr id="25" name="TextBox 24"/>
+          <p:cNvSpPr txBox="1"/>
+          <p:nvPr/>
+        </p:nvSpPr>
+        <p:spPr>
+          <a:xfrm>
+            <a:off x="1238250" y="4171950"/>
+            <a:ext cx="2971800" cy="647700"/>
+          </a:xfrm>
+          <a:prstGeom prst="rect">
+            <a:avLst/>
+          </a:prstGeom>
+          <a:noFill/>
+        </p:spPr>
+        <p:txBody>
+          <a:bodyPr wrap="square" lIns="0" rIns="0" tIns="0" bIns="0" anchor="ctr">
+            <a:spAutoFit/>
+          </a:bodyPr>
+          <a:lstStyle/>
+          <a:p>
+            <a:pPr algn="l">
+              <a:lnSpc>
+                <a:spcPct val="115000"/>
+              </a:lnSpc>
+            </a:pPr>
+            <a:r>
+              <a:rPr sz="1875" b="1">
+                <a:solidFill>
+                  <a:srgbClr val="0D2B5E"/>
+                </a:solidFill>
+                <a:latin typeface="Pretendard"/>
+                <a:ea typeface="Pretendard"/>
+                <a:cs typeface="Pretendard"/>
+              </a:rPr>
+              <a:t>열쇠(secret)</a:t>
+            </a:r>
+          </a:p>
+        </p:txBody>
+      </p:sp>
+      <p:sp>
+        <p:nvSpPr>
+          <p:cNvPr id="26" name="Rounded Rectangle 25"/>
+          <p:cNvSpPr/>
+          <p:nvPr/>
+        </p:nvSpPr>
+        <p:spPr>
+          <a:xfrm>
+            <a:off x="4343400" y="4171950"/>
+            <a:ext cx="6682740" cy="647700"/>
+          </a:xfrm>
+          <a:prstGeom prst="roundRect">
+            <a:avLst>
+              <a:gd name="adj" fmla="val 5882"/>
             </a:avLst>
           </a:prstGeom>
           <a:solidFill>
@@ -13408,130 +15238,77 @@
       </p:sp>
       <p:sp>
         <p:nvSpPr>
-          <p:cNvPr id="21" name="Oval 20"/>
-          <p:cNvSpPr/>
-          <p:nvPr/>
-        </p:nvSpPr>
-        <p:spPr>
-          <a:xfrm>
-            <a:off x="1390650" y="6105525"/>
-            <a:ext cx="533400" cy="533400"/>
-          </a:xfrm>
-          <a:prstGeom prst="ellipse">
-            <a:avLst/>
-          </a:prstGeom>
-          <a:solidFill>
-            <a:srgbClr val="0D2B5E"/>
-          </a:solidFill>
-          <a:ln>
-            <a:noFill/>
-          </a:ln>
-          <a:effectLst/>
-        </p:spPr>
-        <p:txBody>
-          <a:bodyPr rtlCol="0" anchor="ctr" wrap="square"/>
-          <a:lstStyle/>
-          <a:p>
-            <a:pPr algn="ctr"/>
-          </a:p>
-        </p:txBody>
-      </p:sp>
-      <p:sp>
-        <p:nvSpPr>
-          <p:cNvPr id="22" name="TextBox 21"/>
-          <p:cNvSpPr txBox="1"/>
-          <p:nvPr/>
-        </p:nvSpPr>
-        <p:spPr>
-          <a:xfrm>
-            <a:off x="1390650" y="6229350"/>
-            <a:ext cx="533400" cy="323850"/>
-          </a:xfrm>
-          <a:prstGeom prst="rect">
-            <a:avLst/>
-          </a:prstGeom>
-          <a:noFill/>
-        </p:spPr>
-        <p:txBody>
-          <a:bodyPr wrap="square" lIns="0" rIns="0" tIns="0" bIns="0" anchor="t">
+          <p:cNvPr id="27" name="TextBox 26"/>
+          <p:cNvSpPr txBox="1"/>
+          <p:nvPr/>
+        </p:nvSpPr>
+        <p:spPr>
+          <a:xfrm>
+            <a:off x="4438650" y="4171950"/>
+            <a:ext cx="6492240" cy="647700"/>
+          </a:xfrm>
+          <a:prstGeom prst="rect">
+            <a:avLst/>
+          </a:prstGeom>
+          <a:noFill/>
+        </p:spPr>
+        <p:txBody>
+          <a:bodyPr wrap="square" lIns="0" rIns="0" tIns="0" bIns="0" anchor="ctr">
             <a:spAutoFit/>
           </a:bodyPr>
           <a:lstStyle/>
           <a:p>
             <a:pPr algn="ctr">
               <a:lnSpc>
-                <a:spcPct val="100000"/>
-              </a:lnSpc>
-            </a:pPr>
-            <a:r>
-              <a:rPr sz="2100" b="1">
-                <a:solidFill>
-                  <a:srgbClr val="FFFFFF"/>
-                </a:solidFill>
-                <a:latin typeface="Pretendard"/>
-                <a:ea typeface="Pretendard"/>
-                <a:cs typeface="Pretendard"/>
-              </a:rPr>
-              <a:t>4</a:t>
-            </a:r>
-          </a:p>
-        </p:txBody>
-      </p:sp>
-      <p:sp>
-        <p:nvSpPr>
-          <p:cNvPr id="23" name="TextBox 22"/>
-          <p:cNvSpPr txBox="1"/>
-          <p:nvPr/>
-        </p:nvSpPr>
-        <p:spPr>
-          <a:xfrm>
-            <a:off x="2190750" y="5962650"/>
-            <a:ext cx="14573250" cy="819150"/>
-          </a:xfrm>
-          <a:prstGeom prst="rect">
-            <a:avLst/>
-          </a:prstGeom>
-          <a:noFill/>
-        </p:spPr>
-        <p:txBody>
-          <a:bodyPr wrap="square" lIns="0" rIns="0" tIns="0" bIns="0" anchor="ctr">
-            <a:spAutoFit/>
-          </a:bodyPr>
-          <a:lstStyle/>
-          <a:p>
-            <a:pPr algn="l">
-              <a:lnSpc>
-                <a:spcPct val="100000"/>
-              </a:lnSpc>
-            </a:pPr>
-            <a:r>
-              <a:rPr sz="2325" b="1">
-                <a:solidFill>
-                  <a:srgbClr val="0D2B5E"/>
-                </a:solidFill>
-                <a:latin typeface="Pretendard"/>
-                <a:ea typeface="Pretendard"/>
-                <a:cs typeface="Pretendard"/>
-              </a:rPr>
-              <a:t>count 100 · 콘솔의 warehouse 에 smoke-test/ 와 .parquet 파일</a:t>
-            </a:r>
-          </a:p>
-        </p:txBody>
-      </p:sp>
-      <p:sp>
-        <p:nvSpPr>
-          <p:cNvPr id="24" name="Rounded Rectangle 23"/>
-          <p:cNvSpPr/>
-          <p:nvPr/>
-        </p:nvSpPr>
-        <p:spPr>
-          <a:xfrm>
-            <a:off x="1143000" y="6953250"/>
-            <a:ext cx="16002000" cy="819150"/>
+                <a:spcPct val="115000"/>
+              </a:lnSpc>
+            </a:pPr>
+            <a:r>
+              <a:rPr sz="1875" b="0">
+                <a:solidFill>
+                  <a:srgbClr val="3D3D3D"/>
+                </a:solidFill>
+                <a:latin typeface="Pretendard"/>
+                <a:ea typeface="Pretendard"/>
+                <a:cs typeface="Pretendard"/>
+              </a:rPr>
+              <a:t>AccessDeniedException</a:t>
+            </a:r>
+          </a:p>
+          <a:p>
+            <a:pPr algn="ctr">
+              <a:lnSpc>
+                <a:spcPct val="115000"/>
+              </a:lnSpc>
+            </a:pPr>
+            <a:r>
+              <a:rPr sz="1875" b="0">
+                <a:solidFill>
+                  <a:srgbClr val="3D3D3D"/>
+                </a:solidFill>
+                <a:latin typeface="Pretendard"/>
+                <a:ea typeface="Pretendard"/>
+                <a:cs typeface="Pretendard"/>
+              </a:rPr>
+              <a:t>403 Forbidden</a:t>
+            </a:r>
+          </a:p>
+        </p:txBody>
+      </p:sp>
+      <p:sp>
+        <p:nvSpPr>
+          <p:cNvPr id="28" name="Rounded Rectangle 27"/>
+          <p:cNvSpPr/>
+          <p:nvPr/>
+        </p:nvSpPr>
+        <p:spPr>
+          <a:xfrm>
+            <a:off x="11064240" y="4171950"/>
+            <a:ext cx="1562100" cy="647700"/>
           </a:xfrm>
           <a:prstGeom prst="roundRect">
             <a:avLst>
-              <a:gd name="adj" fmla="val 5813"/>
+              <a:gd name="adj" fmla="val 5882"/>
             </a:avLst>
           </a:prstGeom>
           <a:solidFill>
@@ -13554,20 +15331,813 @@
       </p:sp>
       <p:sp>
         <p:nvSpPr>
-          <p:cNvPr id="25" name="Oval 24"/>
-          <p:cNvSpPr/>
-          <p:nvPr/>
-        </p:nvSpPr>
-        <p:spPr>
-          <a:xfrm>
-            <a:off x="1390650" y="7096125"/>
-            <a:ext cx="533400" cy="533400"/>
-          </a:xfrm>
-          <a:prstGeom prst="ellipse">
-            <a:avLst/>
-          </a:prstGeom>
-          <a:solidFill>
-            <a:srgbClr val="0D2B5E"/>
+          <p:cNvPr id="29" name="TextBox 28"/>
+          <p:cNvSpPr txBox="1"/>
+          <p:nvPr/>
+        </p:nvSpPr>
+        <p:spPr>
+          <a:xfrm>
+            <a:off x="11159490" y="4171950"/>
+            <a:ext cx="1371600" cy="647700"/>
+          </a:xfrm>
+          <a:prstGeom prst="rect">
+            <a:avLst/>
+          </a:prstGeom>
+          <a:noFill/>
+        </p:spPr>
+        <p:txBody>
+          <a:bodyPr wrap="square" lIns="0" rIns="0" tIns="0" bIns="0" anchor="ctr">
+            <a:spAutoFit/>
+          </a:bodyPr>
+          <a:lstStyle/>
+          <a:p>
+            <a:pPr algn="ctr">
+              <a:lnSpc>
+                <a:spcPct val="115000"/>
+              </a:lnSpc>
+            </a:pPr>
+            <a:r>
+              <a:rPr sz="1875" b="0">
+                <a:solidFill>
+                  <a:srgbClr val="3D3D3D"/>
+                </a:solidFill>
+                <a:latin typeface="Pretendard"/>
+                <a:ea typeface="Pretendard"/>
+                <a:cs typeface="Pretendard"/>
+              </a:rPr>
+              <a:t>0초</a:t>
+            </a:r>
+          </a:p>
+        </p:txBody>
+      </p:sp>
+      <p:sp>
+        <p:nvSpPr>
+          <p:cNvPr id="30" name="Rounded Rectangle 29"/>
+          <p:cNvSpPr/>
+          <p:nvPr/>
+        </p:nvSpPr>
+        <p:spPr>
+          <a:xfrm>
+            <a:off x="12664440" y="4171950"/>
+            <a:ext cx="4480560" cy="647700"/>
+          </a:xfrm>
+          <a:prstGeom prst="roundRect">
+            <a:avLst>
+              <a:gd name="adj" fmla="val 5882"/>
+            </a:avLst>
+          </a:prstGeom>
+          <a:solidFill>
+            <a:srgbClr val="FAFBFD"/>
+          </a:solidFill>
+          <a:ln w="9525">
+            <a:solidFill>
+              <a:srgbClr val="DCE1E8"/>
+            </a:solidFill>
+          </a:ln>
+          <a:effectLst/>
+        </p:spPr>
+        <p:txBody>
+          <a:bodyPr rtlCol="0" anchor="ctr" wrap="square"/>
+          <a:lstStyle/>
+          <a:p>
+            <a:pPr algn="ctr"/>
+          </a:p>
+        </p:txBody>
+      </p:sp>
+      <p:sp>
+        <p:nvSpPr>
+          <p:cNvPr id="31" name="TextBox 30"/>
+          <p:cNvSpPr txBox="1"/>
+          <p:nvPr/>
+        </p:nvSpPr>
+        <p:spPr>
+          <a:xfrm>
+            <a:off x="12759690" y="4171950"/>
+            <a:ext cx="4290060" cy="647700"/>
+          </a:xfrm>
+          <a:prstGeom prst="rect">
+            <a:avLst/>
+          </a:prstGeom>
+          <a:noFill/>
+        </p:spPr>
+        <p:txBody>
+          <a:bodyPr wrap="square" lIns="0" rIns="0" tIns="0" bIns="0" anchor="ctr">
+            <a:spAutoFit/>
+          </a:bodyPr>
+          <a:lstStyle/>
+          <a:p>
+            <a:pPr algn="ctr">
+              <a:lnSpc>
+                <a:spcPct val="115000"/>
+              </a:lnSpc>
+            </a:pPr>
+            <a:r>
+              <a:rPr sz="1875" b="0">
+                <a:solidFill>
+                  <a:srgbClr val="3D3D3D"/>
+                </a:solidFill>
+                <a:latin typeface="Pretendard"/>
+                <a:ea typeface="Pretendard"/>
+                <a:cs typeface="Pretendard"/>
+              </a:rPr>
+              <a:t>MINIO_ROOT 값</a:t>
+            </a:r>
+          </a:p>
+        </p:txBody>
+      </p:sp>
+      <p:sp>
+        <p:nvSpPr>
+          <p:cNvPr id="32" name="Rounded Rectangle 31"/>
+          <p:cNvSpPr/>
+          <p:nvPr/>
+        </p:nvSpPr>
+        <p:spPr>
+          <a:xfrm>
+            <a:off x="1143000" y="4895850"/>
+            <a:ext cx="3162300" cy="647700"/>
+          </a:xfrm>
+          <a:prstGeom prst="roundRect">
+            <a:avLst>
+              <a:gd name="adj" fmla="val 5882"/>
+            </a:avLst>
+          </a:prstGeom>
+          <a:solidFill>
+            <a:srgbClr val="EDF3FD"/>
+          </a:solidFill>
+          <a:ln w="9525">
+            <a:solidFill>
+              <a:srgbClr val="BFD3F5"/>
+            </a:solidFill>
+          </a:ln>
+          <a:effectLst/>
+        </p:spPr>
+        <p:txBody>
+          <a:bodyPr rtlCol="0" anchor="ctr" wrap="square"/>
+          <a:lstStyle/>
+          <a:p>
+            <a:pPr algn="ctr"/>
+          </a:p>
+        </p:txBody>
+      </p:sp>
+      <p:sp>
+        <p:nvSpPr>
+          <p:cNvPr id="33" name="TextBox 32"/>
+          <p:cNvSpPr txBox="1"/>
+          <p:nvPr/>
+        </p:nvSpPr>
+        <p:spPr>
+          <a:xfrm>
+            <a:off x="1238250" y="4895850"/>
+            <a:ext cx="2971800" cy="647700"/>
+          </a:xfrm>
+          <a:prstGeom prst="rect">
+            <a:avLst/>
+          </a:prstGeom>
+          <a:noFill/>
+        </p:spPr>
+        <p:txBody>
+          <a:bodyPr wrap="square" lIns="0" rIns="0" tIns="0" bIns="0" anchor="ctr">
+            <a:spAutoFit/>
+          </a:bodyPr>
+          <a:lstStyle/>
+          <a:p>
+            <a:pPr algn="l">
+              <a:lnSpc>
+                <a:spcPct val="115000"/>
+              </a:lnSpc>
+            </a:pPr>
+            <a:r>
+              <a:rPr sz="1875" b="1">
+                <a:solidFill>
+                  <a:srgbClr val="0D2B5E"/>
+                </a:solidFill>
+                <a:latin typeface="Pretendard"/>
+                <a:ea typeface="Pretendard"/>
+                <a:cs typeface="Pretendard"/>
+              </a:rPr>
+              <a:t>주소(endpoint)</a:t>
+            </a:r>
+          </a:p>
+        </p:txBody>
+      </p:sp>
+      <p:sp>
+        <p:nvSpPr>
+          <p:cNvPr id="34" name="Rounded Rectangle 33"/>
+          <p:cNvSpPr/>
+          <p:nvPr/>
+        </p:nvSpPr>
+        <p:spPr>
+          <a:xfrm>
+            <a:off x="4343400" y="4895850"/>
+            <a:ext cx="6682740" cy="647700"/>
+          </a:xfrm>
+          <a:prstGeom prst="roundRect">
+            <a:avLst>
+              <a:gd name="adj" fmla="val 5882"/>
+            </a:avLst>
+          </a:prstGeom>
+          <a:solidFill>
+            <a:srgbClr val="FAFBFD"/>
+          </a:solidFill>
+          <a:ln w="9525">
+            <a:solidFill>
+              <a:srgbClr val="DCE1E8"/>
+            </a:solidFill>
+          </a:ln>
+          <a:effectLst/>
+        </p:spPr>
+        <p:txBody>
+          <a:bodyPr rtlCol="0" anchor="ctr" wrap="square"/>
+          <a:lstStyle/>
+          <a:p>
+            <a:pPr algn="ctr"/>
+          </a:p>
+        </p:txBody>
+      </p:sp>
+      <p:sp>
+        <p:nvSpPr>
+          <p:cNvPr id="35" name="TextBox 34"/>
+          <p:cNvSpPr txBox="1"/>
+          <p:nvPr/>
+        </p:nvSpPr>
+        <p:spPr>
+          <a:xfrm>
+            <a:off x="4438650" y="4895850"/>
+            <a:ext cx="6492240" cy="647700"/>
+          </a:xfrm>
+          <a:prstGeom prst="rect">
+            <a:avLst/>
+          </a:prstGeom>
+          <a:noFill/>
+        </p:spPr>
+        <p:txBody>
+          <a:bodyPr wrap="square" lIns="0" rIns="0" tIns="0" bIns="0" anchor="ctr">
+            <a:spAutoFit/>
+          </a:bodyPr>
+          <a:lstStyle/>
+          <a:p>
+            <a:pPr algn="ctr">
+              <a:lnSpc>
+                <a:spcPct val="115000"/>
+              </a:lnSpc>
+            </a:pPr>
+            <a:r>
+              <a:rPr sz="1875" b="0">
+                <a:solidFill>
+                  <a:srgbClr val="3D3D3D"/>
+                </a:solidFill>
+                <a:latin typeface="Pretendard"/>
+                <a:ea typeface="Pretendard"/>
+                <a:cs typeface="Pretendard"/>
+              </a:rPr>
+              <a:t>Unable to execute HTTP</a:t>
+            </a:r>
+          </a:p>
+          <a:p>
+            <a:pPr algn="ctr">
+              <a:lnSpc>
+                <a:spcPct val="115000"/>
+              </a:lnSpc>
+            </a:pPr>
+            <a:r>
+              <a:rPr sz="1875" b="0">
+                <a:solidFill>
+                  <a:srgbClr val="3D3D3D"/>
+                </a:solidFill>
+                <a:latin typeface="Pretendard"/>
+                <a:ea typeface="Pretendard"/>
+                <a:cs typeface="Pretendard"/>
+              </a:rPr>
+              <a:t>request: mini0</a:t>
+            </a:r>
+          </a:p>
+        </p:txBody>
+      </p:sp>
+      <p:sp>
+        <p:nvSpPr>
+          <p:cNvPr id="36" name="Rounded Rectangle 35"/>
+          <p:cNvSpPr/>
+          <p:nvPr/>
+        </p:nvSpPr>
+        <p:spPr>
+          <a:xfrm>
+            <a:off x="11064240" y="4895850"/>
+            <a:ext cx="1562100" cy="647700"/>
+          </a:xfrm>
+          <a:prstGeom prst="roundRect">
+            <a:avLst>
+              <a:gd name="adj" fmla="val 5882"/>
+            </a:avLst>
+          </a:prstGeom>
+          <a:solidFill>
+            <a:srgbClr val="FAFBFD"/>
+          </a:solidFill>
+          <a:ln w="9525">
+            <a:solidFill>
+              <a:srgbClr val="DCE1E8"/>
+            </a:solidFill>
+          </a:ln>
+          <a:effectLst/>
+        </p:spPr>
+        <p:txBody>
+          <a:bodyPr rtlCol="0" anchor="ctr" wrap="square"/>
+          <a:lstStyle/>
+          <a:p>
+            <a:pPr algn="ctr"/>
+          </a:p>
+        </p:txBody>
+      </p:sp>
+      <p:sp>
+        <p:nvSpPr>
+          <p:cNvPr id="37" name="TextBox 36"/>
+          <p:cNvSpPr txBox="1"/>
+          <p:nvPr/>
+        </p:nvSpPr>
+        <p:spPr>
+          <a:xfrm>
+            <a:off x="11159490" y="4895850"/>
+            <a:ext cx="1371600" cy="647700"/>
+          </a:xfrm>
+          <a:prstGeom prst="rect">
+            <a:avLst/>
+          </a:prstGeom>
+          <a:noFill/>
+        </p:spPr>
+        <p:txBody>
+          <a:bodyPr wrap="square" lIns="0" rIns="0" tIns="0" bIns="0" anchor="ctr">
+            <a:spAutoFit/>
+          </a:bodyPr>
+          <a:lstStyle/>
+          <a:p>
+            <a:pPr algn="ctr">
+              <a:lnSpc>
+                <a:spcPct val="115000"/>
+              </a:lnSpc>
+            </a:pPr>
+            <a:r>
+              <a:rPr sz="1875" b="0">
+                <a:solidFill>
+                  <a:srgbClr val="3D3D3D"/>
+                </a:solidFill>
+                <a:latin typeface="Pretendard"/>
+                <a:ea typeface="Pretendard"/>
+                <a:cs typeface="Pretendard"/>
+              </a:rPr>
+              <a:t>3초</a:t>
+            </a:r>
+          </a:p>
+        </p:txBody>
+      </p:sp>
+      <p:sp>
+        <p:nvSpPr>
+          <p:cNvPr id="38" name="Rounded Rectangle 37"/>
+          <p:cNvSpPr/>
+          <p:nvPr/>
+        </p:nvSpPr>
+        <p:spPr>
+          <a:xfrm>
+            <a:off x="12664440" y="4895850"/>
+            <a:ext cx="4480560" cy="647700"/>
+          </a:xfrm>
+          <a:prstGeom prst="roundRect">
+            <a:avLst>
+              <a:gd name="adj" fmla="val 5882"/>
+            </a:avLst>
+          </a:prstGeom>
+          <a:solidFill>
+            <a:srgbClr val="FAFBFD"/>
+          </a:solidFill>
+          <a:ln w="9525">
+            <a:solidFill>
+              <a:srgbClr val="DCE1E8"/>
+            </a:solidFill>
+          </a:ln>
+          <a:effectLst/>
+        </p:spPr>
+        <p:txBody>
+          <a:bodyPr rtlCol="0" anchor="ctr" wrap="square"/>
+          <a:lstStyle/>
+          <a:p>
+            <a:pPr algn="ctr"/>
+          </a:p>
+        </p:txBody>
+      </p:sp>
+      <p:sp>
+        <p:nvSpPr>
+          <p:cNvPr id="39" name="TextBox 38"/>
+          <p:cNvSpPr txBox="1"/>
+          <p:nvPr/>
+        </p:nvSpPr>
+        <p:spPr>
+          <a:xfrm>
+            <a:off x="12759690" y="4895850"/>
+            <a:ext cx="4290060" cy="647700"/>
+          </a:xfrm>
+          <a:prstGeom prst="rect">
+            <a:avLst/>
+          </a:prstGeom>
+          <a:noFill/>
+        </p:spPr>
+        <p:txBody>
+          <a:bodyPr wrap="square" lIns="0" rIns="0" tIns="0" bIns="0" anchor="ctr">
+            <a:spAutoFit/>
+          </a:bodyPr>
+          <a:lstStyle/>
+          <a:p>
+            <a:pPr algn="ctr">
+              <a:lnSpc>
+                <a:spcPct val="115000"/>
+              </a:lnSpc>
+            </a:pPr>
+            <a:r>
+              <a:rPr sz="1875" b="0">
+                <a:solidFill>
+                  <a:srgbClr val="3D3D3D"/>
+                </a:solidFill>
+                <a:latin typeface="Pretendard"/>
+                <a:ea typeface="Pretendard"/>
+                <a:cs typeface="Pretendard"/>
+              </a:rPr>
+              <a:t>철자 · 서비스 이름</a:t>
+            </a:r>
+          </a:p>
+        </p:txBody>
+      </p:sp>
+      <p:sp>
+        <p:nvSpPr>
+          <p:cNvPr id="40" name="Rounded Rectangle 39"/>
+          <p:cNvSpPr/>
+          <p:nvPr/>
+        </p:nvSpPr>
+        <p:spPr>
+          <a:xfrm>
+            <a:off x="1143000" y="5619750"/>
+            <a:ext cx="3162300" cy="647700"/>
+          </a:xfrm>
+          <a:prstGeom prst="roundRect">
+            <a:avLst>
+              <a:gd name="adj" fmla="val 5882"/>
+            </a:avLst>
+          </a:prstGeom>
+          <a:solidFill>
+            <a:srgbClr val="EDF3FD"/>
+          </a:solidFill>
+          <a:ln w="9525">
+            <a:solidFill>
+              <a:srgbClr val="BFD3F5"/>
+            </a:solidFill>
+          </a:ln>
+          <a:effectLst/>
+        </p:spPr>
+        <p:txBody>
+          <a:bodyPr rtlCol="0" anchor="ctr" wrap="square"/>
+          <a:lstStyle/>
+          <a:p>
+            <a:pPr algn="ctr"/>
+          </a:p>
+        </p:txBody>
+      </p:sp>
+      <p:sp>
+        <p:nvSpPr>
+          <p:cNvPr id="41" name="TextBox 40"/>
+          <p:cNvSpPr txBox="1"/>
+          <p:nvPr/>
+        </p:nvSpPr>
+        <p:spPr>
+          <a:xfrm>
+            <a:off x="1238250" y="5619750"/>
+            <a:ext cx="2971800" cy="647700"/>
+          </a:xfrm>
+          <a:prstGeom prst="rect">
+            <a:avLst/>
+          </a:prstGeom>
+          <a:noFill/>
+        </p:spPr>
+        <p:txBody>
+          <a:bodyPr wrap="square" lIns="0" rIns="0" tIns="0" bIns="0" anchor="ctr">
+            <a:spAutoFit/>
+          </a:bodyPr>
+          <a:lstStyle/>
+          <a:p>
+            <a:pPr algn="l">
+              <a:lnSpc>
+                <a:spcPct val="115000"/>
+              </a:lnSpc>
+            </a:pPr>
+            <a:r>
+              <a:rPr sz="1875" b="1">
+                <a:solidFill>
+                  <a:srgbClr val="0D2B5E"/>
+                </a:solidFill>
+                <a:latin typeface="Pretendard"/>
+                <a:ea typeface="Pretendard"/>
+                <a:cs typeface="Pretendard"/>
+              </a:rPr>
+              <a:t>path style</a:t>
+            </a:r>
+          </a:p>
+        </p:txBody>
+      </p:sp>
+      <p:sp>
+        <p:nvSpPr>
+          <p:cNvPr id="42" name="Rounded Rectangle 41"/>
+          <p:cNvSpPr/>
+          <p:nvPr/>
+        </p:nvSpPr>
+        <p:spPr>
+          <a:xfrm>
+            <a:off x="4343400" y="5619750"/>
+            <a:ext cx="6682740" cy="647700"/>
+          </a:xfrm>
+          <a:prstGeom prst="roundRect">
+            <a:avLst>
+              <a:gd name="adj" fmla="val 5882"/>
+            </a:avLst>
+          </a:prstGeom>
+          <a:solidFill>
+            <a:srgbClr val="FAFBFD"/>
+          </a:solidFill>
+          <a:ln w="9525">
+            <a:solidFill>
+              <a:srgbClr val="DCE1E8"/>
+            </a:solidFill>
+          </a:ln>
+          <a:effectLst/>
+        </p:spPr>
+        <p:txBody>
+          <a:bodyPr rtlCol="0" anchor="ctr" wrap="square"/>
+          <a:lstStyle/>
+          <a:p>
+            <a:pPr algn="ctr"/>
+          </a:p>
+        </p:txBody>
+      </p:sp>
+      <p:sp>
+        <p:nvSpPr>
+          <p:cNvPr id="43" name="TextBox 42"/>
+          <p:cNvSpPr txBox="1"/>
+          <p:nvPr/>
+        </p:nvSpPr>
+        <p:spPr>
+          <a:xfrm>
+            <a:off x="4438650" y="5619750"/>
+            <a:ext cx="6492240" cy="647700"/>
+          </a:xfrm>
+          <a:prstGeom prst="rect">
+            <a:avLst/>
+          </a:prstGeom>
+          <a:noFill/>
+        </p:spPr>
+        <p:txBody>
+          <a:bodyPr wrap="square" lIns="0" rIns="0" tIns="0" bIns="0" anchor="ctr">
+            <a:spAutoFit/>
+          </a:bodyPr>
+          <a:lstStyle/>
+          <a:p>
+            <a:pPr algn="ctr">
+              <a:lnSpc>
+                <a:spcPct val="115000"/>
+              </a:lnSpc>
+            </a:pPr>
+            <a:r>
+              <a:rPr sz="1875" b="0">
+                <a:solidFill>
+                  <a:srgbClr val="3D3D3D"/>
+                </a:solidFill>
+                <a:latin typeface="Pretendard"/>
+                <a:ea typeface="Pretendard"/>
+                <a:cs typeface="Pretendard"/>
+              </a:rPr>
+              <a:t>Unable to execute HTTP</a:t>
+            </a:r>
+          </a:p>
+          <a:p>
+            <a:pPr algn="ctr">
+              <a:lnSpc>
+                <a:spcPct val="115000"/>
+              </a:lnSpc>
+            </a:pPr>
+            <a:r>
+              <a:rPr sz="1875" b="0">
+                <a:solidFill>
+                  <a:srgbClr val="3D3D3D"/>
+                </a:solidFill>
+                <a:latin typeface="Pretendard"/>
+                <a:ea typeface="Pretendard"/>
+                <a:cs typeface="Pretendard"/>
+              </a:rPr>
+              <a:t>request: warehouse.minio</a:t>
+            </a:r>
+          </a:p>
+        </p:txBody>
+      </p:sp>
+      <p:sp>
+        <p:nvSpPr>
+          <p:cNvPr id="44" name="Rounded Rectangle 43"/>
+          <p:cNvSpPr/>
+          <p:nvPr/>
+        </p:nvSpPr>
+        <p:spPr>
+          <a:xfrm>
+            <a:off x="11064240" y="5619750"/>
+            <a:ext cx="1562100" cy="647700"/>
+          </a:xfrm>
+          <a:prstGeom prst="roundRect">
+            <a:avLst>
+              <a:gd name="adj" fmla="val 5882"/>
+            </a:avLst>
+          </a:prstGeom>
+          <a:solidFill>
+            <a:srgbClr val="FAFBFD"/>
+          </a:solidFill>
+          <a:ln w="9525">
+            <a:solidFill>
+              <a:srgbClr val="DCE1E8"/>
+            </a:solidFill>
+          </a:ln>
+          <a:effectLst/>
+        </p:spPr>
+        <p:txBody>
+          <a:bodyPr rtlCol="0" anchor="ctr" wrap="square"/>
+          <a:lstStyle/>
+          <a:p>
+            <a:pPr algn="ctr"/>
+          </a:p>
+        </p:txBody>
+      </p:sp>
+      <p:sp>
+        <p:nvSpPr>
+          <p:cNvPr id="45" name="TextBox 44"/>
+          <p:cNvSpPr txBox="1"/>
+          <p:nvPr/>
+        </p:nvSpPr>
+        <p:spPr>
+          <a:xfrm>
+            <a:off x="11159490" y="5619750"/>
+            <a:ext cx="1371600" cy="647700"/>
+          </a:xfrm>
+          <a:prstGeom prst="rect">
+            <a:avLst/>
+          </a:prstGeom>
+          <a:noFill/>
+        </p:spPr>
+        <p:txBody>
+          <a:bodyPr wrap="square" lIns="0" rIns="0" tIns="0" bIns="0" anchor="ctr">
+            <a:spAutoFit/>
+          </a:bodyPr>
+          <a:lstStyle/>
+          <a:p>
+            <a:pPr algn="ctr">
+              <a:lnSpc>
+                <a:spcPct val="115000"/>
+              </a:lnSpc>
+            </a:pPr>
+            <a:r>
+              <a:rPr sz="1875" b="0">
+                <a:solidFill>
+                  <a:srgbClr val="3D3D3D"/>
+                </a:solidFill>
+                <a:latin typeface="Pretendard"/>
+                <a:ea typeface="Pretendard"/>
+                <a:cs typeface="Pretendard"/>
+              </a:rPr>
+              <a:t>2초</a:t>
+            </a:r>
+          </a:p>
+        </p:txBody>
+      </p:sp>
+      <p:sp>
+        <p:nvSpPr>
+          <p:cNvPr id="46" name="Rounded Rectangle 45"/>
+          <p:cNvSpPr/>
+          <p:nvPr/>
+        </p:nvSpPr>
+        <p:spPr>
+          <a:xfrm>
+            <a:off x="12664440" y="5619750"/>
+            <a:ext cx="4480560" cy="647700"/>
+          </a:xfrm>
+          <a:prstGeom prst="roundRect">
+            <a:avLst>
+              <a:gd name="adj" fmla="val 5882"/>
+            </a:avLst>
+          </a:prstGeom>
+          <a:solidFill>
+            <a:srgbClr val="FAFBFD"/>
+          </a:solidFill>
+          <a:ln w="9525">
+            <a:solidFill>
+              <a:srgbClr val="DCE1E8"/>
+            </a:solidFill>
+          </a:ln>
+          <a:effectLst/>
+        </p:spPr>
+        <p:txBody>
+          <a:bodyPr rtlCol="0" anchor="ctr" wrap="square"/>
+          <a:lstStyle/>
+          <a:p>
+            <a:pPr algn="ctr"/>
+          </a:p>
+        </p:txBody>
+      </p:sp>
+      <p:sp>
+        <p:nvSpPr>
+          <p:cNvPr id="47" name="TextBox 46"/>
+          <p:cNvSpPr txBox="1"/>
+          <p:nvPr/>
+        </p:nvSpPr>
+        <p:spPr>
+          <a:xfrm>
+            <a:off x="12759690" y="5619750"/>
+            <a:ext cx="4290060" cy="647700"/>
+          </a:xfrm>
+          <a:prstGeom prst="rect">
+            <a:avLst/>
+          </a:prstGeom>
+          <a:noFill/>
+        </p:spPr>
+        <p:txBody>
+          <a:bodyPr wrap="square" lIns="0" rIns="0" tIns="0" bIns="0" anchor="ctr">
+            <a:spAutoFit/>
+          </a:bodyPr>
+          <a:lstStyle/>
+          <a:p>
+            <a:pPr algn="ctr">
+              <a:lnSpc>
+                <a:spcPct val="115000"/>
+              </a:lnSpc>
+            </a:pPr>
+            <a:r>
+              <a:rPr sz="1875" b="0">
+                <a:solidFill>
+                  <a:srgbClr val="3D3D3D"/>
+                </a:solidFill>
+                <a:latin typeface="Pretendard"/>
+                <a:ea typeface="Pretendard"/>
+                <a:cs typeface="Pretendard"/>
+              </a:rPr>
+              <a:t>path.style.access</a:t>
+            </a:r>
+          </a:p>
+        </p:txBody>
+      </p:sp>
+      <p:sp>
+        <p:nvSpPr>
+          <p:cNvPr id="48" name="TextBox 47"/>
+          <p:cNvSpPr txBox="1"/>
+          <p:nvPr/>
+        </p:nvSpPr>
+        <p:spPr>
+          <a:xfrm>
+            <a:off x="1143000" y="7620000"/>
+            <a:ext cx="16002000" cy="342900"/>
+          </a:xfrm>
+          <a:prstGeom prst="rect">
+            <a:avLst/>
+          </a:prstGeom>
+          <a:noFill/>
+        </p:spPr>
+        <p:txBody>
+          <a:bodyPr wrap="square" lIns="0" rIns="0" tIns="0" bIns="0" anchor="t">
+            <a:spAutoFit/>
+          </a:bodyPr>
+          <a:lstStyle/>
+          <a:p>
+            <a:pPr algn="l">
+              <a:lnSpc>
+                <a:spcPct val="100000"/>
+              </a:lnSpc>
+            </a:pPr>
+            <a:r>
+              <a:rPr sz="1875" b="1">
+                <a:solidFill>
+                  <a:srgbClr val="7D7D7D"/>
+                </a:solidFill>
+                <a:latin typeface="Pretendard"/>
+                <a:ea typeface="Pretendard"/>
+                <a:cs typeface="Pretendard"/>
+              </a:rPr>
+              <a:t>셸이 몇 분 말없이 멈추면 고장이 아니라 재시도 — Ctrl+C 뒤 endpoint · 열쇠 · path style 부터</a:t>
+            </a:r>
+          </a:p>
+        </p:txBody>
+      </p:sp>
+      <p:sp>
+        <p:nvSpPr>
+          <p:cNvPr id="49" name="Rectangle 48"/>
+          <p:cNvSpPr/>
+          <p:nvPr/>
+        </p:nvSpPr>
+        <p:spPr>
+          <a:xfrm>
+            <a:off x="1143000" y="8058150"/>
+            <a:ext cx="16002000" cy="9525"/>
+          </a:xfrm>
+          <a:prstGeom prst="rect">
+            <a:avLst/>
+          </a:prstGeom>
+          <a:solidFill>
+            <a:srgbClr val="DCE1E8"/>
           </a:solidFill>
           <a:ln>
             <a:noFill/>
@@ -13584,119 +16154,7 @@
       </p:sp>
       <p:sp>
         <p:nvSpPr>
-          <p:cNvPr id="26" name="TextBox 25"/>
-          <p:cNvSpPr txBox="1"/>
-          <p:nvPr/>
-        </p:nvSpPr>
-        <p:spPr>
-          <a:xfrm>
-            <a:off x="1390650" y="7219950"/>
-            <a:ext cx="533400" cy="323850"/>
-          </a:xfrm>
-          <a:prstGeom prst="rect">
-            <a:avLst/>
-          </a:prstGeom>
-          <a:noFill/>
-        </p:spPr>
-        <p:txBody>
-          <a:bodyPr wrap="square" lIns="0" rIns="0" tIns="0" bIns="0" anchor="t">
-            <a:spAutoFit/>
-          </a:bodyPr>
-          <a:lstStyle/>
-          <a:p>
-            <a:pPr algn="ctr">
-              <a:lnSpc>
-                <a:spcPct val="100000"/>
-              </a:lnSpc>
-            </a:pPr>
-            <a:r>
-              <a:rPr sz="2100" b="1">
-                <a:solidFill>
-                  <a:srgbClr val="FFFFFF"/>
-                </a:solidFill>
-                <a:latin typeface="Pretendard"/>
-                <a:ea typeface="Pretendard"/>
-                <a:cs typeface="Pretendard"/>
-              </a:rPr>
-              <a:t>5</a:t>
-            </a:r>
-          </a:p>
-        </p:txBody>
-      </p:sp>
-      <p:sp>
-        <p:nvSpPr>
-          <p:cNvPr id="27" name="TextBox 26"/>
-          <p:cNvSpPr txBox="1"/>
-          <p:nvPr/>
-        </p:nvSpPr>
-        <p:spPr>
-          <a:xfrm>
-            <a:off x="2190750" y="6953250"/>
-            <a:ext cx="14573250" cy="819150"/>
-          </a:xfrm>
-          <a:prstGeom prst="rect">
-            <a:avLst/>
-          </a:prstGeom>
-          <a:noFill/>
-        </p:spPr>
-        <p:txBody>
-          <a:bodyPr wrap="square" lIns="0" rIns="0" tIns="0" bIns="0" anchor="ctr">
-            <a:spAutoFit/>
-          </a:bodyPr>
-          <a:lstStyle/>
-          <a:p>
-            <a:pPr algn="l">
-              <a:lnSpc>
-                <a:spcPct val="100000"/>
-              </a:lnSpc>
-            </a:pPr>
-            <a:r>
-              <a:rPr sz="2325" b="1">
-                <a:solidFill>
-                  <a:srgbClr val="0D2B5E"/>
-                </a:solidFill>
-                <a:latin typeface="Pretendard"/>
-                <a:ea typeface="Pretendard"/>
-                <a:cs typeface="Pretendard"/>
-              </a:rPr>
-              <a:t>없는 버킷 · 403 · UnknownHost 를 구분해 말할 수 있다</a:t>
-            </a:r>
-          </a:p>
-        </p:txBody>
-      </p:sp>
-      <p:sp>
-        <p:nvSpPr>
-          <p:cNvPr id="28" name="Rectangle 27"/>
-          <p:cNvSpPr/>
-          <p:nvPr/>
-        </p:nvSpPr>
-        <p:spPr>
-          <a:xfrm>
-            <a:off x="1143000" y="8058150"/>
-            <a:ext cx="16002000" cy="9525"/>
-          </a:xfrm>
-          <a:prstGeom prst="rect">
-            <a:avLst/>
-          </a:prstGeom>
-          <a:solidFill>
-            <a:srgbClr val="DCE1E8"/>
-          </a:solidFill>
-          <a:ln>
-            <a:noFill/>
-          </a:ln>
-          <a:effectLst/>
-        </p:spPr>
-        <p:txBody>
-          <a:bodyPr rtlCol="0" anchor="ctr" wrap="square"/>
-          <a:lstStyle/>
-          <a:p>
-            <a:pPr algn="ctr"/>
-          </a:p>
-        </p:txBody>
-      </p:sp>
-      <p:sp>
-        <p:nvSpPr>
-          <p:cNvPr id="29" name="TextBox 28"/>
+          <p:cNvPr id="50" name="TextBox 49"/>
           <p:cNvSpPr txBox="1"/>
           <p:nvPr/>
         </p:nvSpPr>
@@ -13737,7 +16195,7 @@
       </p:sp>
       <p:sp>
         <p:nvSpPr>
-          <p:cNvPr id="30" name="TextBox 29"/>
+          <p:cNvPr id="51" name="TextBox 50"/>
           <p:cNvSpPr txBox="1"/>
           <p:nvPr/>
         </p:nvSpPr>
